--- a/pitch/Bare-Metal-Mafia_Pitch.pptx
+++ b/pitch/Bare-Metal-Mafia_Pitch.pptx
@@ -5,7 +5,7 @@
     <p:sldMasterId id="2147483660" r:id="rId1"/>
   </p:sldMasterIdLst>
   <p:notesMasterIdLst>
-    <p:notesMasterId r:id="rId13"/>
+    <p:notesMasterId r:id="rId16"/>
   </p:notesMasterIdLst>
   <p:sldIdLst>
     <p:sldId id="256" r:id="rId2"/>
@@ -13,46 +13,50 @@
     <p:sldId id="258" r:id="rId4"/>
     <p:sldId id="259" r:id="rId5"/>
     <p:sldId id="265" r:id="rId6"/>
-    <p:sldId id="260" r:id="rId7"/>
-    <p:sldId id="261" r:id="rId8"/>
-    <p:sldId id="262" r:id="rId9"/>
-    <p:sldId id="266" r:id="rId10"/>
-    <p:sldId id="263" r:id="rId11"/>
-    <p:sldId id="264" r:id="rId12"/>
+    <p:sldId id="267" r:id="rId7"/>
+    <p:sldId id="268" r:id="rId8"/>
+    <p:sldId id="269" r:id="rId9"/>
+    <p:sldId id="260" r:id="rId10"/>
+    <p:sldId id="261" r:id="rId11"/>
+    <p:sldId id="262" r:id="rId12"/>
+    <p:sldId id="266" r:id="rId13"/>
+    <p:sldId id="263" r:id="rId14"/>
+    <p:sldId id="264" r:id="rId15"/>
   </p:sldIdLst>
   <p:sldSz cx="9144000" cy="5143500" type="screen16x9"/>
   <p:notesSz cx="6858000" cy="9144000"/>
   <p:embeddedFontLst>
     <p:embeddedFont>
       <p:font typeface="Consolas" panose="020B0609020204030204" pitchFamily="49" charset="0"/>
-      <p:regular r:id="rId14"/>
-      <p:bold r:id="rId15"/>
-      <p:italic r:id="rId16"/>
-      <p:boldItalic r:id="rId17"/>
+      <p:regular r:id="rId17"/>
+      <p:bold r:id="rId18"/>
+      <p:italic r:id="rId19"/>
+      <p:boldItalic r:id="rId20"/>
     </p:embeddedFont>
     <p:embeddedFont>
       <p:font typeface="Inter" panose="020B0604020202020204" charset="0"/>
-      <p:regular r:id="rId18"/>
-      <p:bold r:id="rId19"/>
-      <p:italic r:id="rId20"/>
-      <p:boldItalic r:id="rId21"/>
+      <p:regular r:id="rId21"/>
+      <p:bold r:id="rId22"/>
+      <p:italic r:id="rId23"/>
+      <p:boldItalic r:id="rId24"/>
     </p:embeddedFont>
     <p:embeddedFont>
       <p:font typeface="Inter ExtraBold" panose="020B0604020202020204" charset="0"/>
-      <p:bold r:id="rId22"/>
-      <p:boldItalic r:id="rId23"/>
-    </p:embeddedFont>
-    <p:embeddedFont>
-      <p:font typeface="Roboto" panose="02000000000000000000" pitchFamily="2" charset="0"/>
-      <p:regular r:id="rId24"/>
       <p:bold r:id="rId25"/>
       <p:italic r:id="rId26"/>
       <p:boldItalic r:id="rId27"/>
     </p:embeddedFont>
     <p:embeddedFont>
-      <p:font typeface="Sora" panose="020B0604020202020204" charset="0"/>
+      <p:font typeface="Roboto" panose="02000000000000000000" pitchFamily="2" charset="0"/>
       <p:regular r:id="rId28"/>
       <p:bold r:id="rId29"/>
+      <p:italic r:id="rId30"/>
+      <p:boldItalic r:id="rId31"/>
+    </p:embeddedFont>
+    <p:embeddedFont>
+      <p:font typeface="Sora" panose="020B0604020202020204" charset="0"/>
+      <p:regular r:id="rId32"/>
+      <p:bold r:id="rId33"/>
     </p:embeddedFont>
   </p:embeddedFontLst>
   <p:defaultTextStyle>
@@ -846,7 +850,7 @@
   <p:cSld>
     <p:spTree>
       <p:nvGrpSpPr>
-        <p:cNvPr id="1" name="Shape 120"/>
+        <p:cNvPr id="1" name="Shape 112"/>
         <p:cNvGrpSpPr/>
         <p:nvPr/>
       </p:nvGrpSpPr>
@@ -860,7 +864,7 @@
       </p:grpSpPr>
       <p:sp>
         <p:nvSpPr>
-          <p:cNvPr id="121" name="Google Shape;121;h6b2788cdbe65c0ea_1_171:notes"/>
+          <p:cNvPr id="113" name="Google Shape;113;h6b2788cdbe65c0ea_1_164:notes"/>
           <p:cNvSpPr>
             <a:spLocks noGrp="1" noRot="1" noChangeAspect="1"/>
           </p:cNvSpPr>
@@ -870,7 +874,7 @@
         </p:nvSpPr>
         <p:spPr>
           <a:xfrm>
-            <a:off x="381000" y="685800"/>
+            <a:off x="381300" y="685800"/>
             <a:ext cx="6096000" cy="3429000"/>
           </a:xfrm>
           <a:custGeom>
@@ -901,7 +905,7 @@
       </p:sp>
       <p:sp>
         <p:nvSpPr>
-          <p:cNvPr id="122" name="Google Shape;122;h6b2788cdbe65c0ea_1_171:notes"/>
+          <p:cNvPr id="114" name="Google Shape;114;h6b2788cdbe65c0ea_1_164:notes"/>
           <p:cNvSpPr txBox="1">
             <a:spLocks noGrp="1"/>
           </p:cNvSpPr>
@@ -925,7 +929,22 @@
           <a:lstStyle/>
           <a:p>
             <a:r>
-              <a:t>(~15 s) Everything is open source on GitHub. Scan the code. Come find us and we'll run the hairdryer demo live.</a:t>
+              <a:t>(~40 s) Three steps.</a:t>
+            </a:r>
+          </a:p>
+          <a:p>
+            <a:r>
+              <a:t>One: the core stays open source in the Eclipse SDV ecosystem, free to adopt. That builds trust and reach.</a:t>
+            </a:r>
+          </a:p>
+          <a:p>
+            <a:r>
+              <a:t>Two: we earn on integration. OEMs and Tier-1s pay for porting to their sensors and ECUs and for Euro NCAP validation support.</a:t>
+            </a:r>
+          </a:p>
+          <a:p>
+            <a:r>
+              <a:t>Three: once in the car, we deliver new features over the air, new mitigation actions or bus and fleet variants, as licensed upgrades.</a:t>
             </a:r>
           </a:p>
         </p:txBody>
@@ -939,6 +958,176 @@
 </file>
 
 <file path=ppt/notesSlides/notesSlide11.xml><?xml version="1.0" encoding="utf-8"?>
+<p:notes xmlns:a="http://schemas.openxmlformats.org/drawingml/2006/main" xmlns:r="http://schemas.openxmlformats.org/officeDocument/2006/relationships" xmlns:p="http://schemas.openxmlformats.org/presentationml/2006/main">
+  <p:cSld>
+    <p:spTree>
+      <p:nvGrpSpPr>
+        <p:cNvPr id="1" name=""/>
+        <p:cNvGrpSpPr/>
+        <p:nvPr/>
+      </p:nvGrpSpPr>
+      <p:grpSpPr>
+        <a:xfrm>
+          <a:off x="0" y="0"/>
+          <a:ext cx="0" cy="0"/>
+          <a:chOff x="0" y="0"/>
+          <a:chExt cx="0" cy="0"/>
+        </a:xfrm>
+      </p:grpSpPr>
+      <p:sp>
+        <p:nvSpPr>
+          <p:cNvPr id="2" name="Slide Image Placeholder 1"/>
+          <p:cNvSpPr>
+            <a:spLocks noGrp="1" noRot="1" noChangeAspect="1"/>
+          </p:cNvSpPr>
+          <p:nvPr>
+            <p:ph type="sldImg" idx="2"/>
+          </p:nvPr>
+        </p:nvSpPr>
+        <p:spPr>
+          <a:xfrm>
+            <a:off x="381000" y="685800"/>
+            <a:ext cx="6096000" cy="3429000"/>
+          </a:xfrm>
+        </p:spPr>
+      </p:sp>
+      <p:sp>
+        <p:nvSpPr>
+          <p:cNvPr id="3" name="Notes Placeholder 2"/>
+          <p:cNvSpPr>
+            <a:spLocks noGrp="1"/>
+          </p:cNvSpPr>
+          <p:nvPr>
+            <p:ph type="body" idx="1"/>
+          </p:nvPr>
+        </p:nvSpPr>
+        <p:spPr/>
+        <p:txBody>
+          <a:bodyPr/>
+          <a:lstStyle/>
+          <a:p>
+            <a:r>
+              <a:t>(~50 s) Honest status.</a:t>
+            </a:r>
+          </a:p>
+          <a:p>
+            <a:r>
+              <a:t>Done: a real temperature sensor, a real window ECU, the Guardian running in AutoSD on a Pi, the fail-safe logic, dashboard and Telegram alerts.</a:t>
+            </a:r>
+          </a:p>
+          <a:p>
+            <a:r>
+              <a:t>Next: openDuT, which switches the topology from simulation to hardware at the push of a button. That's the one Definition-of-Done item we didn't reach. Replacing our CDA simulator with the real OpenSOVD CDA. A cold warning: implemented on a branch, not merged yet. Humidity in the decision: we already measure it, and a body overheats faster in humid air. And sensor confidence plus rate of rise, so we escalate before the threshold.</a:t>
+            </a:r>
+          </a:p>
+        </p:txBody>
+      </p:sp>
+    </p:spTree>
+  </p:cSld>
+  <p:clrMapOvr>
+    <a:masterClrMapping/>
+  </p:clrMapOvr>
+</p:notes>
+</file>
+
+<file path=ppt/notesSlides/notesSlide12.xml><?xml version="1.0" encoding="utf-8"?>
+<p:notes xmlns:a="http://schemas.openxmlformats.org/drawingml/2006/main" xmlns:r="http://schemas.openxmlformats.org/officeDocument/2006/relationships" xmlns:p="http://schemas.openxmlformats.org/presentationml/2006/main" showMasterSp="0" showMasterPhAnim="0">
+  <p:cSld>
+    <p:spTree>
+      <p:nvGrpSpPr>
+        <p:cNvPr id="1" name="Shape 120"/>
+        <p:cNvGrpSpPr/>
+        <p:nvPr/>
+      </p:nvGrpSpPr>
+      <p:grpSpPr>
+        <a:xfrm>
+          <a:off x="0" y="0"/>
+          <a:ext cx="0" cy="0"/>
+          <a:chOff x="0" y="0"/>
+          <a:chExt cx="0" cy="0"/>
+        </a:xfrm>
+      </p:grpSpPr>
+      <p:sp>
+        <p:nvSpPr>
+          <p:cNvPr id="121" name="Google Shape;121;h6b2788cdbe65c0ea_1_171:notes"/>
+          <p:cNvSpPr>
+            <a:spLocks noGrp="1" noRot="1" noChangeAspect="1"/>
+          </p:cNvSpPr>
+          <p:nvPr>
+            <p:ph type="sldImg" idx="2"/>
+          </p:nvPr>
+        </p:nvSpPr>
+        <p:spPr>
+          <a:xfrm>
+            <a:off x="381000" y="685800"/>
+            <a:ext cx="6096000" cy="3429000"/>
+          </a:xfrm>
+          <a:custGeom>
+            <a:avLst/>
+            <a:gdLst/>
+            <a:ahLst/>
+            <a:cxnLst/>
+            <a:rect l="l" t="t" r="r" b="b"/>
+            <a:pathLst>
+              <a:path w="120000" h="120000" extrusionOk="0">
+                <a:moveTo>
+                  <a:pt x="0" y="0"/>
+                </a:moveTo>
+                <a:lnTo>
+                  <a:pt x="120000" y="0"/>
+                </a:lnTo>
+                <a:lnTo>
+                  <a:pt x="120000" y="120000"/>
+                </a:lnTo>
+                <a:lnTo>
+                  <a:pt x="0" y="120000"/>
+                </a:lnTo>
+                <a:close/>
+              </a:path>
+            </a:pathLst>
+          </a:custGeom>
+        </p:spPr>
+      </p:sp>
+      <p:sp>
+        <p:nvSpPr>
+          <p:cNvPr id="122" name="Google Shape;122;h6b2788cdbe65c0ea_1_171:notes"/>
+          <p:cNvSpPr txBox="1">
+            <a:spLocks noGrp="1"/>
+          </p:cNvSpPr>
+          <p:nvPr>
+            <p:ph type="body" idx="1"/>
+          </p:nvPr>
+        </p:nvSpPr>
+        <p:spPr>
+          <a:xfrm>
+            <a:off x="685800" y="4343400"/>
+            <a:ext cx="5486400" cy="4114800"/>
+          </a:xfrm>
+          <a:prstGeom prst="rect">
+            <a:avLst/>
+          </a:prstGeom>
+        </p:spPr>
+        <p:txBody>
+          <a:bodyPr spcFirstLastPara="1" wrap="square" lIns="91425" tIns="91425" rIns="91425" bIns="91425" anchor="t" anchorCtr="0">
+            <a:noAutofit/>
+          </a:bodyPr>
+          <a:lstStyle/>
+          <a:p>
+            <a:r>
+              <a:t>(~15 s) Everything is open source on GitHub. Scan the code. Come find us and we'll run the hairdryer demo live.</a:t>
+            </a:r>
+          </a:p>
+        </p:txBody>
+      </p:sp>
+    </p:spTree>
+  </p:cSld>
+  <p:clrMapOvr>
+    <a:masterClrMapping/>
+  </p:clrMapOvr>
+</p:notes>
+</file>
+
+<file path=ppt/notesSlides/notesSlide13.xml><?xml version="1.0" encoding="utf-8"?>
 <p:notes xmlns:a="http://schemas.openxmlformats.org/drawingml/2006/main" xmlns:r="http://schemas.openxmlformats.org/officeDocument/2006/relationships" xmlns:p="http://schemas.openxmlformats.org/presentationml/2006/main" showMasterSp="0" showMasterPhAnim="0">
   <p:cSld>
     <p:spTree>
@@ -1450,6 +1639,128 @@
 </file>
 
 <file path=ppt/notesSlides/notesSlide6.xml><?xml version="1.0" encoding="utf-8"?>
+<p:notes xmlns:a="http://schemas.openxmlformats.org/drawingml/2006/main" xmlns:r="http://schemas.openxmlformats.org/officeDocument/2006/relationships" xmlns:p="http://schemas.openxmlformats.org/presentationml/2006/main">
+  <p:cSld>
+    <p:spTree>
+      <p:nvGrpSpPr>
+        <p:cNvPr id="1" name=""/>
+        <p:cNvGrpSpPr/>
+        <p:nvPr/>
+      </p:nvGrpSpPr>
+      <p:grpSpPr>
+        <a:xfrm>
+          <a:off x="0" y="0"/>
+          <a:ext cx="0" cy="0"/>
+          <a:chOff x="0" y="0"/>
+          <a:chExt cx="0" cy="0"/>
+        </a:xfrm>
+      </p:grpSpPr>
+      <p:sp>
+        <p:nvSpPr>
+          <p:cNvPr id="2" name="Folienbildplatzhalter 1"/>
+          <p:cNvSpPr>
+            <a:spLocks noGrp="1" noRot="1" noChangeAspect="1"/>
+          </p:cNvSpPr>
+          <p:nvPr>
+            <p:ph type="sldImg"/>
+          </p:nvPr>
+        </p:nvSpPr>
+        <p:spPr/>
+      </p:sp>
+      <p:sp>
+        <p:nvSpPr>
+          <p:cNvPr id="3" name="Notizenplatzhalter 2"/>
+          <p:cNvSpPr>
+            <a:spLocks noGrp="1"/>
+          </p:cNvSpPr>
+          <p:nvPr>
+            <p:ph type="body" idx="1"/>
+          </p:nvPr>
+        </p:nvSpPr>
+        <p:spPr/>
+        <p:txBody>
+          <a:bodyPr/>
+          <a:lstStyle/>
+          <a:p>
+            <a:endParaRPr lang="de-DE"/>
+          </a:p>
+        </p:txBody>
+      </p:sp>
+    </p:spTree>
+    <p:extLst>
+      <p:ext uri="{BB962C8B-B14F-4D97-AF65-F5344CB8AC3E}">
+        <p14:creationId xmlns:p14="http://schemas.microsoft.com/office/powerpoint/2010/main" val="2567651437"/>
+      </p:ext>
+    </p:extLst>
+  </p:cSld>
+  <p:clrMapOvr>
+    <a:masterClrMapping/>
+  </p:clrMapOvr>
+</p:notes>
+</file>
+
+<file path=ppt/notesSlides/notesSlide7.xml><?xml version="1.0" encoding="utf-8"?>
+<p:notes xmlns:a="http://schemas.openxmlformats.org/drawingml/2006/main" xmlns:r="http://schemas.openxmlformats.org/officeDocument/2006/relationships" xmlns:p="http://schemas.openxmlformats.org/presentationml/2006/main">
+  <p:cSld>
+    <p:spTree>
+      <p:nvGrpSpPr>
+        <p:cNvPr id="1" name=""/>
+        <p:cNvGrpSpPr/>
+        <p:nvPr/>
+      </p:nvGrpSpPr>
+      <p:grpSpPr>
+        <a:xfrm>
+          <a:off x="0" y="0"/>
+          <a:ext cx="0" cy="0"/>
+          <a:chOff x="0" y="0"/>
+          <a:chExt cx="0" cy="0"/>
+        </a:xfrm>
+      </p:grpSpPr>
+      <p:sp>
+        <p:nvSpPr>
+          <p:cNvPr id="2" name="Folienbildplatzhalter 1"/>
+          <p:cNvSpPr>
+            <a:spLocks noGrp="1" noRot="1" noChangeAspect="1"/>
+          </p:cNvSpPr>
+          <p:nvPr>
+            <p:ph type="sldImg"/>
+          </p:nvPr>
+        </p:nvSpPr>
+        <p:spPr/>
+      </p:sp>
+      <p:sp>
+        <p:nvSpPr>
+          <p:cNvPr id="3" name="Notizenplatzhalter 2"/>
+          <p:cNvSpPr>
+            <a:spLocks noGrp="1"/>
+          </p:cNvSpPr>
+          <p:nvPr>
+            <p:ph type="body" idx="1"/>
+          </p:nvPr>
+        </p:nvSpPr>
+        <p:spPr/>
+        <p:txBody>
+          <a:bodyPr/>
+          <a:lstStyle/>
+          <a:p>
+            <a:endParaRPr lang="de-DE"/>
+          </a:p>
+        </p:txBody>
+      </p:sp>
+    </p:spTree>
+    <p:extLst>
+      <p:ext uri="{BB962C8B-B14F-4D97-AF65-F5344CB8AC3E}">
+        <p14:creationId xmlns:p14="http://schemas.microsoft.com/office/powerpoint/2010/main" val="2888557868"/>
+      </p:ext>
+    </p:extLst>
+  </p:cSld>
+  <p:clrMapOvr>
+    <a:masterClrMapping/>
+  </p:clrMapOvr>
+</p:notes>
+</file>
+
+<file path=ppt/notesSlides/notesSlide8.xml><?xml version="1.0" encoding="utf-8"?>
 <p:notes xmlns:a="http://schemas.openxmlformats.org/drawingml/2006/main" xmlns:r="http://schemas.openxmlformats.org/officeDocument/2006/relationships" xmlns:p="http://schemas.openxmlformats.org/presentationml/2006/main" showMasterSp="0" showMasterPhAnim="0">
   <p:cSld>
     <p:spTree>
@@ -1566,7 +1877,7 @@
 </p:notes>
 </file>
 
-<file path=ppt/notesSlides/notesSlide7.xml><?xml version="1.0" encoding="utf-8"?>
+<file path=ppt/notesSlides/notesSlide9.xml><?xml version="1.0" encoding="utf-8"?>
 <p:notes xmlns:a="http://schemas.openxmlformats.org/drawingml/2006/main" xmlns:r="http://schemas.openxmlformats.org/officeDocument/2006/relationships" xmlns:p="http://schemas.openxmlformats.org/presentationml/2006/main" showMasterSp="0" showMasterPhAnim="0">
   <p:cSld>
     <p:spTree>
@@ -1671,191 +1982,6 @@
           <a:p>
             <a:r>
               <a:t>We don't sell a sensor. We sell the logic that works with any sensor, and that actually mitigates: cooling, window, alarm.</a:t>
-            </a:r>
-          </a:p>
-        </p:txBody>
-      </p:sp>
-    </p:spTree>
-  </p:cSld>
-  <p:clrMapOvr>
-    <a:masterClrMapping/>
-  </p:clrMapOvr>
-</p:notes>
-</file>
-
-<file path=ppt/notesSlides/notesSlide8.xml><?xml version="1.0" encoding="utf-8"?>
-<p:notes xmlns:a="http://schemas.openxmlformats.org/drawingml/2006/main" xmlns:r="http://schemas.openxmlformats.org/officeDocument/2006/relationships" xmlns:p="http://schemas.openxmlformats.org/presentationml/2006/main" showMasterSp="0" showMasterPhAnim="0">
-  <p:cSld>
-    <p:spTree>
-      <p:nvGrpSpPr>
-        <p:cNvPr id="1" name="Shape 112"/>
-        <p:cNvGrpSpPr/>
-        <p:nvPr/>
-      </p:nvGrpSpPr>
-      <p:grpSpPr>
-        <a:xfrm>
-          <a:off x="0" y="0"/>
-          <a:ext cx="0" cy="0"/>
-          <a:chOff x="0" y="0"/>
-          <a:chExt cx="0" cy="0"/>
-        </a:xfrm>
-      </p:grpSpPr>
-      <p:sp>
-        <p:nvSpPr>
-          <p:cNvPr id="113" name="Google Shape;113;h6b2788cdbe65c0ea_1_164:notes"/>
-          <p:cNvSpPr>
-            <a:spLocks noGrp="1" noRot="1" noChangeAspect="1"/>
-          </p:cNvSpPr>
-          <p:nvPr>
-            <p:ph type="sldImg" idx="2"/>
-          </p:nvPr>
-        </p:nvSpPr>
-        <p:spPr>
-          <a:xfrm>
-            <a:off x="381300" y="685800"/>
-            <a:ext cx="6096000" cy="3429000"/>
-          </a:xfrm>
-          <a:custGeom>
-            <a:avLst/>
-            <a:gdLst/>
-            <a:ahLst/>
-            <a:cxnLst/>
-            <a:rect l="l" t="t" r="r" b="b"/>
-            <a:pathLst>
-              <a:path w="120000" h="120000" extrusionOk="0">
-                <a:moveTo>
-                  <a:pt x="0" y="0"/>
-                </a:moveTo>
-                <a:lnTo>
-                  <a:pt x="120000" y="0"/>
-                </a:lnTo>
-                <a:lnTo>
-                  <a:pt x="120000" y="120000"/>
-                </a:lnTo>
-                <a:lnTo>
-                  <a:pt x="0" y="120000"/>
-                </a:lnTo>
-                <a:close/>
-              </a:path>
-            </a:pathLst>
-          </a:custGeom>
-        </p:spPr>
-      </p:sp>
-      <p:sp>
-        <p:nvSpPr>
-          <p:cNvPr id="114" name="Google Shape;114;h6b2788cdbe65c0ea_1_164:notes"/>
-          <p:cNvSpPr txBox="1">
-            <a:spLocks noGrp="1"/>
-          </p:cNvSpPr>
-          <p:nvPr>
-            <p:ph type="body" idx="1"/>
-          </p:nvPr>
-        </p:nvSpPr>
-        <p:spPr>
-          <a:xfrm>
-            <a:off x="685800" y="4343400"/>
-            <a:ext cx="5486400" cy="4114800"/>
-          </a:xfrm>
-          <a:prstGeom prst="rect">
-            <a:avLst/>
-          </a:prstGeom>
-        </p:spPr>
-        <p:txBody>
-          <a:bodyPr spcFirstLastPara="1" wrap="square" lIns="91425" tIns="91425" rIns="91425" bIns="91425" anchor="t" anchorCtr="0">
-            <a:noAutofit/>
-          </a:bodyPr>
-          <a:lstStyle/>
-          <a:p>
-            <a:r>
-              <a:t>(~40 s) Three steps.</a:t>
-            </a:r>
-          </a:p>
-          <a:p>
-            <a:r>
-              <a:t>One: the core stays open source in the Eclipse SDV ecosystem, free to adopt. That builds trust and reach.</a:t>
-            </a:r>
-          </a:p>
-          <a:p>
-            <a:r>
-              <a:t>Two: we earn on integration. OEMs and Tier-1s pay for porting to their sensors and ECUs and for Euro NCAP validation support.</a:t>
-            </a:r>
-          </a:p>
-          <a:p>
-            <a:r>
-              <a:t>Three: once in the car, we deliver new features over the air, new mitigation actions or bus and fleet variants, as licensed upgrades.</a:t>
-            </a:r>
-          </a:p>
-        </p:txBody>
-      </p:sp>
-    </p:spTree>
-  </p:cSld>
-  <p:clrMapOvr>
-    <a:masterClrMapping/>
-  </p:clrMapOvr>
-</p:notes>
-</file>
-
-<file path=ppt/notesSlides/notesSlide9.xml><?xml version="1.0" encoding="utf-8"?>
-<p:notes xmlns:a="http://schemas.openxmlformats.org/drawingml/2006/main" xmlns:r="http://schemas.openxmlformats.org/officeDocument/2006/relationships" xmlns:p="http://schemas.openxmlformats.org/presentationml/2006/main">
-  <p:cSld>
-    <p:spTree>
-      <p:nvGrpSpPr>
-        <p:cNvPr id="1" name=""/>
-        <p:cNvGrpSpPr/>
-        <p:nvPr/>
-      </p:nvGrpSpPr>
-      <p:grpSpPr>
-        <a:xfrm>
-          <a:off x="0" y="0"/>
-          <a:ext cx="0" cy="0"/>
-          <a:chOff x="0" y="0"/>
-          <a:chExt cx="0" cy="0"/>
-        </a:xfrm>
-      </p:grpSpPr>
-      <p:sp>
-        <p:nvSpPr>
-          <p:cNvPr id="2" name="Slide Image Placeholder 1"/>
-          <p:cNvSpPr>
-            <a:spLocks noGrp="1" noRot="1" noChangeAspect="1"/>
-          </p:cNvSpPr>
-          <p:nvPr>
-            <p:ph type="sldImg" idx="2"/>
-          </p:nvPr>
-        </p:nvSpPr>
-        <p:spPr>
-          <a:xfrm>
-            <a:off x="381000" y="685800"/>
-            <a:ext cx="6096000" cy="3429000"/>
-          </a:xfrm>
-        </p:spPr>
-      </p:sp>
-      <p:sp>
-        <p:nvSpPr>
-          <p:cNvPr id="3" name="Notes Placeholder 2"/>
-          <p:cNvSpPr>
-            <a:spLocks noGrp="1"/>
-          </p:cNvSpPr>
-          <p:nvPr>
-            <p:ph type="body" idx="1"/>
-          </p:nvPr>
-        </p:nvSpPr>
-        <p:spPr/>
-        <p:txBody>
-          <a:bodyPr/>
-          <a:lstStyle/>
-          <a:p>
-            <a:r>
-              <a:t>(~50 s) Honest status.</a:t>
-            </a:r>
-          </a:p>
-          <a:p>
-            <a:r>
-              <a:t>Done: a real temperature sensor, a real window ECU, the Guardian running in AutoSD on a Pi, the fail-safe logic, dashboard and Telegram alerts.</a:t>
-            </a:r>
-          </a:p>
-          <a:p>
-            <a:r>
-              <a:t>Next: openDuT, which switches the topology from simulation to hardware at the push of a button. That's the one Definition-of-Done item we didn't reach. Replacing our CDA simulator with the real OpenSOVD CDA. A cold warning: implemented on a branch, not merged yet. Humidity in the decision: we already measure it, and a body overheats faster in humid air. And sensor confidence plus rate of rise, so we escalate before the threshold.</a:t>
             </a:r>
           </a:p>
         </p:txBody>
@@ -8032,6 +8158,2225 @@
   <p:cSld>
     <p:spTree>
       <p:nvGrpSpPr>
+        <p:cNvPr id="1" name="Shape 107"/>
+        <p:cNvGrpSpPr/>
+        <p:nvPr/>
+      </p:nvGrpSpPr>
+      <p:grpSpPr>
+        <a:xfrm>
+          <a:off x="0" y="0"/>
+          <a:ext cx="0" cy="0"/>
+          <a:chOff x="0" y="0"/>
+          <a:chExt cx="0" cy="0"/>
+        </a:xfrm>
+      </p:grpSpPr>
+      <p:sp>
+        <p:nvSpPr>
+          <p:cNvPr id="108" name="Google Shape;108;p19"/>
+          <p:cNvSpPr txBox="1"/>
+          <p:nvPr/>
+        </p:nvSpPr>
+        <p:spPr>
+          <a:xfrm>
+            <a:off x="971300" y="4808250"/>
+            <a:ext cx="5334600" cy="292500"/>
+          </a:xfrm>
+          <a:prstGeom prst="rect">
+            <a:avLst/>
+          </a:prstGeom>
+          <a:noFill/>
+          <a:ln>
+            <a:noFill/>
+          </a:ln>
+        </p:spPr>
+        <p:txBody>
+          <a:bodyPr spcFirstLastPara="1" wrap="square" lIns="91425" tIns="91425" rIns="91425" bIns="91425" anchor="t" anchorCtr="0">
+            <a:spAutoFit/>
+          </a:bodyPr>
+          <a:lstStyle/>
+          <a:p>
+            <a:pPr marL="0" lvl="0" indent="0" algn="l" rtl="0">
+              <a:spcBef>
+                <a:spcPts val="0"/>
+              </a:spcBef>
+              <a:spcAft>
+                <a:spcPts val="0"/>
+              </a:spcAft>
+              <a:buNone/>
+            </a:pPr>
+            <a:r>
+              <a:rPr lang="en" sz="700">
+                <a:solidFill>
+                  <a:srgbClr val="595959"/>
+                </a:solidFill>
+                <a:latin typeface="Inter"/>
+                <a:ea typeface="Inter"/>
+                <a:cs typeface="Inter"/>
+                <a:sym typeface="Inter"/>
+              </a:rPr>
+              <a:t>Copyright© Eclipse Foundation AISBL and contributors. Made available under CC-BY-SA 4.0 International.</a:t>
+            </a:r>
+            <a:endParaRPr sz="700">
+              <a:solidFill>
+                <a:srgbClr val="595959"/>
+              </a:solidFill>
+              <a:latin typeface="Inter"/>
+              <a:ea typeface="Inter"/>
+              <a:cs typeface="Inter"/>
+              <a:sym typeface="Inter"/>
+            </a:endParaRPr>
+          </a:p>
+        </p:txBody>
+      </p:sp>
+      <p:pic>
+        <p:nvPicPr>
+          <p:cNvPr id="109" name="Google Shape;109;p19" title="SDV_logo-color01 (1).png"/>
+          <p:cNvPicPr preferRelativeResize="0"/>
+          <p:nvPr/>
+        </p:nvPicPr>
+        <p:blipFill>
+          <a:blip r:embed="rId3">
+            <a:alphaModFix/>
+          </a:blip>
+          <a:stretch>
+            <a:fillRect/>
+          </a:stretch>
+        </p:blipFill>
+        <p:spPr>
+          <a:xfrm>
+            <a:off x="225475" y="4757277"/>
+            <a:ext cx="684027" cy="255500"/>
+          </a:xfrm>
+          <a:prstGeom prst="rect">
+            <a:avLst/>
+          </a:prstGeom>
+          <a:noFill/>
+          <a:ln>
+            <a:noFill/>
+          </a:ln>
+        </p:spPr>
+      </p:pic>
+      <p:sp>
+        <p:nvSpPr>
+          <p:cNvPr id="111" name="Google Shape;111;p19"/>
+          <p:cNvSpPr txBox="1"/>
+          <p:nvPr/>
+        </p:nvSpPr>
+        <p:spPr>
+          <a:xfrm>
+            <a:off x="712125" y="628750"/>
+            <a:ext cx="7360200" cy="464700"/>
+          </a:xfrm>
+          <a:prstGeom prst="rect">
+            <a:avLst/>
+          </a:prstGeom>
+          <a:noFill/>
+          <a:ln>
+            <a:noFill/>
+          </a:ln>
+        </p:spPr>
+        <p:txBody>
+          <a:bodyPr spcFirstLastPara="1" wrap="square" lIns="91425" tIns="91425" rIns="91425" bIns="91425" anchor="t" anchorCtr="0">
+            <a:spAutoFit/>
+          </a:bodyPr>
+          <a:lstStyle/>
+          <a:p>
+            <a:pPr marL="0" lvl="0" indent="0" algn="l" rtl="0">
+              <a:spcBef>
+                <a:spcPts val="0"/>
+              </a:spcBef>
+              <a:spcAft>
+                <a:spcPts val="0"/>
+              </a:spcAft>
+              <a:buClr>
+                <a:schemeClr val="dk1"/>
+              </a:buClr>
+              <a:buSzPts val="990"/>
+              <a:buFont typeface="Arial"/>
+              <a:buNone/>
+            </a:pPr>
+            <a:r>
+              <a:rPr lang="en" sz="1820" b="1">
+                <a:solidFill>
+                  <a:srgbClr val="701C7F"/>
+                </a:solidFill>
+                <a:latin typeface="Inter"/>
+                <a:ea typeface="Inter"/>
+                <a:cs typeface="Inter"/>
+                <a:sym typeface="Inter"/>
+              </a:rPr>
+              <a:t>The Market &amp; Competition</a:t>
+            </a:r>
+            <a:endParaRPr sz="400">
+              <a:latin typeface="Inter ExtraBold"/>
+              <a:ea typeface="Inter ExtraBold"/>
+              <a:cs typeface="Inter ExtraBold"/>
+              <a:sym typeface="Inter ExtraBold"/>
+            </a:endParaRPr>
+          </a:p>
+        </p:txBody>
+      </p:sp>
+      <p:sp>
+        <p:nvSpPr>
+          <p:cNvPr id="112" name="TextBox 111"/>
+          <p:cNvSpPr txBox="1"/>
+          <p:nvPr/>
+        </p:nvSpPr>
+        <p:spPr>
+          <a:xfrm>
+            <a:off x="731520" y="1234440"/>
+            <a:ext cx="3657600" cy="274320"/>
+          </a:xfrm>
+          <a:prstGeom prst="rect">
+            <a:avLst/>
+          </a:prstGeom>
+          <a:noFill/>
+        </p:spPr>
+        <p:txBody>
+          <a:bodyPr wrap="square" lIns="0" tIns="0" rIns="0" bIns="0" anchor="t">
+            <a:spAutoFit/>
+          </a:bodyPr>
+          <a:lstStyle/>
+          <a:p>
+            <a:pPr algn="l"/>
+            <a:r>
+              <a:rPr sz="1200" b="1" i="0">
+                <a:solidFill>
+                  <a:srgbClr val="DB521D"/>
+                </a:solidFill>
+                <a:latin typeface="Inter"/>
+              </a:rPr>
+              <a:t>Why now</a:t>
+            </a:r>
+          </a:p>
+        </p:txBody>
+      </p:sp>
+      <p:sp>
+        <p:nvSpPr>
+          <p:cNvPr id="113" name="TextBox 112"/>
+          <p:cNvSpPr txBox="1"/>
+          <p:nvPr/>
+        </p:nvSpPr>
+        <p:spPr>
+          <a:xfrm>
+            <a:off x="731520" y="1554480"/>
+            <a:ext cx="1234440" cy="685800"/>
+          </a:xfrm>
+          <a:prstGeom prst="rect">
+            <a:avLst/>
+          </a:prstGeom>
+          <a:noFill/>
+        </p:spPr>
+        <p:txBody>
+          <a:bodyPr wrap="square" lIns="0" tIns="0" rIns="0" bIns="0" anchor="ctr">
+            <a:spAutoFit/>
+          </a:bodyPr>
+          <a:lstStyle/>
+          <a:p>
+            <a:pPr algn="l"/>
+            <a:r>
+              <a:rPr sz="2800" b="1" i="0">
+                <a:solidFill>
+                  <a:srgbClr val="DB521D"/>
+                </a:solidFill>
+                <a:latin typeface="Inter"/>
+              </a:rPr>
+              <a:t>~37</a:t>
+            </a:r>
+          </a:p>
+        </p:txBody>
+      </p:sp>
+      <p:sp>
+        <p:nvSpPr>
+          <p:cNvPr id="114" name="TextBox 113"/>
+          <p:cNvSpPr txBox="1"/>
+          <p:nvPr/>
+        </p:nvSpPr>
+        <p:spPr>
+          <a:xfrm>
+            <a:off x="1965960" y="1554480"/>
+            <a:ext cx="2103120" cy="685800"/>
+          </a:xfrm>
+          <a:prstGeom prst="rect">
+            <a:avLst/>
+          </a:prstGeom>
+          <a:noFill/>
+        </p:spPr>
+        <p:txBody>
+          <a:bodyPr wrap="square" lIns="0" tIns="0" rIns="0" bIns="0" anchor="ctr">
+            <a:spAutoFit/>
+          </a:bodyPr>
+          <a:lstStyle/>
+          <a:p>
+            <a:pPr algn="l"/>
+            <a:r>
+              <a:rPr sz="1100" b="0" i="0">
+                <a:solidFill>
+                  <a:srgbClr val="595959"/>
+                </a:solidFill>
+                <a:latin typeface="Inter"/>
+              </a:rPr>
+              <a:t>kids / year die in</a:t>
+            </a:r>
+          </a:p>
+          <a:p>
+            <a:pPr algn="l"/>
+            <a:r>
+              <a:rPr sz="1100" b="0" i="0">
+                <a:solidFill>
+                  <a:srgbClr val="595959"/>
+                </a:solidFill>
+                <a:latin typeface="Inter"/>
+              </a:rPr>
+              <a:t>hot cars (US)</a:t>
+            </a:r>
+          </a:p>
+        </p:txBody>
+      </p:sp>
+      <p:sp>
+        <p:nvSpPr>
+          <p:cNvPr id="115" name="TextBox 114"/>
+          <p:cNvSpPr txBox="1"/>
+          <p:nvPr/>
+        </p:nvSpPr>
+        <p:spPr>
+          <a:xfrm>
+            <a:off x="731520" y="2377440"/>
+            <a:ext cx="1234440" cy="685800"/>
+          </a:xfrm>
+          <a:prstGeom prst="rect">
+            <a:avLst/>
+          </a:prstGeom>
+          <a:noFill/>
+        </p:spPr>
+        <p:txBody>
+          <a:bodyPr wrap="square" lIns="0" tIns="0" rIns="0" bIns="0" anchor="ctr">
+            <a:spAutoFit/>
+          </a:bodyPr>
+          <a:lstStyle/>
+          <a:p>
+            <a:pPr algn="l"/>
+            <a:r>
+              <a:rPr sz="2800" b="1" i="0">
+                <a:solidFill>
+                  <a:srgbClr val="DB521D"/>
+                </a:solidFill>
+                <a:latin typeface="Inter"/>
+              </a:rPr>
+              <a:t>2025</a:t>
+            </a:r>
+          </a:p>
+        </p:txBody>
+      </p:sp>
+      <p:sp>
+        <p:nvSpPr>
+          <p:cNvPr id="116" name="TextBox 115"/>
+          <p:cNvSpPr txBox="1"/>
+          <p:nvPr/>
+        </p:nvSpPr>
+        <p:spPr>
+          <a:xfrm>
+            <a:off x="1965960" y="2377440"/>
+            <a:ext cx="2103120" cy="685800"/>
+          </a:xfrm>
+          <a:prstGeom prst="rect">
+            <a:avLst/>
+          </a:prstGeom>
+          <a:noFill/>
+        </p:spPr>
+        <p:txBody>
+          <a:bodyPr wrap="square" lIns="0" tIns="0" rIns="0" bIns="0" anchor="ctr">
+            <a:spAutoFit/>
+          </a:bodyPr>
+          <a:lstStyle/>
+          <a:p>
+            <a:pPr algn="l"/>
+            <a:r>
+              <a:rPr sz="1100" b="0" i="0">
+                <a:solidFill>
+                  <a:srgbClr val="595959"/>
+                </a:solidFill>
+                <a:latin typeface="Inter"/>
+              </a:rPr>
+              <a:t>Euro NCAP: only direct</a:t>
+            </a:r>
+          </a:p>
+          <a:p>
+            <a:pPr algn="l"/>
+            <a:r>
+              <a:rPr sz="1100" b="0" i="0">
+                <a:solidFill>
+                  <a:srgbClr val="595959"/>
+                </a:solidFill>
+                <a:latin typeface="Inter"/>
+              </a:rPr>
+              <a:t>sensing scores</a:t>
+            </a:r>
+          </a:p>
+        </p:txBody>
+      </p:sp>
+      <p:sp>
+        <p:nvSpPr>
+          <p:cNvPr id="117" name="TextBox 116"/>
+          <p:cNvSpPr txBox="1"/>
+          <p:nvPr/>
+        </p:nvSpPr>
+        <p:spPr>
+          <a:xfrm>
+            <a:off x="731520" y="3200400"/>
+            <a:ext cx="1234440" cy="685800"/>
+          </a:xfrm>
+          <a:prstGeom prst="rect">
+            <a:avLst/>
+          </a:prstGeom>
+          <a:noFill/>
+        </p:spPr>
+        <p:txBody>
+          <a:bodyPr wrap="square" lIns="0" tIns="0" rIns="0" bIns="0" anchor="ctr">
+            <a:spAutoFit/>
+          </a:bodyPr>
+          <a:lstStyle/>
+          <a:p>
+            <a:pPr algn="l"/>
+            <a:r>
+              <a:rPr sz="2800" b="1" i="0">
+                <a:solidFill>
+                  <a:srgbClr val="DB521D"/>
+                </a:solidFill>
+                <a:latin typeface="Inter"/>
+              </a:rPr>
+              <a:t>$2B</a:t>
+            </a:r>
+          </a:p>
+        </p:txBody>
+      </p:sp>
+      <p:sp>
+        <p:nvSpPr>
+          <p:cNvPr id="118" name="TextBox 117"/>
+          <p:cNvSpPr txBox="1"/>
+          <p:nvPr/>
+        </p:nvSpPr>
+        <p:spPr>
+          <a:xfrm>
+            <a:off x="1965960" y="3200400"/>
+            <a:ext cx="2103120" cy="685800"/>
+          </a:xfrm>
+          <a:prstGeom prst="rect">
+            <a:avLst/>
+          </a:prstGeom>
+          <a:noFill/>
+        </p:spPr>
+        <p:txBody>
+          <a:bodyPr wrap="square" lIns="0" tIns="0" rIns="0" bIns="0" anchor="ctr">
+            <a:spAutoFit/>
+          </a:bodyPr>
+          <a:lstStyle/>
+          <a:p>
+            <a:pPr algn="l"/>
+            <a:r>
+              <a:rPr sz="1100" b="0" i="0">
+                <a:solidFill>
+                  <a:srgbClr val="595959"/>
+                </a:solidFill>
+                <a:latin typeface="Inter"/>
+              </a:rPr>
+              <a:t>CPD market</a:t>
+            </a:r>
+          </a:p>
+          <a:p>
+            <a:pPr algn="l"/>
+            <a:r>
+              <a:rPr sz="1100" b="0" i="0">
+                <a:solidFill>
+                  <a:srgbClr val="595959"/>
+                </a:solidFill>
+                <a:latin typeface="Inter"/>
+              </a:rPr>
+              <a:t>by 2034*</a:t>
+            </a:r>
+          </a:p>
+        </p:txBody>
+      </p:sp>
+      <p:sp>
+        <p:nvSpPr>
+          <p:cNvPr id="119" name="TextBox 118"/>
+          <p:cNvSpPr txBox="1"/>
+          <p:nvPr/>
+        </p:nvSpPr>
+        <p:spPr>
+          <a:xfrm>
+            <a:off x="731520" y="4069080"/>
+            <a:ext cx="3657600" cy="182880"/>
+          </a:xfrm>
+          <a:prstGeom prst="rect">
+            <a:avLst/>
+          </a:prstGeom>
+          <a:noFill/>
+        </p:spPr>
+        <p:txBody>
+          <a:bodyPr wrap="square" lIns="0" tIns="0" rIns="0" bIns="0" anchor="t">
+            <a:spAutoFit/>
+          </a:bodyPr>
+          <a:lstStyle/>
+          <a:p>
+            <a:pPr algn="l"/>
+            <a:r>
+              <a:rPr sz="900" b="0" i="0">
+                <a:solidFill>
+                  <a:srgbClr val="595959"/>
+                </a:solidFill>
+                <a:latin typeface="Inter"/>
+              </a:rPr>
+              <a:t>* analyst estimate (GM Insights), estimates vary</a:t>
+            </a:r>
+          </a:p>
+        </p:txBody>
+      </p:sp>
+      <p:sp>
+        <p:nvSpPr>
+          <p:cNvPr id="120" name="TextBox 119"/>
+          <p:cNvSpPr txBox="1"/>
+          <p:nvPr/>
+        </p:nvSpPr>
+        <p:spPr>
+          <a:xfrm>
+            <a:off x="4572000" y="1234440"/>
+            <a:ext cx="3657600" cy="274320"/>
+          </a:xfrm>
+          <a:prstGeom prst="rect">
+            <a:avLst/>
+          </a:prstGeom>
+          <a:noFill/>
+        </p:spPr>
+        <p:txBody>
+          <a:bodyPr wrap="square" lIns="0" tIns="0" rIns="0" bIns="0" anchor="t">
+            <a:spAutoFit/>
+          </a:bodyPr>
+          <a:lstStyle/>
+          <a:p>
+            <a:pPr algn="l"/>
+            <a:r>
+              <a:rPr sz="1200" b="1" i="0">
+                <a:solidFill>
+                  <a:srgbClr val="595959"/>
+                </a:solidFill>
+                <a:latin typeface="Inter"/>
+              </a:rPr>
+              <a:t>They sell sensor systems</a:t>
+            </a:r>
+          </a:p>
+        </p:txBody>
+      </p:sp>
+      <p:sp>
+        <p:nvSpPr>
+          <p:cNvPr id="121" name="Rounded Rectangle 120"/>
+          <p:cNvSpPr/>
+          <p:nvPr/>
+        </p:nvSpPr>
+        <p:spPr>
+          <a:xfrm>
+            <a:off x="4572000" y="1554480"/>
+            <a:ext cx="1143000" cy="384048"/>
+          </a:xfrm>
+          <a:prstGeom prst="roundRect">
+            <a:avLst>
+              <a:gd name="adj" fmla="val 18000"/>
+            </a:avLst>
+          </a:prstGeom>
+          <a:solidFill>
+            <a:srgbClr val="FFFFFF"/>
+          </a:solidFill>
+          <a:ln w="15875">
+            <a:solidFill>
+              <a:srgbClr val="595959"/>
+            </a:solidFill>
+          </a:ln>
+          <a:effectLst/>
+        </p:spPr>
+        <p:style>
+          <a:lnRef idx="1">
+            <a:schemeClr val="accent1"/>
+          </a:lnRef>
+          <a:fillRef idx="3">
+            <a:schemeClr val="accent1"/>
+          </a:fillRef>
+          <a:effectRef idx="2">
+            <a:schemeClr val="accent1"/>
+          </a:effectRef>
+          <a:fontRef idx="minor">
+            <a:schemeClr val="lt1"/>
+          </a:fontRef>
+        </p:style>
+        <p:txBody>
+          <a:bodyPr wrap="square" lIns="54864" tIns="27432" rIns="54864" bIns="27432" rtlCol="0" anchor="ctr"/>
+          <a:lstStyle/>
+          <a:p>
+            <a:pPr algn="ctr"/>
+            <a:r>
+              <a:rPr sz="1000" b="0" i="0">
+                <a:solidFill>
+                  <a:srgbClr val="595959"/>
+                </a:solidFill>
+                <a:latin typeface="Inter"/>
+              </a:rPr>
+              <a:t>IEE</a:t>
+            </a:r>
+          </a:p>
+        </p:txBody>
+      </p:sp>
+      <p:sp>
+        <p:nvSpPr>
+          <p:cNvPr id="122" name="Rounded Rectangle 121"/>
+          <p:cNvSpPr/>
+          <p:nvPr/>
+        </p:nvSpPr>
+        <p:spPr>
+          <a:xfrm>
+            <a:off x="5824728" y="1554480"/>
+            <a:ext cx="1143000" cy="384048"/>
+          </a:xfrm>
+          <a:prstGeom prst="roundRect">
+            <a:avLst>
+              <a:gd name="adj" fmla="val 18000"/>
+            </a:avLst>
+          </a:prstGeom>
+          <a:solidFill>
+            <a:srgbClr val="FFFFFF"/>
+          </a:solidFill>
+          <a:ln w="15875">
+            <a:solidFill>
+              <a:srgbClr val="595959"/>
+            </a:solidFill>
+          </a:ln>
+          <a:effectLst/>
+        </p:spPr>
+        <p:style>
+          <a:lnRef idx="1">
+            <a:schemeClr val="accent1"/>
+          </a:lnRef>
+          <a:fillRef idx="3">
+            <a:schemeClr val="accent1"/>
+          </a:fillRef>
+          <a:effectRef idx="2">
+            <a:schemeClr val="accent1"/>
+          </a:effectRef>
+          <a:fontRef idx="minor">
+            <a:schemeClr val="lt1"/>
+          </a:fontRef>
+        </p:style>
+        <p:txBody>
+          <a:bodyPr wrap="square" lIns="54864" tIns="27432" rIns="54864" bIns="27432" rtlCol="0" anchor="ctr"/>
+          <a:lstStyle/>
+          <a:p>
+            <a:pPr algn="ctr"/>
+            <a:r>
+              <a:rPr sz="1000" b="0" i="0">
+                <a:solidFill>
+                  <a:srgbClr val="595959"/>
+                </a:solidFill>
+                <a:latin typeface="Inter"/>
+              </a:rPr>
+              <a:t>Vayyar</a:t>
+            </a:r>
+          </a:p>
+        </p:txBody>
+      </p:sp>
+      <p:sp>
+        <p:nvSpPr>
+          <p:cNvPr id="123" name="Rounded Rectangle 122"/>
+          <p:cNvSpPr/>
+          <p:nvPr/>
+        </p:nvSpPr>
+        <p:spPr>
+          <a:xfrm>
+            <a:off x="7077456" y="1554480"/>
+            <a:ext cx="1143000" cy="384048"/>
+          </a:xfrm>
+          <a:prstGeom prst="roundRect">
+            <a:avLst>
+              <a:gd name="adj" fmla="val 18000"/>
+            </a:avLst>
+          </a:prstGeom>
+          <a:solidFill>
+            <a:srgbClr val="FFFFFF"/>
+          </a:solidFill>
+          <a:ln w="15875">
+            <a:solidFill>
+              <a:srgbClr val="595959"/>
+            </a:solidFill>
+          </a:ln>
+          <a:effectLst/>
+        </p:spPr>
+        <p:style>
+          <a:lnRef idx="1">
+            <a:schemeClr val="accent1"/>
+          </a:lnRef>
+          <a:fillRef idx="3">
+            <a:schemeClr val="accent1"/>
+          </a:fillRef>
+          <a:effectRef idx="2">
+            <a:schemeClr val="accent1"/>
+          </a:effectRef>
+          <a:fontRef idx="minor">
+            <a:schemeClr val="lt1"/>
+          </a:fontRef>
+        </p:style>
+        <p:txBody>
+          <a:bodyPr wrap="square" lIns="54864" tIns="27432" rIns="54864" bIns="27432" rtlCol="0" anchor="ctr"/>
+          <a:lstStyle/>
+          <a:p>
+            <a:pPr algn="ctr"/>
+            <a:r>
+              <a:rPr sz="1000" b="0" i="0">
+                <a:solidFill>
+                  <a:srgbClr val="595959"/>
+                </a:solidFill>
+                <a:latin typeface="Inter"/>
+              </a:rPr>
+              <a:t>Valeo</a:t>
+            </a:r>
+          </a:p>
+        </p:txBody>
+      </p:sp>
+      <p:sp>
+        <p:nvSpPr>
+          <p:cNvPr id="124" name="Rounded Rectangle 123"/>
+          <p:cNvSpPr/>
+          <p:nvPr/>
+        </p:nvSpPr>
+        <p:spPr>
+          <a:xfrm>
+            <a:off x="4572000" y="2057400"/>
+            <a:ext cx="1143000" cy="384048"/>
+          </a:xfrm>
+          <a:prstGeom prst="roundRect">
+            <a:avLst>
+              <a:gd name="adj" fmla="val 18000"/>
+            </a:avLst>
+          </a:prstGeom>
+          <a:solidFill>
+            <a:srgbClr val="FFFFFF"/>
+          </a:solidFill>
+          <a:ln w="15875">
+            <a:solidFill>
+              <a:srgbClr val="595959"/>
+            </a:solidFill>
+          </a:ln>
+          <a:effectLst/>
+        </p:spPr>
+        <p:style>
+          <a:lnRef idx="1">
+            <a:schemeClr val="accent1"/>
+          </a:lnRef>
+          <a:fillRef idx="3">
+            <a:schemeClr val="accent1"/>
+          </a:fillRef>
+          <a:effectRef idx="2">
+            <a:schemeClr val="accent1"/>
+          </a:effectRef>
+          <a:fontRef idx="minor">
+            <a:schemeClr val="lt1"/>
+          </a:fontRef>
+        </p:style>
+        <p:txBody>
+          <a:bodyPr wrap="square" lIns="54864" tIns="27432" rIns="54864" bIns="27432" rtlCol="0" anchor="ctr"/>
+          <a:lstStyle/>
+          <a:p>
+            <a:pPr algn="ctr"/>
+            <a:r>
+              <a:rPr sz="1000" b="0" i="0">
+                <a:solidFill>
+                  <a:srgbClr val="595959"/>
+                </a:solidFill>
+                <a:latin typeface="Inter"/>
+              </a:rPr>
+              <a:t>Continental</a:t>
+            </a:r>
+          </a:p>
+        </p:txBody>
+      </p:sp>
+      <p:sp>
+        <p:nvSpPr>
+          <p:cNvPr id="125" name="Rounded Rectangle 124"/>
+          <p:cNvSpPr/>
+          <p:nvPr/>
+        </p:nvSpPr>
+        <p:spPr>
+          <a:xfrm>
+            <a:off x="5824728" y="2057400"/>
+            <a:ext cx="1143000" cy="384048"/>
+          </a:xfrm>
+          <a:prstGeom prst="roundRect">
+            <a:avLst>
+              <a:gd name="adj" fmla="val 18000"/>
+            </a:avLst>
+          </a:prstGeom>
+          <a:solidFill>
+            <a:srgbClr val="FFFFFF"/>
+          </a:solidFill>
+          <a:ln w="15875">
+            <a:solidFill>
+              <a:srgbClr val="595959"/>
+            </a:solidFill>
+          </a:ln>
+          <a:effectLst/>
+        </p:spPr>
+        <p:style>
+          <a:lnRef idx="1">
+            <a:schemeClr val="accent1"/>
+          </a:lnRef>
+          <a:fillRef idx="3">
+            <a:schemeClr val="accent1"/>
+          </a:fillRef>
+          <a:effectRef idx="2">
+            <a:schemeClr val="accent1"/>
+          </a:effectRef>
+          <a:fontRef idx="minor">
+            <a:schemeClr val="lt1"/>
+          </a:fontRef>
+        </p:style>
+        <p:txBody>
+          <a:bodyPr wrap="square" lIns="54864" tIns="27432" rIns="54864" bIns="27432" rtlCol="0" anchor="ctr"/>
+          <a:lstStyle/>
+          <a:p>
+            <a:pPr algn="ctr"/>
+            <a:r>
+              <a:rPr sz="1000" b="0" i="0">
+                <a:solidFill>
+                  <a:srgbClr val="595959"/>
+                </a:solidFill>
+                <a:latin typeface="Inter"/>
+              </a:rPr>
+              <a:t>Infineon</a:t>
+            </a:r>
+          </a:p>
+        </p:txBody>
+      </p:sp>
+      <p:sp>
+        <p:nvSpPr>
+          <p:cNvPr id="126" name="TextBox 125"/>
+          <p:cNvSpPr txBox="1"/>
+          <p:nvPr/>
+        </p:nvSpPr>
+        <p:spPr>
+          <a:xfrm>
+            <a:off x="4572000" y="2697480"/>
+            <a:ext cx="3657600" cy="274320"/>
+          </a:xfrm>
+          <a:prstGeom prst="rect">
+            <a:avLst/>
+          </a:prstGeom>
+          <a:noFill/>
+        </p:spPr>
+        <p:txBody>
+          <a:bodyPr wrap="square" lIns="0" tIns="0" rIns="0" bIns="0" anchor="t">
+            <a:spAutoFit/>
+          </a:bodyPr>
+          <a:lstStyle/>
+          <a:p>
+            <a:pPr algn="l"/>
+            <a:r>
+              <a:rPr sz="1200" b="1" i="0">
+                <a:solidFill>
+                  <a:srgbClr val="701C7F"/>
+                </a:solidFill>
+                <a:latin typeface="Inter"/>
+              </a:rPr>
+              <a:t>We sell the logic</a:t>
+            </a:r>
+          </a:p>
+        </p:txBody>
+      </p:sp>
+      <p:sp>
+        <p:nvSpPr>
+          <p:cNvPr id="127" name="Rounded Rectangle 126"/>
+          <p:cNvSpPr/>
+          <p:nvPr/>
+        </p:nvSpPr>
+        <p:spPr>
+          <a:xfrm>
+            <a:off x="4572000" y="3017520"/>
+            <a:ext cx="3703320" cy="777240"/>
+          </a:xfrm>
+          <a:prstGeom prst="roundRect">
+            <a:avLst>
+              <a:gd name="adj" fmla="val 18000"/>
+            </a:avLst>
+          </a:prstGeom>
+          <a:solidFill>
+            <a:srgbClr val="701C7F"/>
+          </a:solidFill>
+          <a:ln w="15875">
+            <a:solidFill>
+              <a:srgbClr val="701C7F"/>
+            </a:solidFill>
+          </a:ln>
+          <a:effectLst/>
+        </p:spPr>
+        <p:style>
+          <a:lnRef idx="1">
+            <a:schemeClr val="accent1"/>
+          </a:lnRef>
+          <a:fillRef idx="3">
+            <a:schemeClr val="accent1"/>
+          </a:fillRef>
+          <a:effectRef idx="2">
+            <a:schemeClr val="accent1"/>
+          </a:effectRef>
+          <a:fontRef idx="minor">
+            <a:schemeClr val="lt1"/>
+          </a:fontRef>
+        </p:style>
+        <p:txBody>
+          <a:bodyPr wrap="square" lIns="54864" tIns="27432" rIns="54864" bIns="27432" rtlCol="0" anchor="ctr"/>
+          <a:lstStyle/>
+          <a:p>
+            <a:pPr algn="ctr"/>
+            <a:r>
+              <a:rPr sz="1400" b="1" i="0">
+                <a:solidFill>
+                  <a:srgbClr val="FFFFFF"/>
+                </a:solidFill>
+                <a:latin typeface="Inter"/>
+              </a:rPr>
+              <a:t>any sensor  →  decide  →  mitigate</a:t>
+            </a:r>
+          </a:p>
+        </p:txBody>
+      </p:sp>
+    </p:spTree>
+  </p:cSld>
+  <p:clrMapOvr>
+    <a:masterClrMapping/>
+  </p:clrMapOvr>
+</p:sld>
+</file>
+
+<file path=ppt/slides/slide11.xml><?xml version="1.0" encoding="utf-8"?>
+<p:sld xmlns:a="http://schemas.openxmlformats.org/drawingml/2006/main" xmlns:r="http://schemas.openxmlformats.org/officeDocument/2006/relationships" xmlns:p="http://schemas.openxmlformats.org/presentationml/2006/main">
+  <p:cSld>
+    <p:spTree>
+      <p:nvGrpSpPr>
+        <p:cNvPr id="1" name="Shape 115"/>
+        <p:cNvGrpSpPr/>
+        <p:nvPr/>
+      </p:nvGrpSpPr>
+      <p:grpSpPr>
+        <a:xfrm>
+          <a:off x="0" y="0"/>
+          <a:ext cx="0" cy="0"/>
+          <a:chOff x="0" y="0"/>
+          <a:chExt cx="0" cy="0"/>
+        </a:xfrm>
+      </p:grpSpPr>
+      <p:sp>
+        <p:nvSpPr>
+          <p:cNvPr id="116" name="Google Shape;116;p20"/>
+          <p:cNvSpPr txBox="1"/>
+          <p:nvPr/>
+        </p:nvSpPr>
+        <p:spPr>
+          <a:xfrm>
+            <a:off x="971300" y="4808250"/>
+            <a:ext cx="5334600" cy="292500"/>
+          </a:xfrm>
+          <a:prstGeom prst="rect">
+            <a:avLst/>
+          </a:prstGeom>
+          <a:noFill/>
+          <a:ln>
+            <a:noFill/>
+          </a:ln>
+        </p:spPr>
+        <p:txBody>
+          <a:bodyPr spcFirstLastPara="1" wrap="square" lIns="91425" tIns="91425" rIns="91425" bIns="91425" anchor="t" anchorCtr="0">
+            <a:spAutoFit/>
+          </a:bodyPr>
+          <a:lstStyle/>
+          <a:p>
+            <a:pPr marL="0" lvl="0" indent="0" algn="l" rtl="0">
+              <a:spcBef>
+                <a:spcPts val="0"/>
+              </a:spcBef>
+              <a:spcAft>
+                <a:spcPts val="0"/>
+              </a:spcAft>
+              <a:buNone/>
+            </a:pPr>
+            <a:r>
+              <a:rPr lang="en" sz="700">
+                <a:solidFill>
+                  <a:srgbClr val="595959"/>
+                </a:solidFill>
+                <a:latin typeface="Inter"/>
+                <a:ea typeface="Inter"/>
+                <a:cs typeface="Inter"/>
+                <a:sym typeface="Inter"/>
+              </a:rPr>
+              <a:t>Copyright© Eclipse Foundation AISBL and contributors. Made available under CC-BY-SA 4.0 International.</a:t>
+            </a:r>
+            <a:endParaRPr sz="700">
+              <a:solidFill>
+                <a:srgbClr val="595959"/>
+              </a:solidFill>
+              <a:latin typeface="Inter"/>
+              <a:ea typeface="Inter"/>
+              <a:cs typeface="Inter"/>
+              <a:sym typeface="Inter"/>
+            </a:endParaRPr>
+          </a:p>
+        </p:txBody>
+      </p:sp>
+      <p:pic>
+        <p:nvPicPr>
+          <p:cNvPr id="117" name="Google Shape;117;p20" title="SDV_logo-color01 (1).png"/>
+          <p:cNvPicPr preferRelativeResize="0"/>
+          <p:nvPr/>
+        </p:nvPicPr>
+        <p:blipFill>
+          <a:blip r:embed="rId3">
+            <a:alphaModFix/>
+          </a:blip>
+          <a:stretch>
+            <a:fillRect/>
+          </a:stretch>
+        </p:blipFill>
+        <p:spPr>
+          <a:xfrm>
+            <a:off x="225475" y="4757277"/>
+            <a:ext cx="684027" cy="255500"/>
+          </a:xfrm>
+          <a:prstGeom prst="rect">
+            <a:avLst/>
+          </a:prstGeom>
+          <a:noFill/>
+          <a:ln>
+            <a:noFill/>
+          </a:ln>
+        </p:spPr>
+      </p:pic>
+      <p:sp>
+        <p:nvSpPr>
+          <p:cNvPr id="119" name="Google Shape;119;p20"/>
+          <p:cNvSpPr txBox="1"/>
+          <p:nvPr/>
+        </p:nvSpPr>
+        <p:spPr>
+          <a:xfrm>
+            <a:off x="712125" y="628750"/>
+            <a:ext cx="7360200" cy="464700"/>
+          </a:xfrm>
+          <a:prstGeom prst="rect">
+            <a:avLst/>
+          </a:prstGeom>
+          <a:noFill/>
+          <a:ln>
+            <a:noFill/>
+          </a:ln>
+        </p:spPr>
+        <p:txBody>
+          <a:bodyPr spcFirstLastPara="1" wrap="square" lIns="91425" tIns="91425" rIns="91425" bIns="91425" anchor="t" anchorCtr="0">
+            <a:spAutoFit/>
+          </a:bodyPr>
+          <a:lstStyle/>
+          <a:p>
+            <a:pPr marL="0" lvl="0" indent="0" algn="l" rtl="0">
+              <a:spcBef>
+                <a:spcPts val="0"/>
+              </a:spcBef>
+              <a:spcAft>
+                <a:spcPts val="0"/>
+              </a:spcAft>
+              <a:buClr>
+                <a:schemeClr val="dk1"/>
+              </a:buClr>
+              <a:buSzPts val="990"/>
+              <a:buFont typeface="Arial"/>
+              <a:buNone/>
+            </a:pPr>
+            <a:r>
+              <a:rPr lang="en" sz="1820" b="1">
+                <a:solidFill>
+                  <a:srgbClr val="701C7F"/>
+                </a:solidFill>
+                <a:latin typeface="Inter"/>
+                <a:ea typeface="Inter"/>
+                <a:cs typeface="Inter"/>
+                <a:sym typeface="Inter"/>
+              </a:rPr>
+              <a:t>The Business Model</a:t>
+            </a:r>
+            <a:endParaRPr sz="400">
+              <a:latin typeface="Inter ExtraBold"/>
+              <a:ea typeface="Inter ExtraBold"/>
+              <a:cs typeface="Inter ExtraBold"/>
+              <a:sym typeface="Inter ExtraBold"/>
+            </a:endParaRPr>
+          </a:p>
+        </p:txBody>
+      </p:sp>
+      <p:sp>
+        <p:nvSpPr>
+          <p:cNvPr id="120" name="Pentagon 119"/>
+          <p:cNvSpPr/>
+          <p:nvPr/>
+        </p:nvSpPr>
+        <p:spPr>
+          <a:xfrm>
+            <a:off x="731520" y="1828800"/>
+            <a:ext cx="2377440" cy="1005840"/>
+          </a:xfrm>
+          <a:prstGeom prst="homePlate">
+            <a:avLst/>
+          </a:prstGeom>
+          <a:solidFill>
+            <a:srgbClr val="701C7F"/>
+          </a:solidFill>
+          <a:ln w="15875">
+            <a:solidFill>
+              <a:srgbClr val="701C7F"/>
+            </a:solidFill>
+          </a:ln>
+          <a:effectLst/>
+        </p:spPr>
+        <p:style>
+          <a:lnRef idx="1">
+            <a:schemeClr val="accent1"/>
+          </a:lnRef>
+          <a:fillRef idx="3">
+            <a:schemeClr val="accent1"/>
+          </a:fillRef>
+          <a:effectRef idx="2">
+            <a:schemeClr val="accent1"/>
+          </a:effectRef>
+          <a:fontRef idx="minor">
+            <a:schemeClr val="lt1"/>
+          </a:fontRef>
+        </p:style>
+        <p:txBody>
+          <a:bodyPr wrap="square" lIns="54864" tIns="27432" rIns="54864" bIns="27432" rtlCol="0" anchor="ctr"/>
+          <a:lstStyle/>
+          <a:p>
+            <a:pPr algn="ctr"/>
+            <a:r>
+              <a:rPr sz="1800" b="1" i="0">
+                <a:solidFill>
+                  <a:srgbClr val="DB521D"/>
+                </a:solidFill>
+                <a:latin typeface="Inter"/>
+              </a:rPr>
+              <a:t>1  </a:t>
+            </a:r>
+            <a:r>
+              <a:rPr sz="1800" b="1" i="0">
+                <a:solidFill>
+                  <a:srgbClr val="FFFFFF"/>
+                </a:solidFill>
+                <a:latin typeface="Inter"/>
+              </a:rPr>
+              <a:t>Open core</a:t>
+            </a:r>
+          </a:p>
+        </p:txBody>
+      </p:sp>
+      <p:sp>
+        <p:nvSpPr>
+          <p:cNvPr id="121" name="TextBox 120"/>
+          <p:cNvSpPr txBox="1"/>
+          <p:nvPr/>
+        </p:nvSpPr>
+        <p:spPr>
+          <a:xfrm>
+            <a:off x="914400" y="3063240"/>
+            <a:ext cx="2011680" cy="822960"/>
+          </a:xfrm>
+          <a:prstGeom prst="rect">
+            <a:avLst/>
+          </a:prstGeom>
+          <a:noFill/>
+        </p:spPr>
+        <p:txBody>
+          <a:bodyPr wrap="square" lIns="0" tIns="0" rIns="0" bIns="0" anchor="t">
+            <a:spAutoFit/>
+          </a:bodyPr>
+          <a:lstStyle/>
+          <a:p>
+            <a:pPr algn="ctr"/>
+            <a:r>
+              <a:rPr sz="1400" b="0" i="0">
+                <a:solidFill>
+                  <a:srgbClr val="595959"/>
+                </a:solidFill>
+                <a:latin typeface="Inter"/>
+              </a:rPr>
+              <a:t>Eclipse SDV</a:t>
+            </a:r>
+          </a:p>
+          <a:p>
+            <a:pPr algn="ctr"/>
+            <a:r>
+              <a:rPr sz="1400" b="0" i="0">
+                <a:solidFill>
+                  <a:srgbClr val="595959"/>
+                </a:solidFill>
+                <a:latin typeface="Inter"/>
+              </a:rPr>
+              <a:t>free to adopt</a:t>
+            </a:r>
+          </a:p>
+        </p:txBody>
+      </p:sp>
+      <p:sp>
+        <p:nvSpPr>
+          <p:cNvPr id="122" name="Chevron 121"/>
+          <p:cNvSpPr/>
+          <p:nvPr/>
+        </p:nvSpPr>
+        <p:spPr>
+          <a:xfrm>
+            <a:off x="3314700" y="1828800"/>
+            <a:ext cx="2377440" cy="1005840"/>
+          </a:xfrm>
+          <a:prstGeom prst="chevron">
+            <a:avLst/>
+          </a:prstGeom>
+          <a:solidFill>
+            <a:srgbClr val="F6EEF8"/>
+          </a:solidFill>
+          <a:ln w="15875">
+            <a:solidFill>
+              <a:srgbClr val="701C7F"/>
+            </a:solidFill>
+          </a:ln>
+          <a:effectLst/>
+        </p:spPr>
+        <p:style>
+          <a:lnRef idx="1">
+            <a:schemeClr val="accent1"/>
+          </a:lnRef>
+          <a:fillRef idx="3">
+            <a:schemeClr val="accent1"/>
+          </a:fillRef>
+          <a:effectRef idx="2">
+            <a:schemeClr val="accent1"/>
+          </a:effectRef>
+          <a:fontRef idx="minor">
+            <a:schemeClr val="lt1"/>
+          </a:fontRef>
+        </p:style>
+        <p:txBody>
+          <a:bodyPr wrap="square" lIns="54864" tIns="27432" rIns="54864" bIns="27432" rtlCol="0" anchor="ctr"/>
+          <a:lstStyle/>
+          <a:p>
+            <a:pPr algn="ctr"/>
+            <a:r>
+              <a:rPr sz="1800" b="1" i="0">
+                <a:solidFill>
+                  <a:srgbClr val="DB521D"/>
+                </a:solidFill>
+                <a:latin typeface="Inter"/>
+              </a:rPr>
+              <a:t>2  </a:t>
+            </a:r>
+            <a:r>
+              <a:rPr sz="1800" b="1" i="0">
+                <a:solidFill>
+                  <a:srgbClr val="531B4C"/>
+                </a:solidFill>
+                <a:latin typeface="Inter"/>
+              </a:rPr>
+              <a:t>Integrate</a:t>
+            </a:r>
+          </a:p>
+        </p:txBody>
+      </p:sp>
+      <p:sp>
+        <p:nvSpPr>
+          <p:cNvPr id="123" name="TextBox 122"/>
+          <p:cNvSpPr txBox="1"/>
+          <p:nvPr/>
+        </p:nvSpPr>
+        <p:spPr>
+          <a:xfrm>
+            <a:off x="3497580" y="3063240"/>
+            <a:ext cx="2011680" cy="822960"/>
+          </a:xfrm>
+          <a:prstGeom prst="rect">
+            <a:avLst/>
+          </a:prstGeom>
+          <a:noFill/>
+        </p:spPr>
+        <p:txBody>
+          <a:bodyPr wrap="square" lIns="0" tIns="0" rIns="0" bIns="0" anchor="t">
+            <a:spAutoFit/>
+          </a:bodyPr>
+          <a:lstStyle/>
+          <a:p>
+            <a:pPr algn="ctr"/>
+            <a:r>
+              <a:rPr sz="1400" b="0" i="0">
+                <a:solidFill>
+                  <a:srgbClr val="595959"/>
+                </a:solidFill>
+                <a:latin typeface="Inter"/>
+              </a:rPr>
+              <a:t>OEM / Tier-1 porting</a:t>
+            </a:r>
+          </a:p>
+          <a:p>
+            <a:pPr algn="ctr"/>
+            <a:r>
+              <a:rPr sz="1400" b="0" i="0">
+                <a:solidFill>
+                  <a:srgbClr val="595959"/>
+                </a:solidFill>
+                <a:latin typeface="Inter"/>
+              </a:rPr>
+              <a:t>&amp; NCAP validation</a:t>
+            </a:r>
+          </a:p>
+        </p:txBody>
+      </p:sp>
+      <p:sp>
+        <p:nvSpPr>
+          <p:cNvPr id="124" name="Chevron 123"/>
+          <p:cNvSpPr/>
+          <p:nvPr/>
+        </p:nvSpPr>
+        <p:spPr>
+          <a:xfrm>
+            <a:off x="5897880" y="1828800"/>
+            <a:ext cx="2377440" cy="1005840"/>
+          </a:xfrm>
+          <a:prstGeom prst="chevron">
+            <a:avLst/>
+          </a:prstGeom>
+          <a:solidFill>
+            <a:srgbClr val="F6EEF8"/>
+          </a:solidFill>
+          <a:ln w="15875">
+            <a:solidFill>
+              <a:srgbClr val="701C7F"/>
+            </a:solidFill>
+          </a:ln>
+          <a:effectLst/>
+        </p:spPr>
+        <p:style>
+          <a:lnRef idx="1">
+            <a:schemeClr val="accent1"/>
+          </a:lnRef>
+          <a:fillRef idx="3">
+            <a:schemeClr val="accent1"/>
+          </a:fillRef>
+          <a:effectRef idx="2">
+            <a:schemeClr val="accent1"/>
+          </a:effectRef>
+          <a:fontRef idx="minor">
+            <a:schemeClr val="lt1"/>
+          </a:fontRef>
+        </p:style>
+        <p:txBody>
+          <a:bodyPr wrap="square" lIns="54864" tIns="27432" rIns="54864" bIns="27432" rtlCol="0" anchor="ctr"/>
+          <a:lstStyle/>
+          <a:p>
+            <a:pPr algn="ctr"/>
+            <a:r>
+              <a:rPr sz="1800" b="1" i="0">
+                <a:solidFill>
+                  <a:srgbClr val="DB521D"/>
+                </a:solidFill>
+                <a:latin typeface="Inter"/>
+              </a:rPr>
+              <a:t>3  </a:t>
+            </a:r>
+            <a:r>
+              <a:rPr sz="1800" b="1" i="0">
+                <a:solidFill>
+                  <a:srgbClr val="531B4C"/>
+                </a:solidFill>
+                <a:latin typeface="Inter"/>
+              </a:rPr>
+              <a:t>Update</a:t>
+            </a:r>
+          </a:p>
+        </p:txBody>
+      </p:sp>
+      <p:sp>
+        <p:nvSpPr>
+          <p:cNvPr id="125" name="TextBox 124"/>
+          <p:cNvSpPr txBox="1"/>
+          <p:nvPr/>
+        </p:nvSpPr>
+        <p:spPr>
+          <a:xfrm>
+            <a:off x="6080760" y="3063240"/>
+            <a:ext cx="2011680" cy="822960"/>
+          </a:xfrm>
+          <a:prstGeom prst="rect">
+            <a:avLst/>
+          </a:prstGeom>
+          <a:noFill/>
+        </p:spPr>
+        <p:txBody>
+          <a:bodyPr wrap="square" lIns="0" tIns="0" rIns="0" bIns="0" anchor="t">
+            <a:spAutoFit/>
+          </a:bodyPr>
+          <a:lstStyle/>
+          <a:p>
+            <a:pPr algn="ctr"/>
+            <a:r>
+              <a:rPr sz="1400" b="0" i="0">
+                <a:solidFill>
+                  <a:srgbClr val="595959"/>
+                </a:solidFill>
+                <a:latin typeface="Inter"/>
+              </a:rPr>
+              <a:t>OTA features</a:t>
+            </a:r>
+          </a:p>
+          <a:p>
+            <a:pPr algn="ctr"/>
+            <a:r>
+              <a:rPr sz="1400" b="0" i="0">
+                <a:solidFill>
+                  <a:srgbClr val="595959"/>
+                </a:solidFill>
+                <a:latin typeface="Inter"/>
+              </a:rPr>
+              <a:t>&amp; licensing</a:t>
+            </a:r>
+          </a:p>
+        </p:txBody>
+      </p:sp>
+    </p:spTree>
+  </p:cSld>
+  <p:clrMapOvr>
+    <a:masterClrMapping/>
+  </p:clrMapOvr>
+</p:sld>
+</file>
+
+<file path=ppt/slides/slide12.xml><?xml version="1.0" encoding="utf-8"?>
+<p:sld xmlns:a="http://schemas.openxmlformats.org/drawingml/2006/main" xmlns:r="http://schemas.openxmlformats.org/officeDocument/2006/relationships" xmlns:p="http://schemas.openxmlformats.org/presentationml/2006/main">
+  <p:cSld>
+    <p:spTree>
+      <p:nvGrpSpPr>
+        <p:cNvPr id="1" name=""/>
+        <p:cNvGrpSpPr/>
+        <p:nvPr/>
+      </p:nvGrpSpPr>
+      <p:grpSpPr>
+        <a:xfrm>
+          <a:off x="0" y="0"/>
+          <a:ext cx="0" cy="0"/>
+          <a:chOff x="0" y="0"/>
+          <a:chExt cx="0" cy="0"/>
+        </a:xfrm>
+      </p:grpSpPr>
+      <p:sp>
+        <p:nvSpPr>
+          <p:cNvPr id="100" name="Google Shape;100;p18"/>
+          <p:cNvSpPr txBox="1"/>
+          <p:nvPr/>
+        </p:nvSpPr>
+        <p:spPr>
+          <a:xfrm>
+            <a:off x="971300" y="4808250"/>
+            <a:ext cx="5334600" cy="292500"/>
+          </a:xfrm>
+          <a:prstGeom prst="rect">
+            <a:avLst/>
+          </a:prstGeom>
+          <a:noFill/>
+          <a:ln>
+            <a:noFill/>
+          </a:ln>
+        </p:spPr>
+        <p:txBody>
+          <a:bodyPr spcFirstLastPara="1" wrap="square" lIns="91425" tIns="91425" rIns="91425" bIns="91425" anchor="t" anchorCtr="0">
+            <a:spAutoFit/>
+          </a:bodyPr>
+          <a:lstStyle/>
+          <a:p>
+            <a:pPr marL="0" lvl="0" indent="0" algn="l" rtl="0">
+              <a:spcBef>
+                <a:spcPts val="0"/>
+              </a:spcBef>
+              <a:spcAft>
+                <a:spcPts val="0"/>
+              </a:spcAft>
+              <a:buNone/>
+            </a:pPr>
+            <a:r>
+              <a:rPr lang="en" sz="700">
+                <a:solidFill>
+                  <a:srgbClr val="595959"/>
+                </a:solidFill>
+                <a:latin typeface="Inter"/>
+                <a:ea typeface="Inter"/>
+                <a:cs typeface="Inter"/>
+                <a:sym typeface="Inter"/>
+              </a:rPr>
+              <a:t>Copyright© Eclipse Foundation AISBL and contributors. Made available under CC-BY-SA 4.0 International.</a:t>
+            </a:r>
+            <a:endParaRPr sz="700">
+              <a:solidFill>
+                <a:srgbClr val="595959"/>
+              </a:solidFill>
+              <a:latin typeface="Inter"/>
+              <a:ea typeface="Inter"/>
+              <a:cs typeface="Inter"/>
+              <a:sym typeface="Inter"/>
+            </a:endParaRPr>
+          </a:p>
+        </p:txBody>
+      </p:sp>
+      <p:pic>
+        <p:nvPicPr>
+          <p:cNvPr id="101" name="Google Shape;101;p18" title="SDV_logo-color01 (1).png"/>
+          <p:cNvPicPr preferRelativeResize="0"/>
+          <p:nvPr/>
+        </p:nvPicPr>
+        <p:blipFill>
+          <a:blip r:embed="rId3">
+            <a:alphaModFix/>
+          </a:blip>
+          <a:stretch>
+            <a:fillRect/>
+          </a:stretch>
+        </p:blipFill>
+        <p:spPr>
+          <a:xfrm>
+            <a:off x="225475" y="4757277"/>
+            <a:ext cx="684027" cy="255500"/>
+          </a:xfrm>
+          <a:prstGeom prst="rect">
+            <a:avLst/>
+          </a:prstGeom>
+          <a:noFill/>
+          <a:ln>
+            <a:noFill/>
+          </a:ln>
+        </p:spPr>
+      </p:pic>
+      <p:sp>
+        <p:nvSpPr>
+          <p:cNvPr id="103" name="Google Shape;103;p18"/>
+          <p:cNvSpPr txBox="1"/>
+          <p:nvPr/>
+        </p:nvSpPr>
+        <p:spPr>
+          <a:xfrm>
+            <a:off x="712125" y="628750"/>
+            <a:ext cx="7360200" cy="464700"/>
+          </a:xfrm>
+          <a:prstGeom prst="rect">
+            <a:avLst/>
+          </a:prstGeom>
+          <a:noFill/>
+          <a:ln>
+            <a:noFill/>
+          </a:ln>
+        </p:spPr>
+        <p:txBody>
+          <a:bodyPr spcFirstLastPara="1" wrap="square" lIns="91425" tIns="91425" rIns="91425" bIns="91425" anchor="t" anchorCtr="0">
+            <a:spAutoFit/>
+          </a:bodyPr>
+          <a:lstStyle/>
+          <a:p>
+            <a:pPr marL="0" lvl="0" indent="0" algn="l" rtl="0">
+              <a:spcBef>
+                <a:spcPts val="0"/>
+              </a:spcBef>
+              <a:spcAft>
+                <a:spcPts val="0"/>
+              </a:spcAft>
+              <a:buClr>
+                <a:schemeClr val="dk1"/>
+              </a:buClr>
+              <a:buSzPts val="990"/>
+              <a:buFont typeface="Arial"/>
+              <a:buNone/>
+            </a:pPr>
+            <a:r>
+              <a:rPr lang="en" sz="1820" b="1">
+                <a:solidFill>
+                  <a:srgbClr val="701C7F"/>
+                </a:solidFill>
+                <a:latin typeface="Inter"/>
+                <a:ea typeface="Inter"/>
+                <a:cs typeface="Inter"/>
+                <a:sym typeface="Inter"/>
+              </a:rPr>
+              <a:t>Where We Stand</a:t>
+            </a:r>
+            <a:endParaRPr sz="400">
+              <a:latin typeface="Inter ExtraBold"/>
+              <a:ea typeface="Inter ExtraBold"/>
+              <a:cs typeface="Inter ExtraBold"/>
+              <a:sym typeface="Inter ExtraBold"/>
+            </a:endParaRPr>
+          </a:p>
+        </p:txBody>
+      </p:sp>
+      <p:sp>
+        <p:nvSpPr>
+          <p:cNvPr id="104" name="TextBox 103"/>
+          <p:cNvSpPr txBox="1"/>
+          <p:nvPr/>
+        </p:nvSpPr>
+        <p:spPr>
+          <a:xfrm>
+            <a:off x="731520" y="1234440"/>
+            <a:ext cx="3657600" cy="274320"/>
+          </a:xfrm>
+          <a:prstGeom prst="rect">
+            <a:avLst/>
+          </a:prstGeom>
+          <a:noFill/>
+        </p:spPr>
+        <p:txBody>
+          <a:bodyPr wrap="square" lIns="0" tIns="0" rIns="0" bIns="0" anchor="t">
+            <a:spAutoFit/>
+          </a:bodyPr>
+          <a:lstStyle/>
+          <a:p>
+            <a:pPr algn="l"/>
+            <a:r>
+              <a:rPr sz="1200" b="1" i="0">
+                <a:solidFill>
+                  <a:srgbClr val="2E9E5B"/>
+                </a:solidFill>
+                <a:latin typeface="Inter"/>
+              </a:rPr>
+              <a:t>Done</a:t>
+            </a:r>
+          </a:p>
+        </p:txBody>
+      </p:sp>
+      <p:sp>
+        <p:nvSpPr>
+          <p:cNvPr id="105" name="TextBox 104"/>
+          <p:cNvSpPr txBox="1"/>
+          <p:nvPr/>
+        </p:nvSpPr>
+        <p:spPr>
+          <a:xfrm>
+            <a:off x="4572000" y="1234440"/>
+            <a:ext cx="3657600" cy="274320"/>
+          </a:xfrm>
+          <a:prstGeom prst="rect">
+            <a:avLst/>
+          </a:prstGeom>
+          <a:noFill/>
+        </p:spPr>
+        <p:txBody>
+          <a:bodyPr wrap="square" lIns="0" tIns="0" rIns="0" bIns="0" anchor="t">
+            <a:spAutoFit/>
+          </a:bodyPr>
+          <a:lstStyle/>
+          <a:p>
+            <a:pPr algn="l"/>
+            <a:r>
+              <a:rPr sz="1200" b="1" i="0">
+                <a:solidFill>
+                  <a:srgbClr val="DB521D"/>
+                </a:solidFill>
+                <a:latin typeface="Inter"/>
+              </a:rPr>
+              <a:t>Next</a:t>
+            </a:r>
+          </a:p>
+        </p:txBody>
+      </p:sp>
+      <p:sp>
+        <p:nvSpPr>
+          <p:cNvPr id="106" name="Rounded Rectangle 105"/>
+          <p:cNvSpPr/>
+          <p:nvPr/>
+        </p:nvSpPr>
+        <p:spPr>
+          <a:xfrm>
+            <a:off x="731520" y="1554480"/>
+            <a:ext cx="3566160" cy="365760"/>
+          </a:xfrm>
+          <a:prstGeom prst="roundRect">
+            <a:avLst>
+              <a:gd name="adj" fmla="val 50000"/>
+            </a:avLst>
+          </a:prstGeom>
+          <a:solidFill>
+            <a:srgbClr val="E9F6EE"/>
+          </a:solidFill>
+          <a:ln w="15875">
+            <a:solidFill>
+              <a:srgbClr val="2E9E5B"/>
+            </a:solidFill>
+          </a:ln>
+          <a:effectLst/>
+        </p:spPr>
+        <p:style>
+          <a:lnRef idx="1">
+            <a:schemeClr val="accent1"/>
+          </a:lnRef>
+          <a:fillRef idx="3">
+            <a:schemeClr val="accent1"/>
+          </a:fillRef>
+          <a:effectRef idx="2">
+            <a:schemeClr val="accent1"/>
+          </a:effectRef>
+          <a:fontRef idx="minor">
+            <a:schemeClr val="lt1"/>
+          </a:fontRef>
+        </p:style>
+        <p:txBody>
+          <a:bodyPr wrap="square" lIns="54864" tIns="27432" rIns="54864" bIns="27432" rtlCol="0" anchor="ctr"/>
+          <a:lstStyle/>
+          <a:p>
+            <a:pPr algn="l"/>
+            <a:r>
+              <a:rPr sz="1100" b="0" i="0">
+                <a:solidFill>
+                  <a:srgbClr val="531B4C"/>
+                </a:solidFill>
+                <a:latin typeface="Inter"/>
+              </a:rPr>
+              <a:t>✓  Real sensor · AZ3166</a:t>
+            </a:r>
+          </a:p>
+        </p:txBody>
+      </p:sp>
+      <p:sp>
+        <p:nvSpPr>
+          <p:cNvPr id="107" name="Rounded Rectangle 106"/>
+          <p:cNvSpPr/>
+          <p:nvPr/>
+        </p:nvSpPr>
+        <p:spPr>
+          <a:xfrm>
+            <a:off x="731520" y="2011680"/>
+            <a:ext cx="3566160" cy="365760"/>
+          </a:xfrm>
+          <a:prstGeom prst="roundRect">
+            <a:avLst>
+              <a:gd name="adj" fmla="val 50000"/>
+            </a:avLst>
+          </a:prstGeom>
+          <a:solidFill>
+            <a:srgbClr val="E9F6EE"/>
+          </a:solidFill>
+          <a:ln w="15875">
+            <a:solidFill>
+              <a:srgbClr val="2E9E5B"/>
+            </a:solidFill>
+          </a:ln>
+          <a:effectLst/>
+        </p:spPr>
+        <p:style>
+          <a:lnRef idx="1">
+            <a:schemeClr val="accent1"/>
+          </a:lnRef>
+          <a:fillRef idx="3">
+            <a:schemeClr val="accent1"/>
+          </a:fillRef>
+          <a:effectRef idx="2">
+            <a:schemeClr val="accent1"/>
+          </a:effectRef>
+          <a:fontRef idx="minor">
+            <a:schemeClr val="lt1"/>
+          </a:fontRef>
+        </p:style>
+        <p:txBody>
+          <a:bodyPr wrap="square" lIns="54864" tIns="27432" rIns="54864" bIns="27432" rtlCol="0" anchor="ctr"/>
+          <a:lstStyle/>
+          <a:p>
+            <a:pPr algn="l"/>
+            <a:r>
+              <a:rPr sz="1100" b="0" i="0">
+                <a:solidFill>
+                  <a:srgbClr val="531B4C"/>
+                </a:solidFill>
+                <a:latin typeface="Inter"/>
+              </a:rPr>
+              <a:t>✓  Real window · S32K148</a:t>
+            </a:r>
+          </a:p>
+        </p:txBody>
+      </p:sp>
+      <p:sp>
+        <p:nvSpPr>
+          <p:cNvPr id="108" name="Rounded Rectangle 107"/>
+          <p:cNvSpPr/>
+          <p:nvPr/>
+        </p:nvSpPr>
+        <p:spPr>
+          <a:xfrm>
+            <a:off x="731520" y="2468880"/>
+            <a:ext cx="3566160" cy="365760"/>
+          </a:xfrm>
+          <a:prstGeom prst="roundRect">
+            <a:avLst>
+              <a:gd name="adj" fmla="val 50000"/>
+            </a:avLst>
+          </a:prstGeom>
+          <a:solidFill>
+            <a:srgbClr val="E9F6EE"/>
+          </a:solidFill>
+          <a:ln w="15875">
+            <a:solidFill>
+              <a:srgbClr val="2E9E5B"/>
+            </a:solidFill>
+          </a:ln>
+          <a:effectLst/>
+        </p:spPr>
+        <p:style>
+          <a:lnRef idx="1">
+            <a:schemeClr val="accent1"/>
+          </a:lnRef>
+          <a:fillRef idx="3">
+            <a:schemeClr val="accent1"/>
+          </a:fillRef>
+          <a:effectRef idx="2">
+            <a:schemeClr val="accent1"/>
+          </a:effectRef>
+          <a:fontRef idx="minor">
+            <a:schemeClr val="lt1"/>
+          </a:fontRef>
+        </p:style>
+        <p:txBody>
+          <a:bodyPr wrap="square" lIns="54864" tIns="27432" rIns="54864" bIns="27432" rtlCol="0" anchor="ctr"/>
+          <a:lstStyle/>
+          <a:p>
+            <a:pPr algn="l"/>
+            <a:r>
+              <a:rPr sz="1100" b="0" i="0">
+                <a:solidFill>
+                  <a:srgbClr val="531B4C"/>
+                </a:solidFill>
+                <a:latin typeface="Inter"/>
+              </a:rPr>
+              <a:t>✓  Guardian in AutoSD VM · Pi</a:t>
+            </a:r>
+          </a:p>
+        </p:txBody>
+      </p:sp>
+      <p:sp>
+        <p:nvSpPr>
+          <p:cNvPr id="109" name="Rounded Rectangle 108"/>
+          <p:cNvSpPr/>
+          <p:nvPr/>
+        </p:nvSpPr>
+        <p:spPr>
+          <a:xfrm>
+            <a:off x="731520" y="2926080"/>
+            <a:ext cx="3566160" cy="365760"/>
+          </a:xfrm>
+          <a:prstGeom prst="roundRect">
+            <a:avLst>
+              <a:gd name="adj" fmla="val 50000"/>
+            </a:avLst>
+          </a:prstGeom>
+          <a:solidFill>
+            <a:srgbClr val="E9F6EE"/>
+          </a:solidFill>
+          <a:ln w="15875">
+            <a:solidFill>
+              <a:srgbClr val="2E9E5B"/>
+            </a:solidFill>
+          </a:ln>
+          <a:effectLst/>
+        </p:spPr>
+        <p:style>
+          <a:lnRef idx="1">
+            <a:schemeClr val="accent1"/>
+          </a:lnRef>
+          <a:fillRef idx="3">
+            <a:schemeClr val="accent1"/>
+          </a:fillRef>
+          <a:effectRef idx="2">
+            <a:schemeClr val="accent1"/>
+          </a:effectRef>
+          <a:fontRef idx="minor">
+            <a:schemeClr val="lt1"/>
+          </a:fontRef>
+        </p:style>
+        <p:txBody>
+          <a:bodyPr wrap="square" lIns="54864" tIns="27432" rIns="54864" bIns="27432" rtlCol="0" anchor="ctr"/>
+          <a:lstStyle/>
+          <a:p>
+            <a:pPr algn="l"/>
+            <a:r>
+              <a:rPr sz="1100" b="0" i="0">
+                <a:solidFill>
+                  <a:srgbClr val="531B4C"/>
+                </a:solidFill>
+                <a:latin typeface="Inter"/>
+              </a:rPr>
+              <a:t>✓  Fail-safe logic</a:t>
+            </a:r>
+          </a:p>
+        </p:txBody>
+      </p:sp>
+      <p:sp>
+        <p:nvSpPr>
+          <p:cNvPr id="110" name="Rounded Rectangle 109"/>
+          <p:cNvSpPr/>
+          <p:nvPr/>
+        </p:nvSpPr>
+        <p:spPr>
+          <a:xfrm>
+            <a:off x="731520" y="3383280"/>
+            <a:ext cx="3566160" cy="365760"/>
+          </a:xfrm>
+          <a:prstGeom prst="roundRect">
+            <a:avLst>
+              <a:gd name="adj" fmla="val 50000"/>
+            </a:avLst>
+          </a:prstGeom>
+          <a:solidFill>
+            <a:srgbClr val="E9F6EE"/>
+          </a:solidFill>
+          <a:ln w="15875">
+            <a:solidFill>
+              <a:srgbClr val="2E9E5B"/>
+            </a:solidFill>
+          </a:ln>
+          <a:effectLst/>
+        </p:spPr>
+        <p:style>
+          <a:lnRef idx="1">
+            <a:schemeClr val="accent1"/>
+          </a:lnRef>
+          <a:fillRef idx="3">
+            <a:schemeClr val="accent1"/>
+          </a:fillRef>
+          <a:effectRef idx="2">
+            <a:schemeClr val="accent1"/>
+          </a:effectRef>
+          <a:fontRef idx="minor">
+            <a:schemeClr val="lt1"/>
+          </a:fontRef>
+        </p:style>
+        <p:txBody>
+          <a:bodyPr wrap="square" lIns="54864" tIns="27432" rIns="54864" bIns="27432" rtlCol="0" anchor="ctr"/>
+          <a:lstStyle/>
+          <a:p>
+            <a:pPr algn="l"/>
+            <a:r>
+              <a:rPr sz="1100" b="0" i="0">
+                <a:solidFill>
+                  <a:srgbClr val="531B4C"/>
+                </a:solidFill>
+                <a:latin typeface="Inter"/>
+              </a:rPr>
+              <a:t>✓  Dashboard · Telegram · Gazebo</a:t>
+            </a:r>
+          </a:p>
+        </p:txBody>
+      </p:sp>
+      <p:sp>
+        <p:nvSpPr>
+          <p:cNvPr id="111" name="Rounded Rectangle 110"/>
+          <p:cNvSpPr/>
+          <p:nvPr/>
+        </p:nvSpPr>
+        <p:spPr>
+          <a:xfrm>
+            <a:off x="4572000" y="1554480"/>
+            <a:ext cx="3566160" cy="365760"/>
+          </a:xfrm>
+          <a:prstGeom prst="roundRect">
+            <a:avLst>
+              <a:gd name="adj" fmla="val 50000"/>
+            </a:avLst>
+          </a:prstGeom>
+          <a:solidFill>
+            <a:srgbClr val="FFFFFF"/>
+          </a:solidFill>
+          <a:ln w="15875">
+            <a:solidFill>
+              <a:srgbClr val="DB521D"/>
+            </a:solidFill>
+            <a:prstDash val="dash"/>
+          </a:ln>
+          <a:effectLst/>
+        </p:spPr>
+        <p:style>
+          <a:lnRef idx="1">
+            <a:schemeClr val="accent1"/>
+          </a:lnRef>
+          <a:fillRef idx="3">
+            <a:schemeClr val="accent1"/>
+          </a:fillRef>
+          <a:effectRef idx="2">
+            <a:schemeClr val="accent1"/>
+          </a:effectRef>
+          <a:fontRef idx="minor">
+            <a:schemeClr val="lt1"/>
+          </a:fontRef>
+        </p:style>
+        <p:txBody>
+          <a:bodyPr wrap="square" lIns="54864" tIns="27432" rIns="54864" bIns="27432" rtlCol="0" anchor="ctr"/>
+          <a:lstStyle/>
+          <a:p>
+            <a:pPr algn="l"/>
+            <a:r>
+              <a:rPr sz="1100" b="0" i="0">
+                <a:solidFill>
+                  <a:srgbClr val="531B4C"/>
+                </a:solidFill>
+                <a:latin typeface="Inter"/>
+              </a:rPr>
+              <a:t>→  openDuT topology switch</a:t>
+            </a:r>
+          </a:p>
+        </p:txBody>
+      </p:sp>
+      <p:sp>
+        <p:nvSpPr>
+          <p:cNvPr id="112" name="Rounded Rectangle 111"/>
+          <p:cNvSpPr/>
+          <p:nvPr/>
+        </p:nvSpPr>
+        <p:spPr>
+          <a:xfrm>
+            <a:off x="4572000" y="2011680"/>
+            <a:ext cx="3566160" cy="365760"/>
+          </a:xfrm>
+          <a:prstGeom prst="roundRect">
+            <a:avLst>
+              <a:gd name="adj" fmla="val 50000"/>
+            </a:avLst>
+          </a:prstGeom>
+          <a:solidFill>
+            <a:srgbClr val="FFFFFF"/>
+          </a:solidFill>
+          <a:ln w="15875">
+            <a:solidFill>
+              <a:srgbClr val="DB521D"/>
+            </a:solidFill>
+            <a:prstDash val="dash"/>
+          </a:ln>
+          <a:effectLst/>
+        </p:spPr>
+        <p:style>
+          <a:lnRef idx="1">
+            <a:schemeClr val="accent1"/>
+          </a:lnRef>
+          <a:fillRef idx="3">
+            <a:schemeClr val="accent1"/>
+          </a:fillRef>
+          <a:effectRef idx="2">
+            <a:schemeClr val="accent1"/>
+          </a:effectRef>
+          <a:fontRef idx="minor">
+            <a:schemeClr val="lt1"/>
+          </a:fontRef>
+        </p:style>
+        <p:txBody>
+          <a:bodyPr wrap="square" lIns="54864" tIns="27432" rIns="54864" bIns="27432" rtlCol="0" anchor="ctr"/>
+          <a:lstStyle/>
+          <a:p>
+            <a:pPr algn="l"/>
+            <a:r>
+              <a:rPr sz="1100" b="0" i="0">
+                <a:solidFill>
+                  <a:srgbClr val="531B4C"/>
+                </a:solidFill>
+                <a:latin typeface="Inter"/>
+              </a:rPr>
+              <a:t>→  Real OpenSOVD CDA</a:t>
+            </a:r>
+          </a:p>
+        </p:txBody>
+      </p:sp>
+      <p:sp>
+        <p:nvSpPr>
+          <p:cNvPr id="113" name="Rounded Rectangle 112"/>
+          <p:cNvSpPr/>
+          <p:nvPr/>
+        </p:nvSpPr>
+        <p:spPr>
+          <a:xfrm>
+            <a:off x="4572000" y="2468880"/>
+            <a:ext cx="3566160" cy="365760"/>
+          </a:xfrm>
+          <a:prstGeom prst="roundRect">
+            <a:avLst>
+              <a:gd name="adj" fmla="val 50000"/>
+            </a:avLst>
+          </a:prstGeom>
+          <a:solidFill>
+            <a:srgbClr val="FFFFFF"/>
+          </a:solidFill>
+          <a:ln w="15875">
+            <a:solidFill>
+              <a:srgbClr val="DB521D"/>
+            </a:solidFill>
+            <a:prstDash val="dash"/>
+          </a:ln>
+          <a:effectLst/>
+        </p:spPr>
+        <p:style>
+          <a:lnRef idx="1">
+            <a:schemeClr val="accent1"/>
+          </a:lnRef>
+          <a:fillRef idx="3">
+            <a:schemeClr val="accent1"/>
+          </a:fillRef>
+          <a:effectRef idx="2">
+            <a:schemeClr val="accent1"/>
+          </a:effectRef>
+          <a:fontRef idx="minor">
+            <a:schemeClr val="lt1"/>
+          </a:fontRef>
+        </p:style>
+        <p:txBody>
+          <a:bodyPr wrap="square" lIns="54864" tIns="27432" rIns="54864" bIns="27432" rtlCol="0" anchor="ctr"/>
+          <a:lstStyle/>
+          <a:p>
+            <a:pPr algn="l"/>
+            <a:r>
+              <a:rPr sz="1100" b="0" i="0">
+                <a:solidFill>
+                  <a:srgbClr val="531B4C"/>
+                </a:solidFill>
+                <a:latin typeface="Inter"/>
+              </a:rPr>
+              <a:t>→  Cold warning (branch)</a:t>
+            </a:r>
+          </a:p>
+        </p:txBody>
+      </p:sp>
+      <p:sp>
+        <p:nvSpPr>
+          <p:cNvPr id="114" name="Rounded Rectangle 113"/>
+          <p:cNvSpPr/>
+          <p:nvPr/>
+        </p:nvSpPr>
+        <p:spPr>
+          <a:xfrm>
+            <a:off x="4572000" y="2926080"/>
+            <a:ext cx="3566160" cy="365760"/>
+          </a:xfrm>
+          <a:prstGeom prst="roundRect">
+            <a:avLst>
+              <a:gd name="adj" fmla="val 50000"/>
+            </a:avLst>
+          </a:prstGeom>
+          <a:solidFill>
+            <a:srgbClr val="FFFFFF"/>
+          </a:solidFill>
+          <a:ln w="15875">
+            <a:solidFill>
+              <a:srgbClr val="DB521D"/>
+            </a:solidFill>
+            <a:prstDash val="dash"/>
+          </a:ln>
+          <a:effectLst/>
+        </p:spPr>
+        <p:style>
+          <a:lnRef idx="1">
+            <a:schemeClr val="accent1"/>
+          </a:lnRef>
+          <a:fillRef idx="3">
+            <a:schemeClr val="accent1"/>
+          </a:fillRef>
+          <a:effectRef idx="2">
+            <a:schemeClr val="accent1"/>
+          </a:effectRef>
+          <a:fontRef idx="minor">
+            <a:schemeClr val="lt1"/>
+          </a:fontRef>
+        </p:style>
+        <p:txBody>
+          <a:bodyPr wrap="square" lIns="54864" tIns="27432" rIns="54864" bIns="27432" rtlCol="0" anchor="ctr"/>
+          <a:lstStyle/>
+          <a:p>
+            <a:pPr algn="l"/>
+            <a:r>
+              <a:rPr sz="1100" b="0" i="0">
+                <a:solidFill>
+                  <a:srgbClr val="531B4C"/>
+                </a:solidFill>
+                <a:latin typeface="Inter"/>
+              </a:rPr>
+              <a:t>→  Humidity in decision</a:t>
+            </a:r>
+          </a:p>
+        </p:txBody>
+      </p:sp>
+      <p:sp>
+        <p:nvSpPr>
+          <p:cNvPr id="115" name="Rounded Rectangle 114"/>
+          <p:cNvSpPr/>
+          <p:nvPr/>
+        </p:nvSpPr>
+        <p:spPr>
+          <a:xfrm>
+            <a:off x="4572000" y="3383280"/>
+            <a:ext cx="3566160" cy="365760"/>
+          </a:xfrm>
+          <a:prstGeom prst="roundRect">
+            <a:avLst>
+              <a:gd name="adj" fmla="val 50000"/>
+            </a:avLst>
+          </a:prstGeom>
+          <a:solidFill>
+            <a:srgbClr val="FFFFFF"/>
+          </a:solidFill>
+          <a:ln w="15875">
+            <a:solidFill>
+              <a:srgbClr val="DB521D"/>
+            </a:solidFill>
+            <a:prstDash val="dash"/>
+          </a:ln>
+          <a:effectLst/>
+        </p:spPr>
+        <p:style>
+          <a:lnRef idx="1">
+            <a:schemeClr val="accent1"/>
+          </a:lnRef>
+          <a:fillRef idx="3">
+            <a:schemeClr val="accent1"/>
+          </a:fillRef>
+          <a:effectRef idx="2">
+            <a:schemeClr val="accent1"/>
+          </a:effectRef>
+          <a:fontRef idx="minor">
+            <a:schemeClr val="lt1"/>
+          </a:fontRef>
+        </p:style>
+        <p:txBody>
+          <a:bodyPr wrap="square" lIns="54864" tIns="27432" rIns="54864" bIns="27432" rtlCol="0" anchor="ctr"/>
+          <a:lstStyle/>
+          <a:p>
+            <a:pPr algn="l"/>
+            <a:r>
+              <a:rPr sz="1100" b="0" i="0">
+                <a:solidFill>
+                  <a:srgbClr val="531B4C"/>
+                </a:solidFill>
+                <a:latin typeface="Inter"/>
+              </a:rPr>
+              <a:t>→  Confidence &amp; trend</a:t>
+            </a:r>
+          </a:p>
+        </p:txBody>
+      </p:sp>
+    </p:spTree>
+  </p:cSld>
+  <p:clrMapOvr>
+    <a:masterClrMapping/>
+  </p:clrMapOvr>
+</p:sld>
+</file>
+
+<file path=ppt/slides/slide13.xml><?xml version="1.0" encoding="utf-8"?>
+<p:sld xmlns:a="http://schemas.openxmlformats.org/drawingml/2006/main" xmlns:r="http://schemas.openxmlformats.org/officeDocument/2006/relationships" xmlns:p="http://schemas.openxmlformats.org/presentationml/2006/main">
+  <p:cSld>
+    <p:spTree>
+      <p:nvGrpSpPr>
         <p:cNvPr id="1" name="Shape 123"/>
         <p:cNvGrpSpPr/>
         <p:nvPr/>
@@ -8263,7 +10608,7 @@
                 </a:solidFill>
                 <a:latin typeface="Inter"/>
               </a:rPr>
-              <a:t> · Pria</a:t>
+              <a:t> · Priya</a:t>
             </a:r>
             <a:endParaRPr sz="1300" b="0" i="0" dirty="0">
               <a:solidFill>
@@ -8398,7 +10743,7 @@
 </p:sld>
 </file>
 
-<file path=ppt/slides/slide11.xml><?xml version="1.0" encoding="utf-8"?>
+<file path=ppt/slides/slide14.xml><?xml version="1.0" encoding="utf-8"?>
 <p:sld xmlns:a="http://schemas.openxmlformats.org/drawingml/2006/main" xmlns:r="http://schemas.openxmlformats.org/officeDocument/2006/relationships" xmlns:p="http://schemas.openxmlformats.org/presentationml/2006/main">
   <p:cSld>
     <p:bg>
@@ -10144,10 +12489,11 @@
           </a:fontRef>
         </p:style>
         <p:txBody>
-          <a:bodyPr rtlCol="0" anchor="ctr" wrap="square" lIns="54864" rIns="54864" tIns="27432" bIns="27432"/>
+          <a:bodyPr wrap="square" lIns="54864" tIns="27432" rIns="54864" bIns="27432" rtlCol="0" anchor="ctr"/>
           <a:lstStyle/>
           <a:p>
             <a:pPr algn="ctr"/>
+            <a:endParaRPr/>
           </a:p>
         </p:txBody>
       </p:sp>
@@ -10188,7 +12534,7 @@
           </a:fontRef>
         </p:style>
         <p:txBody>
-          <a:bodyPr rtlCol="0" anchor="ctr" wrap="square" lIns="54864" rIns="54864" tIns="27432" bIns="27432"/>
+          <a:bodyPr wrap="square" lIns="54864" tIns="27432" rIns="54864" bIns="27432" rtlCol="0" anchor="ctr"/>
           <a:lstStyle/>
           <a:p>
             <a:pPr algn="ctr"/>
@@ -10221,7 +12567,7 @@
           <a:noFill/>
         </p:spPr>
         <p:txBody>
-          <a:bodyPr wrap="square" anchor="t" lIns="0" rIns="0" tIns="0" bIns="0">
+          <a:bodyPr wrap="square" lIns="0" tIns="0" rIns="0" bIns="0" anchor="t">
             <a:spAutoFit/>
           </a:bodyPr>
           <a:lstStyle/>
@@ -10256,14 +12602,14 @@
           <a:noFill/>
         </p:spPr>
         <p:txBody>
-          <a:bodyPr wrap="square" anchor="t" lIns="0" rIns="0" tIns="0" bIns="0">
+          <a:bodyPr wrap="square" lIns="0" tIns="0" rIns="0" bIns="0" anchor="t">
             <a:spAutoFit/>
           </a:bodyPr>
           <a:lstStyle/>
           <a:p>
             <a:pPr algn="l"/>
             <a:r>
-              <a:rPr sz="1100" b="0" i="0">
+              <a:rPr sz="1100" b="0" i="0" dirty="0">
                 <a:solidFill>
                   <a:srgbClr val="595959"/>
                 </a:solidFill>
@@ -10315,10 +12661,11 @@
           </a:fontRef>
         </p:style>
         <p:txBody>
-          <a:bodyPr rtlCol="0" anchor="ctr" wrap="square" lIns="54864" rIns="54864" tIns="27432" bIns="27432"/>
+          <a:bodyPr wrap="square" lIns="54864" tIns="27432" rIns="54864" bIns="27432" rtlCol="0" anchor="ctr"/>
           <a:lstStyle/>
           <a:p>
             <a:pPr algn="ctr"/>
+            <a:endParaRPr/>
           </a:p>
         </p:txBody>
       </p:sp>
@@ -10359,7 +12706,7 @@
           </a:fontRef>
         </p:style>
         <p:txBody>
-          <a:bodyPr rtlCol="0" anchor="ctr" wrap="square" lIns="54864" rIns="54864" tIns="27432" bIns="27432"/>
+          <a:bodyPr wrap="square" lIns="54864" tIns="27432" rIns="54864" bIns="27432" rtlCol="0" anchor="ctr"/>
           <a:lstStyle/>
           <a:p>
             <a:pPr algn="ctr"/>
@@ -10392,7 +12739,7 @@
           <a:noFill/>
         </p:spPr>
         <p:txBody>
-          <a:bodyPr wrap="square" anchor="t" lIns="0" rIns="0" tIns="0" bIns="0">
+          <a:bodyPr wrap="square" lIns="0" tIns="0" rIns="0" bIns="0" anchor="t">
             <a:spAutoFit/>
           </a:bodyPr>
           <a:lstStyle/>
@@ -10427,7 +12774,7 @@
           <a:noFill/>
         </p:spPr>
         <p:txBody>
-          <a:bodyPr wrap="square" anchor="t" lIns="0" rIns="0" tIns="0" bIns="0">
+          <a:bodyPr wrap="square" lIns="0" tIns="0" rIns="0" bIns="0" anchor="t">
             <a:spAutoFit/>
           </a:bodyPr>
           <a:lstStyle/>
@@ -10486,10 +12833,11 @@
           </a:fontRef>
         </p:style>
         <p:txBody>
-          <a:bodyPr rtlCol="0" anchor="ctr" wrap="square" lIns="54864" rIns="54864" tIns="27432" bIns="27432"/>
+          <a:bodyPr wrap="square" lIns="54864" tIns="27432" rIns="54864" bIns="27432" rtlCol="0" anchor="ctr"/>
           <a:lstStyle/>
           <a:p>
             <a:pPr algn="ctr"/>
+            <a:endParaRPr/>
           </a:p>
         </p:txBody>
       </p:sp>
@@ -10530,7 +12878,7 @@
           </a:fontRef>
         </p:style>
         <p:txBody>
-          <a:bodyPr rtlCol="0" anchor="ctr" wrap="square" lIns="54864" rIns="54864" tIns="27432" bIns="27432"/>
+          <a:bodyPr wrap="square" lIns="54864" tIns="27432" rIns="54864" bIns="27432" rtlCol="0" anchor="ctr"/>
           <a:lstStyle/>
           <a:p>
             <a:pPr algn="ctr"/>
@@ -10563,7 +12911,7 @@
           <a:noFill/>
         </p:spPr>
         <p:txBody>
-          <a:bodyPr wrap="square" anchor="t" lIns="0" rIns="0" tIns="0" bIns="0">
+          <a:bodyPr wrap="square" lIns="0" tIns="0" rIns="0" bIns="0" anchor="t">
             <a:spAutoFit/>
           </a:bodyPr>
           <a:lstStyle/>
@@ -10598,7 +12946,7 @@
           <a:noFill/>
         </p:spPr>
         <p:txBody>
-          <a:bodyPr wrap="square" anchor="t" lIns="0" rIns="0" tIns="0" bIns="0">
+          <a:bodyPr wrap="square" lIns="0" tIns="0" rIns="0" bIns="0" anchor="t">
             <a:spAutoFit/>
           </a:bodyPr>
           <a:lstStyle/>
@@ -10657,10 +13005,11 @@
           </a:fontRef>
         </p:style>
         <p:txBody>
-          <a:bodyPr rtlCol="0" anchor="ctr" wrap="square" lIns="54864" rIns="54864" tIns="27432" bIns="27432"/>
+          <a:bodyPr wrap="square" lIns="54864" tIns="27432" rIns="54864" bIns="27432" rtlCol="0" anchor="ctr"/>
           <a:lstStyle/>
           <a:p>
             <a:pPr algn="ctr"/>
+            <a:endParaRPr/>
           </a:p>
         </p:txBody>
       </p:sp>
@@ -10701,7 +13050,7 @@
           </a:fontRef>
         </p:style>
         <p:txBody>
-          <a:bodyPr rtlCol="0" anchor="ctr" wrap="square" lIns="54864" rIns="54864" tIns="27432" bIns="27432"/>
+          <a:bodyPr wrap="square" lIns="54864" tIns="27432" rIns="54864" bIns="27432" rtlCol="0" anchor="ctr"/>
           <a:lstStyle/>
           <a:p>
             <a:pPr algn="ctr"/>
@@ -10734,7 +13083,7 @@
           <a:noFill/>
         </p:spPr>
         <p:txBody>
-          <a:bodyPr wrap="square" anchor="t" lIns="0" rIns="0" tIns="0" bIns="0">
+          <a:bodyPr wrap="square" lIns="0" tIns="0" rIns="0" bIns="0" anchor="t">
             <a:spAutoFit/>
           </a:bodyPr>
           <a:lstStyle/>
@@ -10769,7 +13118,7 @@
           <a:noFill/>
         </p:spPr>
         <p:txBody>
-          <a:bodyPr wrap="square" anchor="t" lIns="0" rIns="0" tIns="0" bIns="0">
+          <a:bodyPr wrap="square" lIns="0" tIns="0" rIns="0" bIns="0" anchor="t">
             <a:spAutoFit/>
           </a:bodyPr>
           <a:lstStyle/>
@@ -10828,10 +13177,11 @@
           </a:fontRef>
         </p:style>
         <p:txBody>
-          <a:bodyPr rtlCol="0" anchor="ctr" wrap="square" lIns="54864" rIns="54864" tIns="27432" bIns="27432"/>
+          <a:bodyPr wrap="square" lIns="54864" tIns="27432" rIns="54864" bIns="27432" rtlCol="0" anchor="ctr"/>
           <a:lstStyle/>
           <a:p>
             <a:pPr algn="ctr"/>
+            <a:endParaRPr/>
           </a:p>
         </p:txBody>
       </p:sp>
@@ -10872,7 +13222,7 @@
           </a:fontRef>
         </p:style>
         <p:txBody>
-          <a:bodyPr rtlCol="0" anchor="ctr" wrap="square" lIns="54864" rIns="54864" tIns="27432" bIns="27432"/>
+          <a:bodyPr wrap="square" lIns="54864" tIns="27432" rIns="54864" bIns="27432" rtlCol="0" anchor="ctr"/>
           <a:lstStyle/>
           <a:p>
             <a:pPr algn="ctr"/>
@@ -10897,7 +13247,7 @@
         <p:spPr>
           <a:xfrm>
             <a:off x="4411980" y="3108960"/>
-            <a:ext cx="1188720" cy="320040"/>
+            <a:ext cx="1188720" cy="246221"/>
           </a:xfrm>
           <a:prstGeom prst="rect">
             <a:avLst/>
@@ -10905,21 +13255,36 @@
           <a:noFill/>
         </p:spPr>
         <p:txBody>
-          <a:bodyPr wrap="square" anchor="t" lIns="0" rIns="0" tIns="0" bIns="0">
+          <a:bodyPr wrap="square" lIns="0" tIns="0" rIns="0" bIns="0" anchor="t">
             <a:spAutoFit/>
           </a:bodyPr>
           <a:lstStyle/>
           <a:p>
             <a:pPr algn="l"/>
             <a:r>
-              <a:rPr sz="1600" b="1" i="0">
+              <a:rPr sz="1600" b="1" i="0" dirty="0">
                 <a:solidFill>
                   <a:srgbClr val="531B4C"/>
                 </a:solidFill>
                 <a:latin typeface="Inter"/>
               </a:rPr>
-              <a:t>Pria</a:t>
-            </a:r>
+              <a:t>Pri</a:t>
+            </a:r>
+            <a:r>
+              <a:rPr lang="de-DE" sz="1600" b="1" i="0" dirty="0" err="1">
+                <a:solidFill>
+                  <a:srgbClr val="531B4C"/>
+                </a:solidFill>
+                <a:latin typeface="Inter"/>
+              </a:rPr>
+              <a:t>ya</a:t>
+            </a:r>
+            <a:endParaRPr sz="1600" b="1" i="0" dirty="0">
+              <a:solidFill>
+                <a:srgbClr val="531B4C"/>
+              </a:solidFill>
+              <a:latin typeface="Inter"/>
+            </a:endParaRPr>
           </a:p>
         </p:txBody>
       </p:sp>
@@ -10932,7 +13297,7 @@
         <p:spPr>
           <a:xfrm>
             <a:off x="4411980" y="3493008"/>
-            <a:ext cx="1188720" cy="274320"/>
+            <a:ext cx="1188720" cy="169277"/>
           </a:xfrm>
           <a:prstGeom prst="rect">
             <a:avLst/>
@@ -10940,14 +13305,14 @@
           <a:noFill/>
         </p:spPr>
         <p:txBody>
-          <a:bodyPr wrap="square" anchor="t" lIns="0" rIns="0" tIns="0" bIns="0">
+          <a:bodyPr wrap="square" lIns="0" tIns="0" rIns="0" bIns="0" anchor="t">
             <a:spAutoFit/>
           </a:bodyPr>
           <a:lstStyle/>
           <a:p>
             <a:pPr algn="l"/>
             <a:r>
-              <a:rPr sz="1100" b="0" i="0">
+              <a:rPr sz="1100" b="0" i="0" dirty="0">
                 <a:solidFill>
                   <a:srgbClr val="595959"/>
                 </a:solidFill>
@@ -10999,10 +13364,11 @@
           </a:fontRef>
         </p:style>
         <p:txBody>
-          <a:bodyPr rtlCol="0" anchor="ctr" wrap="square" lIns="54864" rIns="54864" tIns="27432" bIns="27432"/>
+          <a:bodyPr wrap="square" lIns="54864" tIns="27432" rIns="54864" bIns="27432" rtlCol="0" anchor="ctr"/>
           <a:lstStyle/>
           <a:p>
             <a:pPr algn="ctr"/>
+            <a:endParaRPr/>
           </a:p>
         </p:txBody>
       </p:sp>
@@ -11043,7 +13409,7 @@
           </a:fontRef>
         </p:style>
         <p:txBody>
-          <a:bodyPr rtlCol="0" anchor="ctr" wrap="square" lIns="54864" rIns="54864" tIns="27432" bIns="27432"/>
+          <a:bodyPr wrap="square" lIns="54864" tIns="27432" rIns="54864" bIns="27432" rtlCol="0" anchor="ctr"/>
           <a:lstStyle/>
           <a:p>
             <a:pPr algn="ctr"/>
@@ -11076,7 +13442,7 @@
           <a:noFill/>
         </p:spPr>
         <p:txBody>
-          <a:bodyPr wrap="square" anchor="t" lIns="0" rIns="0" tIns="0" bIns="0">
+          <a:bodyPr wrap="square" lIns="0" tIns="0" rIns="0" bIns="0" anchor="t">
             <a:spAutoFit/>
           </a:bodyPr>
           <a:lstStyle/>
@@ -11111,7 +13477,7 @@
           <a:noFill/>
         </p:spPr>
         <p:txBody>
-          <a:bodyPr wrap="square" anchor="t" lIns="0" rIns="0" tIns="0" bIns="0">
+          <a:bodyPr wrap="square" lIns="0" tIns="0" rIns="0" bIns="0" anchor="t">
             <a:spAutoFit/>
           </a:bodyPr>
           <a:lstStyle/>
@@ -13925,7 +16291,7 @@
   <p:cSld>
     <p:spTree>
       <p:nvGrpSpPr>
-        <p:cNvPr id="1" name="Shape 99"/>
+        <p:cNvPr id="1" name=""/>
         <p:cNvGrpSpPr/>
         <p:nvPr/>
       </p:nvGrpSpPr>
@@ -13939,14 +16305,1155 @@
       </p:grpSpPr>
       <p:sp>
         <p:nvSpPr>
-          <p:cNvPr id="100" name="Google Shape;100;p18"/>
+          <p:cNvPr id="4" name="Rounded Rectangle 3">
+            <a:extLst>
+              <a:ext uri="{FF2B5EF4-FFF2-40B4-BE49-F238E27FC236}">
+                <a16:creationId xmlns:a16="http://schemas.microsoft.com/office/drawing/2014/main" id="{012609F3-746D-5842-EE95-16E8E2A9829C}"/>
+              </a:ext>
+            </a:extLst>
+          </p:cNvPr>
+          <p:cNvSpPr/>
+          <p:nvPr/>
+        </p:nvSpPr>
+        <p:spPr>
+          <a:xfrm>
+            <a:off x="2429572" y="1000925"/>
+            <a:ext cx="1463597" cy="669074"/>
+          </a:xfrm>
+          <a:prstGeom prst="roundRect">
+            <a:avLst/>
+          </a:prstGeom>
+          <a:solidFill>
+            <a:srgbClr val="7030A0"/>
+          </a:solidFill>
+        </p:spPr>
+        <p:style>
+          <a:lnRef idx="2">
+            <a:schemeClr val="accent1">
+              <a:shade val="15000"/>
+            </a:schemeClr>
+          </a:lnRef>
+          <a:fillRef idx="1">
+            <a:schemeClr val="accent1"/>
+          </a:fillRef>
+          <a:effectRef idx="0">
+            <a:schemeClr val="accent1"/>
+          </a:effectRef>
+          <a:fontRef idx="minor">
+            <a:schemeClr val="lt1"/>
+          </a:fontRef>
+        </p:style>
+        <p:txBody>
+          <a:bodyPr rtlCol="0" anchor="ctr"/>
+          <a:lstStyle/>
+          <a:p>
+            <a:pPr algn="ctr"/>
+            <a:r>
+              <a:rPr lang="en-DE" sz="1050" dirty="0"/>
+              <a:t>Docker Simulators</a:t>
+            </a:r>
+          </a:p>
+        </p:txBody>
+      </p:sp>
+      <p:sp>
+        <p:nvSpPr>
+          <p:cNvPr id="5" name="Rounded Rectangle 4">
+            <a:extLst>
+              <a:ext uri="{FF2B5EF4-FFF2-40B4-BE49-F238E27FC236}">
+                <a16:creationId xmlns:a16="http://schemas.microsoft.com/office/drawing/2014/main" id="{684CD456-8740-7B40-8B33-F218FFFD039E}"/>
+              </a:ext>
+            </a:extLst>
+          </p:cNvPr>
+          <p:cNvSpPr/>
+          <p:nvPr/>
+        </p:nvSpPr>
+        <p:spPr>
+          <a:xfrm>
+            <a:off x="2429571" y="2071441"/>
+            <a:ext cx="1463597" cy="669074"/>
+          </a:xfrm>
+          <a:prstGeom prst="roundRect">
+            <a:avLst/>
+          </a:prstGeom>
+          <a:solidFill>
+            <a:srgbClr val="7030A0"/>
+          </a:solidFill>
+        </p:spPr>
+        <p:style>
+          <a:lnRef idx="2">
+            <a:schemeClr val="accent1">
+              <a:shade val="15000"/>
+            </a:schemeClr>
+          </a:lnRef>
+          <a:fillRef idx="1">
+            <a:schemeClr val="accent1"/>
+          </a:fillRef>
+          <a:effectRef idx="0">
+            <a:schemeClr val="accent1"/>
+          </a:effectRef>
+          <a:fontRef idx="minor">
+            <a:schemeClr val="lt1"/>
+          </a:fontRef>
+        </p:style>
+        <p:txBody>
+          <a:bodyPr rtlCol="0" anchor="ctr"/>
+          <a:lstStyle/>
+          <a:p>
+            <a:pPr algn="ctr"/>
+            <a:r>
+              <a:rPr lang="en-DE" sz="1050" dirty="0"/>
+              <a:t>Zenoh Route</a:t>
+            </a:r>
+          </a:p>
+        </p:txBody>
+      </p:sp>
+      <p:sp>
+        <p:nvSpPr>
+          <p:cNvPr id="6" name="Rounded Rectangle 5">
+            <a:extLst>
+              <a:ext uri="{FF2B5EF4-FFF2-40B4-BE49-F238E27FC236}">
+                <a16:creationId xmlns:a16="http://schemas.microsoft.com/office/drawing/2014/main" id="{D4D76F73-4FDF-5DC1-8F68-3C361F41ECDD}"/>
+              </a:ext>
+            </a:extLst>
+          </p:cNvPr>
+          <p:cNvSpPr/>
+          <p:nvPr/>
+        </p:nvSpPr>
+        <p:spPr>
+          <a:xfrm>
+            <a:off x="351265" y="1000925"/>
+            <a:ext cx="1321419" cy="669074"/>
+          </a:xfrm>
+          <a:prstGeom prst="roundRect">
+            <a:avLst/>
+          </a:prstGeom>
+          <a:solidFill>
+            <a:srgbClr val="7030A0"/>
+          </a:solidFill>
+        </p:spPr>
+        <p:style>
+          <a:lnRef idx="2">
+            <a:schemeClr val="accent1">
+              <a:shade val="15000"/>
+            </a:schemeClr>
+          </a:lnRef>
+          <a:fillRef idx="1">
+            <a:schemeClr val="accent1"/>
+          </a:fillRef>
+          <a:effectRef idx="0">
+            <a:schemeClr val="accent1"/>
+          </a:effectRef>
+          <a:fontRef idx="minor">
+            <a:schemeClr val="lt1"/>
+          </a:fontRef>
+        </p:style>
+        <p:txBody>
+          <a:bodyPr rtlCol="0" anchor="ctr"/>
+          <a:lstStyle/>
+          <a:p>
+            <a:pPr marL="128588" indent="-128588">
+              <a:buFont typeface="Arial" panose="020B0604020202020204" pitchFamily="34" charset="0"/>
+              <a:buChar char="•"/>
+            </a:pPr>
+            <a:r>
+              <a:rPr lang="en-DE" sz="600" dirty="0"/>
+              <a:t>Temperature Simulator </a:t>
+            </a:r>
+          </a:p>
+          <a:p>
+            <a:pPr marL="128588" indent="-128588">
+              <a:buFont typeface="Arial" panose="020B0604020202020204" pitchFamily="34" charset="0"/>
+              <a:buChar char="•"/>
+            </a:pPr>
+            <a:r>
+              <a:rPr lang="en-DE" sz="600" dirty="0"/>
+              <a:t>Window Simulator  </a:t>
+            </a:r>
+          </a:p>
+          <a:p>
+            <a:pPr marL="128588" indent="-128588">
+              <a:buFont typeface="Arial" panose="020B0604020202020204" pitchFamily="34" charset="0"/>
+              <a:buChar char="•"/>
+            </a:pPr>
+            <a:r>
+              <a:rPr lang="en-DE" sz="600" dirty="0"/>
+              <a:t>Child Presence Simulator </a:t>
+            </a:r>
+          </a:p>
+          <a:p>
+            <a:pPr marL="128588" indent="-128588">
+              <a:buFont typeface="Arial" panose="020B0604020202020204" pitchFamily="34" charset="0"/>
+              <a:buChar char="•"/>
+            </a:pPr>
+            <a:r>
+              <a:rPr lang="en-DE" sz="600" dirty="0"/>
+              <a:t>HVAC Simulator    </a:t>
+            </a:r>
+          </a:p>
+          <a:p>
+            <a:pPr marL="128588" indent="-128588">
+              <a:buFont typeface="Arial" panose="020B0604020202020204" pitchFamily="34" charset="0"/>
+              <a:buChar char="•"/>
+            </a:pPr>
+            <a:r>
+              <a:rPr lang="en-DE" sz="600" dirty="0"/>
+              <a:t>Guardian </a:t>
+            </a:r>
+          </a:p>
+        </p:txBody>
+      </p:sp>
+      <p:sp>
+        <p:nvSpPr>
+          <p:cNvPr id="7" name="Rounded Rectangle 6">
+            <a:extLst>
+              <a:ext uri="{FF2B5EF4-FFF2-40B4-BE49-F238E27FC236}">
+                <a16:creationId xmlns:a16="http://schemas.microsoft.com/office/drawing/2014/main" id="{76977979-5E36-A5BC-D757-D6807DEC1167}"/>
+              </a:ext>
+            </a:extLst>
+          </p:cNvPr>
+          <p:cNvSpPr/>
+          <p:nvPr/>
+        </p:nvSpPr>
+        <p:spPr>
+          <a:xfrm>
+            <a:off x="2429569" y="4112114"/>
+            <a:ext cx="1463597" cy="669074"/>
+          </a:xfrm>
+          <a:prstGeom prst="roundRect">
+            <a:avLst/>
+          </a:prstGeom>
+          <a:solidFill>
+            <a:srgbClr val="7030A0"/>
+          </a:solidFill>
+        </p:spPr>
+        <p:style>
+          <a:lnRef idx="2">
+            <a:schemeClr val="accent1">
+              <a:shade val="15000"/>
+            </a:schemeClr>
+          </a:lnRef>
+          <a:fillRef idx="1">
+            <a:schemeClr val="accent1"/>
+          </a:fillRef>
+          <a:effectRef idx="0">
+            <a:schemeClr val="accent1"/>
+          </a:effectRef>
+          <a:fontRef idx="minor">
+            <a:schemeClr val="lt1"/>
+          </a:fontRef>
+        </p:style>
+        <p:txBody>
+          <a:bodyPr rtlCol="0" anchor="ctr"/>
+          <a:lstStyle/>
+          <a:p>
+            <a:pPr algn="ctr"/>
+            <a:r>
+              <a:rPr lang="en-DE" sz="1050" dirty="0"/>
+              <a:t>Write CSV</a:t>
+            </a:r>
+          </a:p>
+        </p:txBody>
+      </p:sp>
+      <p:sp>
+        <p:nvSpPr>
+          <p:cNvPr id="8" name="Rounded Rectangle 7">
+            <a:extLst>
+              <a:ext uri="{FF2B5EF4-FFF2-40B4-BE49-F238E27FC236}">
+                <a16:creationId xmlns:a16="http://schemas.microsoft.com/office/drawing/2014/main" id="{6CE0A187-D75B-4F23-C46C-ADAAA37B005B}"/>
+              </a:ext>
+            </a:extLst>
+          </p:cNvPr>
+          <p:cNvSpPr/>
+          <p:nvPr/>
+        </p:nvSpPr>
+        <p:spPr>
+          <a:xfrm>
+            <a:off x="2429570" y="3141956"/>
+            <a:ext cx="1463597" cy="669074"/>
+          </a:xfrm>
+          <a:prstGeom prst="roundRect">
+            <a:avLst/>
+          </a:prstGeom>
+          <a:solidFill>
+            <a:srgbClr val="7030A0"/>
+          </a:solidFill>
+        </p:spPr>
+        <p:style>
+          <a:lnRef idx="2">
+            <a:schemeClr val="accent1">
+              <a:shade val="15000"/>
+            </a:schemeClr>
+          </a:lnRef>
+          <a:fillRef idx="1">
+            <a:schemeClr val="accent1"/>
+          </a:fillRef>
+          <a:effectRef idx="0">
+            <a:schemeClr val="accent1"/>
+          </a:effectRef>
+          <a:fontRef idx="minor">
+            <a:schemeClr val="lt1"/>
+          </a:fontRef>
+        </p:style>
+        <p:txBody>
+          <a:bodyPr rtlCol="0" anchor="ctr"/>
+          <a:lstStyle/>
+          <a:p>
+            <a:pPr algn="ctr"/>
+            <a:r>
+              <a:rPr lang="en-DE" sz="1050" dirty="0"/>
+              <a:t>Python Data Collector</a:t>
+            </a:r>
+          </a:p>
+        </p:txBody>
+      </p:sp>
+      <p:cxnSp>
+        <p:nvCxnSpPr>
+          <p:cNvPr id="10" name="Straight Arrow Connector 9">
+            <a:extLst>
+              <a:ext uri="{FF2B5EF4-FFF2-40B4-BE49-F238E27FC236}">
+                <a16:creationId xmlns:a16="http://schemas.microsoft.com/office/drawing/2014/main" id="{E40351D4-713C-6B2C-AE2F-E0C095A35277}"/>
+              </a:ext>
+            </a:extLst>
+          </p:cNvPr>
+          <p:cNvCxnSpPr>
+            <a:stCxn id="4" idx="2"/>
+            <a:endCxn id="5" idx="0"/>
+          </p:cNvCxnSpPr>
+          <p:nvPr/>
+        </p:nvCxnSpPr>
+        <p:spPr>
+          <a:xfrm flipH="1">
+            <a:off x="3161370" y="1669999"/>
+            <a:ext cx="1" cy="401443"/>
+          </a:xfrm>
+          <a:prstGeom prst="straightConnector1">
+            <a:avLst/>
+          </a:prstGeom>
+          <a:ln>
+            <a:tailEnd type="triangle"/>
+          </a:ln>
+        </p:spPr>
+        <p:style>
+          <a:lnRef idx="2">
+            <a:schemeClr val="accent1"/>
+          </a:lnRef>
+          <a:fillRef idx="0">
+            <a:schemeClr val="accent1"/>
+          </a:fillRef>
+          <a:effectRef idx="1">
+            <a:schemeClr val="accent1"/>
+          </a:effectRef>
+          <a:fontRef idx="minor">
+            <a:schemeClr val="tx1"/>
+          </a:fontRef>
+        </p:style>
+      </p:cxnSp>
+      <p:cxnSp>
+        <p:nvCxnSpPr>
+          <p:cNvPr id="12" name="Straight Arrow Connector 11">
+            <a:extLst>
+              <a:ext uri="{FF2B5EF4-FFF2-40B4-BE49-F238E27FC236}">
+                <a16:creationId xmlns:a16="http://schemas.microsoft.com/office/drawing/2014/main" id="{C82F6154-AD9E-35ED-382E-27312110AD4D}"/>
+              </a:ext>
+            </a:extLst>
+          </p:cNvPr>
+          <p:cNvCxnSpPr>
+            <a:stCxn id="6" idx="3"/>
+            <a:endCxn id="4" idx="1"/>
+          </p:cNvCxnSpPr>
+          <p:nvPr/>
+        </p:nvCxnSpPr>
+        <p:spPr>
+          <a:xfrm>
+            <a:off x="1672684" y="1335462"/>
+            <a:ext cx="756887" cy="0"/>
+          </a:xfrm>
+          <a:prstGeom prst="straightConnector1">
+            <a:avLst/>
+          </a:prstGeom>
+          <a:ln>
+            <a:tailEnd type="triangle"/>
+          </a:ln>
+        </p:spPr>
+        <p:style>
+          <a:lnRef idx="2">
+            <a:schemeClr val="accent1"/>
+          </a:lnRef>
+          <a:fillRef idx="0">
+            <a:schemeClr val="accent1"/>
+          </a:fillRef>
+          <a:effectRef idx="1">
+            <a:schemeClr val="accent1"/>
+          </a:effectRef>
+          <a:fontRef idx="minor">
+            <a:schemeClr val="tx1"/>
+          </a:fontRef>
+        </p:style>
+      </p:cxnSp>
+      <p:sp>
+        <p:nvSpPr>
+          <p:cNvPr id="15" name="TextBox 14">
+            <a:extLst>
+              <a:ext uri="{FF2B5EF4-FFF2-40B4-BE49-F238E27FC236}">
+                <a16:creationId xmlns:a16="http://schemas.microsoft.com/office/drawing/2014/main" id="{EE3FE7BD-A018-6C30-D0DC-77CE11260B9A}"/>
+              </a:ext>
+            </a:extLst>
+          </p:cNvPr>
           <p:cNvSpPr txBox="1"/>
           <p:nvPr/>
         </p:nvSpPr>
         <p:spPr>
           <a:xfrm>
-            <a:off x="971300" y="4808250"/>
-            <a:ext cx="5334600" cy="292500"/>
+            <a:off x="3161368" y="1732220"/>
+            <a:ext cx="1078883" cy="300082"/>
+          </a:xfrm>
+          <a:prstGeom prst="rect">
+            <a:avLst/>
+          </a:prstGeom>
+          <a:noFill/>
+        </p:spPr>
+        <p:txBody>
+          <a:bodyPr wrap="square" rtlCol="0">
+            <a:spAutoFit/>
+          </a:bodyPr>
+          <a:lstStyle/>
+          <a:p>
+            <a:r>
+              <a:rPr lang="en-DE" sz="675" dirty="0"/>
+              <a:t>Publishes Real-time data as uProtocol data</a:t>
+            </a:r>
+          </a:p>
+        </p:txBody>
+      </p:sp>
+      <p:cxnSp>
+        <p:nvCxnSpPr>
+          <p:cNvPr id="16" name="Straight Arrow Connector 15">
+            <a:extLst>
+              <a:ext uri="{FF2B5EF4-FFF2-40B4-BE49-F238E27FC236}">
+                <a16:creationId xmlns:a16="http://schemas.microsoft.com/office/drawing/2014/main" id="{B598AD92-6975-51EB-0E0F-302857BA80EB}"/>
+              </a:ext>
+            </a:extLst>
+          </p:cNvPr>
+          <p:cNvCxnSpPr>
+            <a:cxnSpLocks/>
+            <a:stCxn id="8" idx="2"/>
+            <a:endCxn id="7" idx="0"/>
+          </p:cNvCxnSpPr>
+          <p:nvPr/>
+        </p:nvCxnSpPr>
+        <p:spPr>
+          <a:xfrm flipH="1">
+            <a:off x="3161368" y="3811030"/>
+            <a:ext cx="1" cy="301084"/>
+          </a:xfrm>
+          <a:prstGeom prst="straightConnector1">
+            <a:avLst/>
+          </a:prstGeom>
+          <a:ln>
+            <a:tailEnd type="triangle"/>
+          </a:ln>
+        </p:spPr>
+        <p:style>
+          <a:lnRef idx="2">
+            <a:schemeClr val="accent1"/>
+          </a:lnRef>
+          <a:fillRef idx="0">
+            <a:schemeClr val="accent1"/>
+          </a:fillRef>
+          <a:effectRef idx="1">
+            <a:schemeClr val="accent1"/>
+          </a:effectRef>
+          <a:fontRef idx="minor">
+            <a:schemeClr val="tx1"/>
+          </a:fontRef>
+        </p:style>
+      </p:cxnSp>
+      <p:sp>
+        <p:nvSpPr>
+          <p:cNvPr id="19" name="TextBox 18">
+            <a:extLst>
+              <a:ext uri="{FF2B5EF4-FFF2-40B4-BE49-F238E27FC236}">
+                <a16:creationId xmlns:a16="http://schemas.microsoft.com/office/drawing/2014/main" id="{162EA9F3-A20E-BCDA-8401-AC42772A68D1}"/>
+              </a:ext>
+            </a:extLst>
+          </p:cNvPr>
+          <p:cNvSpPr txBox="1"/>
+          <p:nvPr/>
+        </p:nvSpPr>
+        <p:spPr>
+          <a:xfrm>
+            <a:off x="3250578" y="2802736"/>
+            <a:ext cx="922763" cy="300082"/>
+          </a:xfrm>
+          <a:prstGeom prst="rect">
+            <a:avLst/>
+          </a:prstGeom>
+          <a:noFill/>
+        </p:spPr>
+        <p:txBody>
+          <a:bodyPr wrap="square" rtlCol="0">
+            <a:spAutoFit/>
+          </a:bodyPr>
+          <a:lstStyle/>
+          <a:p>
+            <a:r>
+              <a:rPr lang="en-DE" sz="675" dirty="0"/>
+              <a:t>Python subscribes to those events</a:t>
+            </a:r>
+          </a:p>
+        </p:txBody>
+      </p:sp>
+      <p:cxnSp>
+        <p:nvCxnSpPr>
+          <p:cNvPr id="22" name="Straight Arrow Connector 21">
+            <a:extLst>
+              <a:ext uri="{FF2B5EF4-FFF2-40B4-BE49-F238E27FC236}">
+                <a16:creationId xmlns:a16="http://schemas.microsoft.com/office/drawing/2014/main" id="{199262B5-9CEA-ECCB-34C3-C63F13A02D8F}"/>
+              </a:ext>
+            </a:extLst>
+          </p:cNvPr>
+          <p:cNvCxnSpPr>
+            <a:cxnSpLocks/>
+            <a:stCxn id="5" idx="2"/>
+            <a:endCxn id="8" idx="0"/>
+          </p:cNvCxnSpPr>
+          <p:nvPr/>
+        </p:nvCxnSpPr>
+        <p:spPr>
+          <a:xfrm flipH="1">
+            <a:off x="3161369" y="2740515"/>
+            <a:ext cx="1" cy="401442"/>
+          </a:xfrm>
+          <a:prstGeom prst="straightConnector1">
+            <a:avLst/>
+          </a:prstGeom>
+          <a:ln>
+            <a:tailEnd type="triangle"/>
+          </a:ln>
+        </p:spPr>
+        <p:style>
+          <a:lnRef idx="2">
+            <a:schemeClr val="accent1"/>
+          </a:lnRef>
+          <a:fillRef idx="0">
+            <a:schemeClr val="accent1"/>
+          </a:fillRef>
+          <a:effectRef idx="1">
+            <a:schemeClr val="accent1"/>
+          </a:effectRef>
+          <a:fontRef idx="minor">
+            <a:schemeClr val="tx1"/>
+          </a:fontRef>
+        </p:style>
+      </p:cxnSp>
+      <p:sp>
+        <p:nvSpPr>
+          <p:cNvPr id="25" name="Rounded Rectangle 24">
+            <a:extLst>
+              <a:ext uri="{FF2B5EF4-FFF2-40B4-BE49-F238E27FC236}">
+                <a16:creationId xmlns:a16="http://schemas.microsoft.com/office/drawing/2014/main" id="{454F912C-B8B2-BE12-A479-CDE826D0389D}"/>
+              </a:ext>
+            </a:extLst>
+          </p:cNvPr>
+          <p:cNvSpPr/>
+          <p:nvPr/>
+        </p:nvSpPr>
+        <p:spPr>
+          <a:xfrm>
+            <a:off x="4746232" y="1000925"/>
+            <a:ext cx="1463597" cy="669074"/>
+          </a:xfrm>
+          <a:prstGeom prst="roundRect">
+            <a:avLst/>
+          </a:prstGeom>
+          <a:solidFill>
+            <a:srgbClr val="7030A0"/>
+          </a:solidFill>
+        </p:spPr>
+        <p:style>
+          <a:lnRef idx="2">
+            <a:schemeClr val="accent1">
+              <a:shade val="15000"/>
+            </a:schemeClr>
+          </a:lnRef>
+          <a:fillRef idx="1">
+            <a:schemeClr val="accent1"/>
+          </a:fillRef>
+          <a:effectRef idx="0">
+            <a:schemeClr val="accent1"/>
+          </a:effectRef>
+          <a:fontRef idx="minor">
+            <a:schemeClr val="lt1"/>
+          </a:fontRef>
+        </p:style>
+        <p:txBody>
+          <a:bodyPr rtlCol="0" anchor="ctr"/>
+          <a:lstStyle/>
+          <a:p>
+            <a:pPr algn="ctr"/>
+            <a:r>
+              <a:rPr lang="en-DE" sz="1050" dirty="0"/>
+              <a:t>Data Cleaning</a:t>
+            </a:r>
+          </a:p>
+        </p:txBody>
+      </p:sp>
+      <p:cxnSp>
+        <p:nvCxnSpPr>
+          <p:cNvPr id="30" name="Elbow Connector 29">
+            <a:extLst>
+              <a:ext uri="{FF2B5EF4-FFF2-40B4-BE49-F238E27FC236}">
+                <a16:creationId xmlns:a16="http://schemas.microsoft.com/office/drawing/2014/main" id="{4913FAA8-61F2-36A5-0978-D278E5ADB0FA}"/>
+              </a:ext>
+            </a:extLst>
+          </p:cNvPr>
+          <p:cNvCxnSpPr>
+            <a:cxnSpLocks/>
+            <a:stCxn id="7" idx="3"/>
+            <a:endCxn id="25" idx="1"/>
+          </p:cNvCxnSpPr>
+          <p:nvPr/>
+        </p:nvCxnSpPr>
+        <p:spPr>
+          <a:xfrm flipV="1">
+            <a:off x="3893166" y="1335462"/>
+            <a:ext cx="853066" cy="3111189"/>
+          </a:xfrm>
+          <a:prstGeom prst="bentConnector3">
+            <a:avLst>
+              <a:gd name="adj1" fmla="val 50000"/>
+            </a:avLst>
+          </a:prstGeom>
+          <a:ln>
+            <a:tailEnd type="triangle"/>
+          </a:ln>
+        </p:spPr>
+        <p:style>
+          <a:lnRef idx="2">
+            <a:schemeClr val="accent1"/>
+          </a:lnRef>
+          <a:fillRef idx="0">
+            <a:schemeClr val="accent1"/>
+          </a:fillRef>
+          <a:effectRef idx="1">
+            <a:schemeClr val="accent1"/>
+          </a:effectRef>
+          <a:fontRef idx="minor">
+            <a:schemeClr val="tx1"/>
+          </a:fontRef>
+        </p:style>
+      </p:cxnSp>
+      <p:sp>
+        <p:nvSpPr>
+          <p:cNvPr id="33" name="Rounded Rectangle 32">
+            <a:extLst>
+              <a:ext uri="{FF2B5EF4-FFF2-40B4-BE49-F238E27FC236}">
+                <a16:creationId xmlns:a16="http://schemas.microsoft.com/office/drawing/2014/main" id="{875228AD-4F85-F78F-253A-58CD2DA5F7B8}"/>
+              </a:ext>
+            </a:extLst>
+          </p:cNvPr>
+          <p:cNvSpPr/>
+          <p:nvPr/>
+        </p:nvSpPr>
+        <p:spPr>
+          <a:xfrm>
+            <a:off x="4746232" y="1934839"/>
+            <a:ext cx="1463597" cy="669074"/>
+          </a:xfrm>
+          <a:prstGeom prst="roundRect">
+            <a:avLst/>
+          </a:prstGeom>
+          <a:solidFill>
+            <a:srgbClr val="7030A0"/>
+          </a:solidFill>
+        </p:spPr>
+        <p:style>
+          <a:lnRef idx="2">
+            <a:schemeClr val="accent1">
+              <a:shade val="15000"/>
+            </a:schemeClr>
+          </a:lnRef>
+          <a:fillRef idx="1">
+            <a:schemeClr val="accent1"/>
+          </a:fillRef>
+          <a:effectRef idx="0">
+            <a:schemeClr val="accent1"/>
+          </a:effectRef>
+          <a:fontRef idx="minor">
+            <a:schemeClr val="lt1"/>
+          </a:fontRef>
+        </p:style>
+        <p:txBody>
+          <a:bodyPr rtlCol="0" anchor="ctr"/>
+          <a:lstStyle/>
+          <a:p>
+            <a:pPr algn="ctr"/>
+            <a:r>
+              <a:rPr lang="en-DE" sz="1050" dirty="0"/>
+              <a:t>Feature Engineering</a:t>
+            </a:r>
+          </a:p>
+        </p:txBody>
+      </p:sp>
+      <p:cxnSp>
+        <p:nvCxnSpPr>
+          <p:cNvPr id="35" name="Straight Arrow Connector 34">
+            <a:extLst>
+              <a:ext uri="{FF2B5EF4-FFF2-40B4-BE49-F238E27FC236}">
+                <a16:creationId xmlns:a16="http://schemas.microsoft.com/office/drawing/2014/main" id="{F41E372E-CBEF-3FE0-0D85-ABA392CD293A}"/>
+              </a:ext>
+            </a:extLst>
+          </p:cNvPr>
+          <p:cNvCxnSpPr>
+            <a:stCxn id="25" idx="2"/>
+            <a:endCxn id="33" idx="0"/>
+          </p:cNvCxnSpPr>
+          <p:nvPr/>
+        </p:nvCxnSpPr>
+        <p:spPr>
+          <a:xfrm>
+            <a:off x="5478031" y="1669999"/>
+            <a:ext cx="0" cy="264841"/>
+          </a:xfrm>
+          <a:prstGeom prst="straightConnector1">
+            <a:avLst/>
+          </a:prstGeom>
+          <a:ln>
+            <a:tailEnd type="triangle"/>
+          </a:ln>
+        </p:spPr>
+        <p:style>
+          <a:lnRef idx="2">
+            <a:schemeClr val="accent1"/>
+          </a:lnRef>
+          <a:fillRef idx="0">
+            <a:schemeClr val="accent1"/>
+          </a:fillRef>
+          <a:effectRef idx="1">
+            <a:schemeClr val="accent1"/>
+          </a:effectRef>
+          <a:fontRef idx="minor">
+            <a:schemeClr val="tx1"/>
+          </a:fontRef>
+        </p:style>
+      </p:cxnSp>
+      <p:sp>
+        <p:nvSpPr>
+          <p:cNvPr id="36" name="Rounded Rectangle 35">
+            <a:extLst>
+              <a:ext uri="{FF2B5EF4-FFF2-40B4-BE49-F238E27FC236}">
+                <a16:creationId xmlns:a16="http://schemas.microsoft.com/office/drawing/2014/main" id="{82F13F13-E42B-DADC-4C40-99FC92127716}"/>
+              </a:ext>
+            </a:extLst>
+          </p:cNvPr>
+          <p:cNvSpPr/>
+          <p:nvPr/>
+        </p:nvSpPr>
+        <p:spPr>
+          <a:xfrm>
+            <a:off x="4746229" y="3028355"/>
+            <a:ext cx="1463597" cy="669074"/>
+          </a:xfrm>
+          <a:prstGeom prst="roundRect">
+            <a:avLst/>
+          </a:prstGeom>
+          <a:solidFill>
+            <a:srgbClr val="7030A0"/>
+          </a:solidFill>
+        </p:spPr>
+        <p:style>
+          <a:lnRef idx="2">
+            <a:schemeClr val="accent1">
+              <a:shade val="15000"/>
+            </a:schemeClr>
+          </a:lnRef>
+          <a:fillRef idx="1">
+            <a:schemeClr val="accent1"/>
+          </a:fillRef>
+          <a:effectRef idx="0">
+            <a:schemeClr val="accent1"/>
+          </a:effectRef>
+          <a:fontRef idx="minor">
+            <a:schemeClr val="lt1"/>
+          </a:fontRef>
+        </p:style>
+        <p:txBody>
+          <a:bodyPr rtlCol="0" anchor="ctr"/>
+          <a:lstStyle/>
+          <a:p>
+            <a:pPr algn="ctr"/>
+            <a:r>
+              <a:rPr lang="en-DE" sz="1050" dirty="0"/>
+              <a:t>Anamoly detection</a:t>
+            </a:r>
+          </a:p>
+        </p:txBody>
+      </p:sp>
+      <p:sp>
+        <p:nvSpPr>
+          <p:cNvPr id="37" name="Rounded Rectangle 36">
+            <a:extLst>
+              <a:ext uri="{FF2B5EF4-FFF2-40B4-BE49-F238E27FC236}">
+                <a16:creationId xmlns:a16="http://schemas.microsoft.com/office/drawing/2014/main" id="{5D08772E-BEBB-32AE-3EAC-DCF5E34096DE}"/>
+              </a:ext>
+            </a:extLst>
+          </p:cNvPr>
+          <p:cNvSpPr/>
+          <p:nvPr/>
+        </p:nvSpPr>
+        <p:spPr>
+          <a:xfrm>
+            <a:off x="7132593" y="3012325"/>
+            <a:ext cx="1463597" cy="669074"/>
+          </a:xfrm>
+          <a:prstGeom prst="roundRect">
+            <a:avLst/>
+          </a:prstGeom>
+          <a:solidFill>
+            <a:srgbClr val="7030A0"/>
+          </a:solidFill>
+        </p:spPr>
+        <p:style>
+          <a:lnRef idx="2">
+            <a:schemeClr val="accent1">
+              <a:shade val="15000"/>
+            </a:schemeClr>
+          </a:lnRef>
+          <a:fillRef idx="1">
+            <a:schemeClr val="accent1"/>
+          </a:fillRef>
+          <a:effectRef idx="0">
+            <a:schemeClr val="accent1"/>
+          </a:effectRef>
+          <a:fontRef idx="minor">
+            <a:schemeClr val="lt1"/>
+          </a:fontRef>
+        </p:style>
+        <p:txBody>
+          <a:bodyPr rtlCol="0" anchor="ctr"/>
+          <a:lstStyle/>
+          <a:p>
+            <a:pPr algn="ctr"/>
+            <a:r>
+              <a:rPr lang="en-DE" sz="1050" dirty="0"/>
+              <a:t>Temperture predictions</a:t>
+            </a:r>
+          </a:p>
+        </p:txBody>
+      </p:sp>
+      <p:sp>
+        <p:nvSpPr>
+          <p:cNvPr id="38" name="Rounded Rectangle 37">
+            <a:extLst>
+              <a:ext uri="{FF2B5EF4-FFF2-40B4-BE49-F238E27FC236}">
+                <a16:creationId xmlns:a16="http://schemas.microsoft.com/office/drawing/2014/main" id="{90F0FBF8-234F-9319-B8E3-3D5A262F69C4}"/>
+              </a:ext>
+            </a:extLst>
+          </p:cNvPr>
+          <p:cNvSpPr/>
+          <p:nvPr/>
+        </p:nvSpPr>
+        <p:spPr>
+          <a:xfrm>
+            <a:off x="4746229" y="4121871"/>
+            <a:ext cx="1463597" cy="669074"/>
+          </a:xfrm>
+          <a:prstGeom prst="roundRect">
+            <a:avLst/>
+          </a:prstGeom>
+          <a:solidFill>
+            <a:srgbClr val="7030A0"/>
+          </a:solidFill>
+        </p:spPr>
+        <p:style>
+          <a:lnRef idx="2">
+            <a:schemeClr val="accent1">
+              <a:shade val="15000"/>
+            </a:schemeClr>
+          </a:lnRef>
+          <a:fillRef idx="1">
+            <a:schemeClr val="accent1"/>
+          </a:fillRef>
+          <a:effectRef idx="0">
+            <a:schemeClr val="accent1"/>
+          </a:effectRef>
+          <a:fontRef idx="minor">
+            <a:schemeClr val="lt1"/>
+          </a:fontRef>
+        </p:style>
+        <p:txBody>
+          <a:bodyPr rtlCol="0" anchor="ctr"/>
+          <a:lstStyle/>
+          <a:p>
+            <a:pPr marL="214313" indent="-214313">
+              <a:buFont typeface="Arial" panose="020B0604020202020204" pitchFamily="34" charset="0"/>
+              <a:buChar char="•"/>
+            </a:pPr>
+            <a:r>
+              <a:rPr lang="en-DE" sz="788" dirty="0"/>
+              <a:t>HVAC Anamolies</a:t>
+            </a:r>
+          </a:p>
+          <a:p>
+            <a:pPr marL="214313" indent="-214313">
+              <a:buFont typeface="Arial" panose="020B0604020202020204" pitchFamily="34" charset="0"/>
+              <a:buChar char="•"/>
+            </a:pPr>
+            <a:r>
+              <a:rPr lang="en-DE" sz="788" dirty="0"/>
+              <a:t>Temperature Anamolies</a:t>
+            </a:r>
+          </a:p>
+          <a:p>
+            <a:pPr marL="214313" indent="-214313">
+              <a:buFont typeface="Arial" panose="020B0604020202020204" pitchFamily="34" charset="0"/>
+              <a:buChar char="•"/>
+            </a:pPr>
+            <a:r>
+              <a:rPr lang="en-DE" sz="788" dirty="0"/>
+              <a:t>Child Safety Anamolies</a:t>
+            </a:r>
+          </a:p>
+        </p:txBody>
+      </p:sp>
+      <p:sp>
+        <p:nvSpPr>
+          <p:cNvPr id="39" name="Rounded Rectangle 38">
+            <a:extLst>
+              <a:ext uri="{FF2B5EF4-FFF2-40B4-BE49-F238E27FC236}">
+                <a16:creationId xmlns:a16="http://schemas.microsoft.com/office/drawing/2014/main" id="{38B0AB2F-6CC7-F549-BB70-F494BEC115B6}"/>
+              </a:ext>
+            </a:extLst>
+          </p:cNvPr>
+          <p:cNvSpPr/>
+          <p:nvPr/>
+        </p:nvSpPr>
+        <p:spPr>
+          <a:xfrm>
+            <a:off x="7132593" y="4121872"/>
+            <a:ext cx="1463597" cy="669074"/>
+          </a:xfrm>
+          <a:prstGeom prst="roundRect">
+            <a:avLst/>
+          </a:prstGeom>
+          <a:solidFill>
+            <a:srgbClr val="7030A0"/>
+          </a:solidFill>
+        </p:spPr>
+        <p:style>
+          <a:lnRef idx="2">
+            <a:schemeClr val="accent1">
+              <a:shade val="15000"/>
+            </a:schemeClr>
+          </a:lnRef>
+          <a:fillRef idx="1">
+            <a:schemeClr val="accent1"/>
+          </a:fillRef>
+          <a:effectRef idx="0">
+            <a:schemeClr val="accent1"/>
+          </a:effectRef>
+          <a:fontRef idx="minor">
+            <a:schemeClr val="lt1"/>
+          </a:fontRef>
+        </p:style>
+        <p:txBody>
+          <a:bodyPr rtlCol="0" anchor="ctr"/>
+          <a:lstStyle/>
+          <a:p>
+            <a:pPr algn="ctr"/>
+            <a:r>
+              <a:rPr lang="en-DE" sz="1050" dirty="0"/>
+              <a:t>How the temperature is likely to behave within the next 10 minutes.”</a:t>
+            </a:r>
+          </a:p>
+        </p:txBody>
+      </p:sp>
+      <p:cxnSp>
+        <p:nvCxnSpPr>
+          <p:cNvPr id="40" name="Straight Arrow Connector 39">
+            <a:extLst>
+              <a:ext uri="{FF2B5EF4-FFF2-40B4-BE49-F238E27FC236}">
+                <a16:creationId xmlns:a16="http://schemas.microsoft.com/office/drawing/2014/main" id="{3B7199C7-CCDE-CD90-7425-918704415C57}"/>
+              </a:ext>
+            </a:extLst>
+          </p:cNvPr>
+          <p:cNvCxnSpPr>
+            <a:cxnSpLocks/>
+            <a:stCxn id="38" idx="0"/>
+            <a:endCxn id="36" idx="2"/>
+          </p:cNvCxnSpPr>
+          <p:nvPr/>
+        </p:nvCxnSpPr>
+        <p:spPr>
+          <a:xfrm flipV="1">
+            <a:off x="5478027" y="3697428"/>
+            <a:ext cx="1" cy="424443"/>
+          </a:xfrm>
+          <a:prstGeom prst="straightConnector1">
+            <a:avLst/>
+          </a:prstGeom>
+          <a:ln>
+            <a:tailEnd type="triangle"/>
+          </a:ln>
+        </p:spPr>
+        <p:style>
+          <a:lnRef idx="2">
+            <a:schemeClr val="accent1"/>
+          </a:lnRef>
+          <a:fillRef idx="0">
+            <a:schemeClr val="accent1"/>
+          </a:fillRef>
+          <a:effectRef idx="1">
+            <a:schemeClr val="accent1"/>
+          </a:effectRef>
+          <a:fontRef idx="minor">
+            <a:schemeClr val="tx1"/>
+          </a:fontRef>
+        </p:style>
+      </p:cxnSp>
+      <p:cxnSp>
+        <p:nvCxnSpPr>
+          <p:cNvPr id="43" name="Straight Arrow Connector 42">
+            <a:extLst>
+              <a:ext uri="{FF2B5EF4-FFF2-40B4-BE49-F238E27FC236}">
+                <a16:creationId xmlns:a16="http://schemas.microsoft.com/office/drawing/2014/main" id="{21B7E69A-7388-7A40-B010-F2550E4F03E6}"/>
+              </a:ext>
+            </a:extLst>
+          </p:cNvPr>
+          <p:cNvCxnSpPr>
+            <a:cxnSpLocks/>
+            <a:stCxn id="39" idx="0"/>
+          </p:cNvCxnSpPr>
+          <p:nvPr/>
+        </p:nvCxnSpPr>
+        <p:spPr>
+          <a:xfrm flipV="1">
+            <a:off x="7864391" y="3689762"/>
+            <a:ext cx="0" cy="432110"/>
+          </a:xfrm>
+          <a:prstGeom prst="straightConnector1">
+            <a:avLst/>
+          </a:prstGeom>
+          <a:ln>
+            <a:tailEnd type="triangle"/>
+          </a:ln>
+        </p:spPr>
+        <p:style>
+          <a:lnRef idx="2">
+            <a:schemeClr val="accent1"/>
+          </a:lnRef>
+          <a:fillRef idx="0">
+            <a:schemeClr val="accent1"/>
+          </a:fillRef>
+          <a:effectRef idx="1">
+            <a:schemeClr val="accent1"/>
+          </a:effectRef>
+          <a:fontRef idx="minor">
+            <a:schemeClr val="tx1"/>
+          </a:fontRef>
+        </p:style>
+      </p:cxnSp>
+      <p:cxnSp>
+        <p:nvCxnSpPr>
+          <p:cNvPr id="45" name="Straight Arrow Connector 44">
+            <a:extLst>
+              <a:ext uri="{FF2B5EF4-FFF2-40B4-BE49-F238E27FC236}">
+                <a16:creationId xmlns:a16="http://schemas.microsoft.com/office/drawing/2014/main" id="{6594D608-33F6-2D02-5420-CF470DF127D4}"/>
+              </a:ext>
+            </a:extLst>
+          </p:cNvPr>
+          <p:cNvCxnSpPr>
+            <a:cxnSpLocks/>
+            <a:stCxn id="33" idx="2"/>
+            <a:endCxn id="36" idx="0"/>
+          </p:cNvCxnSpPr>
+          <p:nvPr/>
+        </p:nvCxnSpPr>
+        <p:spPr>
+          <a:xfrm flipH="1">
+            <a:off x="5478028" y="2603913"/>
+            <a:ext cx="3" cy="424442"/>
+          </a:xfrm>
+          <a:prstGeom prst="straightConnector1">
+            <a:avLst/>
+          </a:prstGeom>
+          <a:ln>
+            <a:tailEnd type="triangle"/>
+          </a:ln>
+        </p:spPr>
+        <p:style>
+          <a:lnRef idx="2">
+            <a:schemeClr val="accent1"/>
+          </a:lnRef>
+          <a:fillRef idx="0">
+            <a:schemeClr val="accent1"/>
+          </a:fillRef>
+          <a:effectRef idx="1">
+            <a:schemeClr val="accent1"/>
+          </a:effectRef>
+          <a:fontRef idx="minor">
+            <a:schemeClr val="tx1"/>
+          </a:fontRef>
+        </p:style>
+      </p:cxnSp>
+      <p:cxnSp>
+        <p:nvCxnSpPr>
+          <p:cNvPr id="52" name="Elbow Connector 51">
+            <a:extLst>
+              <a:ext uri="{FF2B5EF4-FFF2-40B4-BE49-F238E27FC236}">
+                <a16:creationId xmlns:a16="http://schemas.microsoft.com/office/drawing/2014/main" id="{C06D2E69-5F3E-1F4B-746D-23AB50671167}"/>
+              </a:ext>
+            </a:extLst>
+          </p:cNvPr>
+          <p:cNvCxnSpPr>
+            <a:stCxn id="33" idx="2"/>
+            <a:endCxn id="37" idx="0"/>
+          </p:cNvCxnSpPr>
+          <p:nvPr/>
+        </p:nvCxnSpPr>
+        <p:spPr>
+          <a:xfrm rot="16200000" flipH="1">
+            <a:off x="6467005" y="1614938"/>
+            <a:ext cx="408413" cy="2386361"/>
+          </a:xfrm>
+          <a:prstGeom prst="bentConnector3">
+            <a:avLst/>
+          </a:prstGeom>
+          <a:ln>
+            <a:tailEnd type="triangle"/>
+          </a:ln>
+        </p:spPr>
+        <p:style>
+          <a:lnRef idx="2">
+            <a:schemeClr val="accent1"/>
+          </a:lnRef>
+          <a:fillRef idx="0">
+            <a:schemeClr val="accent1"/>
+          </a:fillRef>
+          <a:effectRef idx="1">
+            <a:schemeClr val="accent1"/>
+          </a:effectRef>
+          <a:fontRef idx="minor">
+            <a:schemeClr val="tx1"/>
+          </a:fontRef>
+        </p:style>
+      </p:cxnSp>
+      <p:sp>
+        <p:nvSpPr>
+          <p:cNvPr id="2" name="Google Shape;103;p18">
+            <a:extLst>
+              <a:ext uri="{FF2B5EF4-FFF2-40B4-BE49-F238E27FC236}">
+                <a16:creationId xmlns:a16="http://schemas.microsoft.com/office/drawing/2014/main" id="{0392AAFA-3183-036C-ACE1-19D0EC1FA72B}"/>
+              </a:ext>
+            </a:extLst>
+          </p:cNvPr>
+          <p:cNvSpPr txBox="1"/>
+          <p:nvPr/>
+        </p:nvSpPr>
+        <p:spPr>
+          <a:xfrm>
+            <a:off x="351265" y="324004"/>
+            <a:ext cx="7360200" cy="464700"/>
           </a:xfrm>
           <a:prstGeom prst="rect">
             <a:avLst/>
@@ -13969,112 +17476,26 @@
               <a:spcAft>
                 <a:spcPts val="0"/>
               </a:spcAft>
+              <a:buClr>
+                <a:schemeClr val="dk1"/>
+              </a:buClr>
+              <a:buSzPts val="990"/>
+              <a:buFont typeface="Arial"/>
               <a:buNone/>
             </a:pPr>
             <a:r>
-              <a:rPr lang="en" sz="700">
-                <a:solidFill>
-                  <a:srgbClr val="595959"/>
+              <a:rPr lang="en" sz="1820" b="1" dirty="0">
+                <a:solidFill>
+                  <a:srgbClr val="701C7F"/>
                 </a:solidFill>
                 <a:latin typeface="Inter"/>
                 <a:ea typeface="Inter"/>
                 <a:cs typeface="Inter"/>
                 <a:sym typeface="Inter"/>
               </a:rPr>
-              <a:t>Copyright© Eclipse Foundation AISBL and contributors. Made available under CC-BY-SA 4.0 International.</a:t>
-            </a:r>
-            <a:endParaRPr sz="700">
-              <a:solidFill>
-                <a:srgbClr val="595959"/>
-              </a:solidFill>
-              <a:latin typeface="Inter"/>
-              <a:ea typeface="Inter"/>
-              <a:cs typeface="Inter"/>
-              <a:sym typeface="Inter"/>
-            </a:endParaRPr>
-          </a:p>
-        </p:txBody>
-      </p:sp>
-      <p:pic>
-        <p:nvPicPr>
-          <p:cNvPr id="101" name="Google Shape;101;p18" title="SDV_logo-color01 (1).png"/>
-          <p:cNvPicPr preferRelativeResize="0"/>
-          <p:nvPr/>
-        </p:nvPicPr>
-        <p:blipFill>
-          <a:blip r:embed="rId3">
-            <a:alphaModFix/>
-          </a:blip>
-          <a:stretch>
-            <a:fillRect/>
-          </a:stretch>
-        </p:blipFill>
-        <p:spPr>
-          <a:xfrm>
-            <a:off x="225475" y="4757277"/>
-            <a:ext cx="684027" cy="255500"/>
-          </a:xfrm>
-          <a:prstGeom prst="rect">
-            <a:avLst/>
-          </a:prstGeom>
-          <a:noFill/>
-          <a:ln>
-            <a:noFill/>
-          </a:ln>
-        </p:spPr>
-      </p:pic>
-      <p:sp>
-        <p:nvSpPr>
-          <p:cNvPr id="103" name="Google Shape;103;p18"/>
-          <p:cNvSpPr txBox="1"/>
-          <p:nvPr/>
-        </p:nvSpPr>
-        <p:spPr>
-          <a:xfrm>
-            <a:off x="712125" y="628750"/>
-            <a:ext cx="7360200" cy="464700"/>
-          </a:xfrm>
-          <a:prstGeom prst="rect">
-            <a:avLst/>
-          </a:prstGeom>
-          <a:noFill/>
-          <a:ln>
-            <a:noFill/>
-          </a:ln>
-        </p:spPr>
-        <p:txBody>
-          <a:bodyPr spcFirstLastPara="1" wrap="square" lIns="91425" tIns="91425" rIns="91425" bIns="91425" anchor="t" anchorCtr="0">
-            <a:spAutoFit/>
-          </a:bodyPr>
-          <a:lstStyle/>
-          <a:p>
-            <a:pPr marL="0" lvl="0" indent="0" algn="l" rtl="0">
-              <a:spcBef>
-                <a:spcPts val="0"/>
-              </a:spcBef>
-              <a:spcAft>
-                <a:spcPts val="0"/>
-              </a:spcAft>
-              <a:buClr>
-                <a:schemeClr val="dk1"/>
-              </a:buClr>
-              <a:buSzPts val="990"/>
-              <a:buFont typeface="Arial"/>
-              <a:buNone/>
-            </a:pPr>
-            <a:r>
-              <a:rPr lang="en" sz="1820" b="1">
-                <a:solidFill>
-                  <a:srgbClr val="701C7F"/>
-                </a:solidFill>
-                <a:latin typeface="Inter"/>
-                <a:ea typeface="Inter"/>
-                <a:cs typeface="Inter"/>
-                <a:sym typeface="Inter"/>
-              </a:rPr>
-              <a:t>The Added Value</a:t>
-            </a:r>
-            <a:endParaRPr sz="400">
+              <a:t>Anomaly Detection and abnormal Temperature predictions</a:t>
+            </a:r>
+            <a:endParaRPr sz="400" dirty="0">
               <a:latin typeface="Inter ExtraBold"/>
               <a:ea typeface="Inter ExtraBold"/>
               <a:cs typeface="Inter ExtraBold"/>
@@ -14083,751 +17504,12 @@
           </a:p>
         </p:txBody>
       </p:sp>
-      <p:sp>
-        <p:nvSpPr>
-          <p:cNvPr id="104" name="Rounded Rectangle 103"/>
-          <p:cNvSpPr/>
-          <p:nvPr/>
-        </p:nvSpPr>
-        <p:spPr>
-          <a:xfrm>
-            <a:off x="731520" y="1325880"/>
-            <a:ext cx="1737360" cy="2514600"/>
-          </a:xfrm>
-          <a:prstGeom prst="roundRect">
-            <a:avLst>
-              <a:gd name="adj" fmla="val 10000"/>
-            </a:avLst>
-          </a:prstGeom>
-          <a:solidFill>
-            <a:srgbClr val="F6EEF8"/>
-          </a:solidFill>
-          <a:ln w="15875">
-            <a:solidFill>
-              <a:srgbClr val="701C7F"/>
-            </a:solidFill>
-          </a:ln>
-          <a:effectLst/>
-        </p:spPr>
-        <p:style>
-          <a:lnRef idx="1">
-            <a:schemeClr val="accent1"/>
-          </a:lnRef>
-          <a:fillRef idx="3">
-            <a:schemeClr val="accent1"/>
-          </a:fillRef>
-          <a:effectRef idx="2">
-            <a:schemeClr val="accent1"/>
-          </a:effectRef>
-          <a:fontRef idx="minor">
-            <a:schemeClr val="lt1"/>
-          </a:fontRef>
-        </p:style>
-        <p:txBody>
-          <a:bodyPr wrap="square" lIns="54864" tIns="27432" rIns="54864" bIns="27432" rtlCol="0" anchor="ctr"/>
-          <a:lstStyle/>
-          <a:p>
-            <a:pPr algn="ctr"/>
-            <a:endParaRPr/>
-          </a:p>
-        </p:txBody>
-      </p:sp>
-      <p:sp>
-        <p:nvSpPr>
-          <p:cNvPr id="105" name="Oval 104"/>
-          <p:cNvSpPr/>
-          <p:nvPr/>
-        </p:nvSpPr>
-        <p:spPr>
-          <a:xfrm>
-            <a:off x="1188720" y="1554480"/>
-            <a:ext cx="822960" cy="822960"/>
-          </a:xfrm>
-          <a:prstGeom prst="ellipse">
-            <a:avLst/>
-          </a:prstGeom>
-          <a:solidFill>
-            <a:srgbClr val="FFFFFF"/>
-          </a:solidFill>
-          <a:ln w="15875">
-            <a:solidFill>
-              <a:srgbClr val="701C7F"/>
-            </a:solidFill>
-          </a:ln>
-          <a:effectLst/>
-        </p:spPr>
-        <p:style>
-          <a:lnRef idx="1">
-            <a:schemeClr val="accent1"/>
-          </a:lnRef>
-          <a:fillRef idx="3">
-            <a:schemeClr val="accent1"/>
-          </a:fillRef>
-          <a:effectRef idx="2">
-            <a:schemeClr val="accent1"/>
-          </a:effectRef>
-          <a:fontRef idx="minor">
-            <a:schemeClr val="lt1"/>
-          </a:fontRef>
-        </p:style>
-        <p:txBody>
-          <a:bodyPr wrap="square" lIns="54864" tIns="27432" rIns="54864" bIns="27432" rtlCol="0" anchor="ctr"/>
-          <a:lstStyle/>
-          <a:p>
-            <a:pPr algn="ctr"/>
-            <a:r>
-              <a:rPr sz="3600" b="1" i="0">
-                <a:solidFill>
-                  <a:srgbClr val="FFFFFF"/>
-                </a:solidFill>
-                <a:latin typeface="Inter"/>
-              </a:rPr>
-              <a:t>🔌</a:t>
-            </a:r>
-          </a:p>
-        </p:txBody>
-      </p:sp>
-      <p:sp>
-        <p:nvSpPr>
-          <p:cNvPr id="106" name="TextBox 105"/>
-          <p:cNvSpPr txBox="1"/>
-          <p:nvPr/>
-        </p:nvSpPr>
-        <p:spPr>
-          <a:xfrm>
-            <a:off x="731520" y="2560320"/>
-            <a:ext cx="1737360" cy="320040"/>
-          </a:xfrm>
-          <a:prstGeom prst="rect">
-            <a:avLst/>
-          </a:prstGeom>
-          <a:noFill/>
-        </p:spPr>
-        <p:txBody>
-          <a:bodyPr wrap="square" lIns="0" tIns="0" rIns="0" bIns="0" anchor="t">
-            <a:spAutoFit/>
-          </a:bodyPr>
-          <a:lstStyle/>
-          <a:p>
-            <a:pPr algn="ctr"/>
-            <a:r>
-              <a:rPr sz="1400" b="1" i="0">
-                <a:solidFill>
-                  <a:srgbClr val="701C7F"/>
-                </a:solidFill>
-                <a:latin typeface="Inter"/>
-              </a:rPr>
-              <a:t>HW-agnostic</a:t>
-            </a:r>
-          </a:p>
-        </p:txBody>
-      </p:sp>
-      <p:sp>
-        <p:nvSpPr>
-          <p:cNvPr id="107" name="TextBox 106"/>
-          <p:cNvSpPr txBox="1"/>
-          <p:nvPr/>
-        </p:nvSpPr>
-        <p:spPr>
-          <a:xfrm>
-            <a:off x="822960" y="2971800"/>
-            <a:ext cx="1554480" cy="640080"/>
-          </a:xfrm>
-          <a:prstGeom prst="rect">
-            <a:avLst/>
-          </a:prstGeom>
-          <a:noFill/>
-        </p:spPr>
-        <p:txBody>
-          <a:bodyPr wrap="square" lIns="0" tIns="0" rIns="0" bIns="0" anchor="t">
-            <a:spAutoFit/>
-          </a:bodyPr>
-          <a:lstStyle/>
-          <a:p>
-            <a:pPr algn="ctr"/>
-            <a:r>
-              <a:rPr sz="1100" b="0" i="0">
-                <a:solidFill>
-                  <a:srgbClr val="595959"/>
-                </a:solidFill>
-                <a:latin typeface="Inter"/>
-              </a:rPr>
-              <a:t>swap sensors,</a:t>
-            </a:r>
-          </a:p>
-          <a:p>
-            <a:pPr algn="ctr"/>
-            <a:r>
-              <a:rPr sz="1100" b="0" i="0">
-                <a:solidFill>
-                  <a:srgbClr val="595959"/>
-                </a:solidFill>
-                <a:latin typeface="Inter"/>
-              </a:rPr>
-              <a:t>keep the logic</a:t>
-            </a:r>
-          </a:p>
-        </p:txBody>
-      </p:sp>
-      <p:sp>
-        <p:nvSpPr>
-          <p:cNvPr id="108" name="Rounded Rectangle 107"/>
-          <p:cNvSpPr/>
-          <p:nvPr/>
-        </p:nvSpPr>
-        <p:spPr>
-          <a:xfrm>
-            <a:off x="2651760" y="1325880"/>
-            <a:ext cx="1737360" cy="2514600"/>
-          </a:xfrm>
-          <a:prstGeom prst="roundRect">
-            <a:avLst>
-              <a:gd name="adj" fmla="val 10000"/>
-            </a:avLst>
-          </a:prstGeom>
-          <a:solidFill>
-            <a:srgbClr val="F6EEF8"/>
-          </a:solidFill>
-          <a:ln w="15875">
-            <a:solidFill>
-              <a:srgbClr val="701C7F"/>
-            </a:solidFill>
-          </a:ln>
-          <a:effectLst/>
-        </p:spPr>
-        <p:style>
-          <a:lnRef idx="1">
-            <a:schemeClr val="accent1"/>
-          </a:lnRef>
-          <a:fillRef idx="3">
-            <a:schemeClr val="accent1"/>
-          </a:fillRef>
-          <a:effectRef idx="2">
-            <a:schemeClr val="accent1"/>
-          </a:effectRef>
-          <a:fontRef idx="minor">
-            <a:schemeClr val="lt1"/>
-          </a:fontRef>
-        </p:style>
-        <p:txBody>
-          <a:bodyPr wrap="square" lIns="54864" tIns="27432" rIns="54864" bIns="27432" rtlCol="0" anchor="ctr"/>
-          <a:lstStyle/>
-          <a:p>
-            <a:pPr algn="ctr"/>
-            <a:endParaRPr/>
-          </a:p>
-        </p:txBody>
-      </p:sp>
-      <p:sp>
-        <p:nvSpPr>
-          <p:cNvPr id="109" name="Oval 108"/>
-          <p:cNvSpPr/>
-          <p:nvPr/>
-        </p:nvSpPr>
-        <p:spPr>
-          <a:xfrm>
-            <a:off x="3108960" y="1554480"/>
-            <a:ext cx="822960" cy="822960"/>
-          </a:xfrm>
-          <a:prstGeom prst="ellipse">
-            <a:avLst/>
-          </a:prstGeom>
-          <a:solidFill>
-            <a:srgbClr val="FFFFFF"/>
-          </a:solidFill>
-          <a:ln w="15875">
-            <a:solidFill>
-              <a:srgbClr val="701C7F"/>
-            </a:solidFill>
-          </a:ln>
-          <a:effectLst/>
-        </p:spPr>
-        <p:style>
-          <a:lnRef idx="1">
-            <a:schemeClr val="accent1"/>
-          </a:lnRef>
-          <a:fillRef idx="3">
-            <a:schemeClr val="accent1"/>
-          </a:fillRef>
-          <a:effectRef idx="2">
-            <a:schemeClr val="accent1"/>
-          </a:effectRef>
-          <a:fontRef idx="minor">
-            <a:schemeClr val="lt1"/>
-          </a:fontRef>
-        </p:style>
-        <p:txBody>
-          <a:bodyPr wrap="square" lIns="54864" tIns="27432" rIns="54864" bIns="27432" rtlCol="0" anchor="ctr"/>
-          <a:lstStyle/>
-          <a:p>
-            <a:pPr algn="ctr"/>
-            <a:r>
-              <a:rPr sz="3600" b="1" i="0">
-                <a:solidFill>
-                  <a:srgbClr val="FFFFFF"/>
-                </a:solidFill>
-                <a:latin typeface="Inter"/>
-              </a:rPr>
-              <a:t>🛡️</a:t>
-            </a:r>
-          </a:p>
-        </p:txBody>
-      </p:sp>
-      <p:sp>
-        <p:nvSpPr>
-          <p:cNvPr id="110" name="TextBox 109"/>
-          <p:cNvSpPr txBox="1"/>
-          <p:nvPr/>
-        </p:nvSpPr>
-        <p:spPr>
-          <a:xfrm>
-            <a:off x="2651760" y="2560320"/>
-            <a:ext cx="1737360" cy="320040"/>
-          </a:xfrm>
-          <a:prstGeom prst="rect">
-            <a:avLst/>
-          </a:prstGeom>
-          <a:noFill/>
-        </p:spPr>
-        <p:txBody>
-          <a:bodyPr wrap="square" lIns="0" tIns="0" rIns="0" bIns="0" anchor="t">
-            <a:spAutoFit/>
-          </a:bodyPr>
-          <a:lstStyle/>
-          <a:p>
-            <a:pPr algn="ctr"/>
-            <a:r>
-              <a:rPr sz="1400" b="1" i="0" dirty="0">
-                <a:solidFill>
-                  <a:srgbClr val="701C7F"/>
-                </a:solidFill>
-                <a:latin typeface="Inter"/>
-              </a:rPr>
-              <a:t>Fail-safe</a:t>
-            </a:r>
-          </a:p>
-        </p:txBody>
-      </p:sp>
-      <p:sp>
-        <p:nvSpPr>
-          <p:cNvPr id="111" name="TextBox 110"/>
-          <p:cNvSpPr txBox="1"/>
-          <p:nvPr/>
-        </p:nvSpPr>
-        <p:spPr>
-          <a:xfrm>
-            <a:off x="2743200" y="2971800"/>
-            <a:ext cx="1554480" cy="640080"/>
-          </a:xfrm>
-          <a:prstGeom prst="rect">
-            <a:avLst/>
-          </a:prstGeom>
-          <a:noFill/>
-        </p:spPr>
-        <p:txBody>
-          <a:bodyPr wrap="square" lIns="0" tIns="0" rIns="0" bIns="0" anchor="t">
-            <a:spAutoFit/>
-          </a:bodyPr>
-          <a:lstStyle/>
-          <a:p>
-            <a:pPr algn="ctr"/>
-            <a:r>
-              <a:rPr sz="1100" b="0" i="0" dirty="0">
-                <a:solidFill>
-                  <a:srgbClr val="595959"/>
-                </a:solidFill>
-                <a:latin typeface="Inter"/>
-              </a:rPr>
-              <a:t>sensors disagree?</a:t>
-            </a:r>
-          </a:p>
-          <a:p>
-            <a:pPr algn="ctr"/>
-            <a:r>
-              <a:rPr sz="1100" b="0" i="0" dirty="0">
-                <a:solidFill>
-                  <a:srgbClr val="595959"/>
-                </a:solidFill>
-                <a:latin typeface="Inter"/>
-              </a:rPr>
-              <a:t>cool anyway</a:t>
-            </a:r>
-          </a:p>
-        </p:txBody>
-      </p:sp>
-      <p:sp>
-        <p:nvSpPr>
-          <p:cNvPr id="112" name="Rounded Rectangle 111"/>
-          <p:cNvSpPr/>
-          <p:nvPr/>
-        </p:nvSpPr>
-        <p:spPr>
-          <a:xfrm>
-            <a:off x="4572000" y="1325880"/>
-            <a:ext cx="1737360" cy="2514600"/>
-          </a:xfrm>
-          <a:prstGeom prst="roundRect">
-            <a:avLst>
-              <a:gd name="adj" fmla="val 10000"/>
-            </a:avLst>
-          </a:prstGeom>
-          <a:solidFill>
-            <a:srgbClr val="F6EEF8"/>
-          </a:solidFill>
-          <a:ln w="15875">
-            <a:solidFill>
-              <a:srgbClr val="701C7F"/>
-            </a:solidFill>
-          </a:ln>
-          <a:effectLst/>
-        </p:spPr>
-        <p:style>
-          <a:lnRef idx="1">
-            <a:schemeClr val="accent1"/>
-          </a:lnRef>
-          <a:fillRef idx="3">
-            <a:schemeClr val="accent1"/>
-          </a:fillRef>
-          <a:effectRef idx="2">
-            <a:schemeClr val="accent1"/>
-          </a:effectRef>
-          <a:fontRef idx="minor">
-            <a:schemeClr val="lt1"/>
-          </a:fontRef>
-        </p:style>
-        <p:txBody>
-          <a:bodyPr wrap="square" lIns="54864" tIns="27432" rIns="54864" bIns="27432" rtlCol="0" anchor="ctr"/>
-          <a:lstStyle/>
-          <a:p>
-            <a:pPr algn="ctr"/>
-            <a:endParaRPr/>
-          </a:p>
-        </p:txBody>
-      </p:sp>
-      <p:sp>
-        <p:nvSpPr>
-          <p:cNvPr id="113" name="Oval 112"/>
-          <p:cNvSpPr/>
-          <p:nvPr/>
-        </p:nvSpPr>
-        <p:spPr>
-          <a:xfrm>
-            <a:off x="5029200" y="1554480"/>
-            <a:ext cx="822960" cy="822960"/>
-          </a:xfrm>
-          <a:prstGeom prst="ellipse">
-            <a:avLst/>
-          </a:prstGeom>
-          <a:solidFill>
-            <a:srgbClr val="FFFFFF"/>
-          </a:solidFill>
-          <a:ln w="15875">
-            <a:solidFill>
-              <a:srgbClr val="701C7F"/>
-            </a:solidFill>
-          </a:ln>
-          <a:effectLst/>
-        </p:spPr>
-        <p:style>
-          <a:lnRef idx="1">
-            <a:schemeClr val="accent1"/>
-          </a:lnRef>
-          <a:fillRef idx="3">
-            <a:schemeClr val="accent1"/>
-          </a:fillRef>
-          <a:effectRef idx="2">
-            <a:schemeClr val="accent1"/>
-          </a:effectRef>
-          <a:fontRef idx="minor">
-            <a:schemeClr val="lt1"/>
-          </a:fontRef>
-        </p:style>
-        <p:txBody>
-          <a:bodyPr wrap="square" lIns="54864" tIns="27432" rIns="54864" bIns="27432" rtlCol="0" anchor="ctr"/>
-          <a:lstStyle/>
-          <a:p>
-            <a:pPr algn="ctr"/>
-            <a:r>
-              <a:rPr sz="3600" b="1" i="0">
-                <a:solidFill>
-                  <a:srgbClr val="FFFFFF"/>
-                </a:solidFill>
-                <a:latin typeface="Inter"/>
-              </a:rPr>
-              <a:t>🧪</a:t>
-            </a:r>
-          </a:p>
-        </p:txBody>
-      </p:sp>
-      <p:sp>
-        <p:nvSpPr>
-          <p:cNvPr id="114" name="TextBox 113"/>
-          <p:cNvSpPr txBox="1"/>
-          <p:nvPr/>
-        </p:nvSpPr>
-        <p:spPr>
-          <a:xfrm>
-            <a:off x="4572000" y="2560320"/>
-            <a:ext cx="1737360" cy="320040"/>
-          </a:xfrm>
-          <a:prstGeom prst="rect">
-            <a:avLst/>
-          </a:prstGeom>
-          <a:noFill/>
-        </p:spPr>
-        <p:txBody>
-          <a:bodyPr wrap="square" lIns="0" tIns="0" rIns="0" bIns="0" anchor="t">
-            <a:spAutoFit/>
-          </a:bodyPr>
-          <a:lstStyle/>
-          <a:p>
-            <a:pPr algn="ctr"/>
-            <a:r>
-              <a:rPr sz="1400" b="1" i="0">
-                <a:solidFill>
-                  <a:srgbClr val="701C7F"/>
-                </a:solidFill>
-                <a:latin typeface="Inter"/>
-              </a:rPr>
-              <a:t>Sim-first</a:t>
-            </a:r>
-          </a:p>
-        </p:txBody>
-      </p:sp>
-      <p:sp>
-        <p:nvSpPr>
-          <p:cNvPr id="115" name="TextBox 114"/>
-          <p:cNvSpPr txBox="1"/>
-          <p:nvPr/>
-        </p:nvSpPr>
-        <p:spPr>
-          <a:xfrm>
-            <a:off x="4663440" y="2971800"/>
-            <a:ext cx="1554480" cy="640080"/>
-          </a:xfrm>
-          <a:prstGeom prst="rect">
-            <a:avLst/>
-          </a:prstGeom>
-          <a:noFill/>
-        </p:spPr>
-        <p:txBody>
-          <a:bodyPr wrap="square" lIns="0" tIns="0" rIns="0" bIns="0" anchor="t">
-            <a:spAutoFit/>
-          </a:bodyPr>
-          <a:lstStyle/>
-          <a:p>
-            <a:pPr algn="ctr"/>
-            <a:r>
-              <a:rPr sz="1100" b="0" i="0">
-                <a:solidFill>
-                  <a:srgbClr val="595959"/>
-                </a:solidFill>
-                <a:latin typeface="Inter"/>
-              </a:rPr>
-              <a:t>test without</a:t>
-            </a:r>
-          </a:p>
-          <a:p>
-            <a:pPr algn="ctr"/>
-            <a:r>
-              <a:rPr sz="1100" b="0" i="0">
-                <a:solidFill>
-                  <a:srgbClr val="595959"/>
-                </a:solidFill>
-                <a:latin typeface="Inter"/>
-              </a:rPr>
-              <a:t>hardware</a:t>
-            </a:r>
-          </a:p>
-        </p:txBody>
-      </p:sp>
-      <p:sp>
-        <p:nvSpPr>
-          <p:cNvPr id="116" name="Rounded Rectangle 115"/>
-          <p:cNvSpPr/>
-          <p:nvPr/>
-        </p:nvSpPr>
-        <p:spPr>
-          <a:xfrm>
-            <a:off x="6492240" y="1325880"/>
-            <a:ext cx="1737360" cy="2514600"/>
-          </a:xfrm>
-          <a:prstGeom prst="roundRect">
-            <a:avLst>
-              <a:gd name="adj" fmla="val 10000"/>
-            </a:avLst>
-          </a:prstGeom>
-          <a:solidFill>
-            <a:srgbClr val="F6EEF8"/>
-          </a:solidFill>
-          <a:ln w="15875">
-            <a:solidFill>
-              <a:srgbClr val="701C7F"/>
-            </a:solidFill>
-          </a:ln>
-          <a:effectLst/>
-        </p:spPr>
-        <p:style>
-          <a:lnRef idx="1">
-            <a:schemeClr val="accent1"/>
-          </a:lnRef>
-          <a:fillRef idx="3">
-            <a:schemeClr val="accent1"/>
-          </a:fillRef>
-          <a:effectRef idx="2">
-            <a:schemeClr val="accent1"/>
-          </a:effectRef>
-          <a:fontRef idx="minor">
-            <a:schemeClr val="lt1"/>
-          </a:fontRef>
-        </p:style>
-        <p:txBody>
-          <a:bodyPr wrap="square" lIns="54864" tIns="27432" rIns="54864" bIns="27432" rtlCol="0" anchor="ctr"/>
-          <a:lstStyle/>
-          <a:p>
-            <a:pPr algn="ctr"/>
-            <a:endParaRPr/>
-          </a:p>
-        </p:txBody>
-      </p:sp>
-      <p:sp>
-        <p:nvSpPr>
-          <p:cNvPr id="117" name="Oval 116"/>
-          <p:cNvSpPr/>
-          <p:nvPr/>
-        </p:nvSpPr>
-        <p:spPr>
-          <a:xfrm>
-            <a:off x="6949440" y="1554480"/>
-            <a:ext cx="822960" cy="822960"/>
-          </a:xfrm>
-          <a:prstGeom prst="ellipse">
-            <a:avLst/>
-          </a:prstGeom>
-          <a:solidFill>
-            <a:srgbClr val="FFFFFF"/>
-          </a:solidFill>
-          <a:ln w="15875">
-            <a:solidFill>
-              <a:srgbClr val="701C7F"/>
-            </a:solidFill>
-          </a:ln>
-          <a:effectLst/>
-        </p:spPr>
-        <p:style>
-          <a:lnRef idx="1">
-            <a:schemeClr val="accent1"/>
-          </a:lnRef>
-          <a:fillRef idx="3">
-            <a:schemeClr val="accent1"/>
-          </a:fillRef>
-          <a:effectRef idx="2">
-            <a:schemeClr val="accent1"/>
-          </a:effectRef>
-          <a:fontRef idx="minor">
-            <a:schemeClr val="lt1"/>
-          </a:fontRef>
-        </p:style>
-        <p:txBody>
-          <a:bodyPr wrap="square" lIns="54864" tIns="27432" rIns="54864" bIns="27432" rtlCol="0" anchor="ctr"/>
-          <a:lstStyle/>
-          <a:p>
-            <a:pPr algn="ctr"/>
-            <a:r>
-              <a:rPr sz="3600" b="1" i="0">
-                <a:solidFill>
-                  <a:srgbClr val="FFFFFF"/>
-                </a:solidFill>
-                <a:latin typeface="Inter"/>
-              </a:rPr>
-              <a:t>🌐</a:t>
-            </a:r>
-          </a:p>
-        </p:txBody>
-      </p:sp>
-      <p:sp>
-        <p:nvSpPr>
-          <p:cNvPr id="118" name="TextBox 117"/>
-          <p:cNvSpPr txBox="1"/>
-          <p:nvPr/>
-        </p:nvSpPr>
-        <p:spPr>
-          <a:xfrm>
-            <a:off x="6492240" y="2560320"/>
-            <a:ext cx="1737360" cy="320040"/>
-          </a:xfrm>
-          <a:prstGeom prst="rect">
-            <a:avLst/>
-          </a:prstGeom>
-          <a:noFill/>
-        </p:spPr>
-        <p:txBody>
-          <a:bodyPr wrap="square" lIns="0" tIns="0" rIns="0" bIns="0" anchor="t">
-            <a:spAutoFit/>
-          </a:bodyPr>
-          <a:lstStyle/>
-          <a:p>
-            <a:pPr algn="ctr"/>
-            <a:r>
-              <a:rPr sz="1400" b="1" i="0">
-                <a:solidFill>
-                  <a:srgbClr val="701C7F"/>
-                </a:solidFill>
-                <a:latin typeface="Inter"/>
-              </a:rPr>
-              <a:t>Open stack</a:t>
-            </a:r>
-          </a:p>
-        </p:txBody>
-      </p:sp>
-      <p:sp>
-        <p:nvSpPr>
-          <p:cNvPr id="119" name="TextBox 118"/>
-          <p:cNvSpPr txBox="1"/>
-          <p:nvPr/>
-        </p:nvSpPr>
-        <p:spPr>
-          <a:xfrm>
-            <a:off x="6583680" y="2971800"/>
-            <a:ext cx="1554480" cy="640080"/>
-          </a:xfrm>
-          <a:prstGeom prst="rect">
-            <a:avLst/>
-          </a:prstGeom>
-          <a:noFill/>
-        </p:spPr>
-        <p:txBody>
-          <a:bodyPr wrap="square" lIns="0" tIns="0" rIns="0" bIns="0" anchor="t">
-            <a:spAutoFit/>
-          </a:bodyPr>
-          <a:lstStyle/>
-          <a:p>
-            <a:pPr algn="ctr"/>
-            <a:r>
-              <a:rPr sz="1100" b="0" i="0">
-                <a:solidFill>
-                  <a:srgbClr val="595959"/>
-                </a:solidFill>
-                <a:latin typeface="Inter"/>
-              </a:rPr>
-              <a:t>Eclipse SDV</a:t>
-            </a:r>
-          </a:p>
-          <a:p>
-            <a:pPr algn="ctr"/>
-            <a:r>
-              <a:rPr sz="1100" b="0" i="0">
-                <a:solidFill>
-                  <a:srgbClr val="595959"/>
-                </a:solidFill>
-                <a:latin typeface="Inter"/>
-              </a:rPr>
-              <a:t>inside</a:t>
-            </a:r>
-          </a:p>
-        </p:txBody>
-      </p:sp>
     </p:spTree>
+    <p:extLst>
+      <p:ext uri="{BB962C8B-B14F-4D97-AF65-F5344CB8AC3E}">
+        <p14:creationId xmlns:p14="http://schemas.microsoft.com/office/powerpoint/2010/main" val="2846142744"/>
+      </p:ext>
+    </p:extLst>
   </p:cSld>
   <p:clrMapOvr>
     <a:masterClrMapping/>
@@ -14840,7 +17522,13 @@
   <p:cSld>
     <p:spTree>
       <p:nvGrpSpPr>
-        <p:cNvPr id="1" name="Shape 107"/>
+        <p:cNvPr id="1" name="">
+          <a:extLst>
+            <a:ext uri="{FF2B5EF4-FFF2-40B4-BE49-F238E27FC236}">
+              <a16:creationId xmlns:a16="http://schemas.microsoft.com/office/drawing/2014/main" id="{E45681A4-C580-A8A0-99FF-D11E7D6C1E72}"/>
+            </a:ext>
+          </a:extLst>
+        </p:cNvPr>
         <p:cNvGrpSpPr/>
         <p:nvPr/>
       </p:nvGrpSpPr>
@@ -14854,14 +17542,20 @@
       </p:grpSpPr>
       <p:sp>
         <p:nvSpPr>
-          <p:cNvPr id="108" name="Google Shape;108;p19"/>
+          <p:cNvPr id="3" name="Google Shape;103;p18">
+            <a:extLst>
+              <a:ext uri="{FF2B5EF4-FFF2-40B4-BE49-F238E27FC236}">
+                <a16:creationId xmlns:a16="http://schemas.microsoft.com/office/drawing/2014/main" id="{EF97A418-B842-C35B-1840-AC751CE85194}"/>
+              </a:ext>
+            </a:extLst>
+          </p:cNvPr>
           <p:cNvSpPr txBox="1"/>
           <p:nvPr/>
         </p:nvSpPr>
         <p:spPr>
           <a:xfrm>
-            <a:off x="971300" y="4808250"/>
-            <a:ext cx="5334600" cy="292500"/>
+            <a:off x="305923" y="263548"/>
+            <a:ext cx="8641594" cy="464712"/>
           </a:xfrm>
           <a:prstGeom prst="rect">
             <a:avLst/>
@@ -14884,112 +17578,26 @@
               <a:spcAft>
                 <a:spcPts val="0"/>
               </a:spcAft>
+              <a:buClr>
+                <a:schemeClr val="dk1"/>
+              </a:buClr>
+              <a:buSzPts val="990"/>
+              <a:buFont typeface="Arial"/>
               <a:buNone/>
             </a:pPr>
             <a:r>
-              <a:rPr lang="en" sz="700">
-                <a:solidFill>
-                  <a:srgbClr val="595959"/>
+              <a:rPr lang="en" sz="1820" b="1" dirty="0">
+                <a:solidFill>
+                  <a:srgbClr val="701C7F"/>
                 </a:solidFill>
                 <a:latin typeface="Inter"/>
                 <a:ea typeface="Inter"/>
                 <a:cs typeface="Inter"/>
                 <a:sym typeface="Inter"/>
               </a:rPr>
-              <a:t>Copyright© Eclipse Foundation AISBL and contributors. Made available under CC-BY-SA 4.0 International.</a:t>
-            </a:r>
-            <a:endParaRPr sz="700">
-              <a:solidFill>
-                <a:srgbClr val="595959"/>
-              </a:solidFill>
-              <a:latin typeface="Inter"/>
-              <a:ea typeface="Inter"/>
-              <a:cs typeface="Inter"/>
-              <a:sym typeface="Inter"/>
-            </a:endParaRPr>
-          </a:p>
-        </p:txBody>
-      </p:sp>
-      <p:pic>
-        <p:nvPicPr>
-          <p:cNvPr id="109" name="Google Shape;109;p19" title="SDV_logo-color01 (1).png"/>
-          <p:cNvPicPr preferRelativeResize="0"/>
-          <p:nvPr/>
-        </p:nvPicPr>
-        <p:blipFill>
-          <a:blip r:embed="rId3">
-            <a:alphaModFix/>
-          </a:blip>
-          <a:stretch>
-            <a:fillRect/>
-          </a:stretch>
-        </p:blipFill>
-        <p:spPr>
-          <a:xfrm>
-            <a:off x="225475" y="4757277"/>
-            <a:ext cx="684027" cy="255500"/>
-          </a:xfrm>
-          <a:prstGeom prst="rect">
-            <a:avLst/>
-          </a:prstGeom>
-          <a:noFill/>
-          <a:ln>
-            <a:noFill/>
-          </a:ln>
-        </p:spPr>
-      </p:pic>
-      <p:sp>
-        <p:nvSpPr>
-          <p:cNvPr id="111" name="Google Shape;111;p19"/>
-          <p:cNvSpPr txBox="1"/>
-          <p:nvPr/>
-        </p:nvSpPr>
-        <p:spPr>
-          <a:xfrm>
-            <a:off x="712125" y="628750"/>
-            <a:ext cx="7360200" cy="464700"/>
-          </a:xfrm>
-          <a:prstGeom prst="rect">
-            <a:avLst/>
-          </a:prstGeom>
-          <a:noFill/>
-          <a:ln>
-            <a:noFill/>
-          </a:ln>
-        </p:spPr>
-        <p:txBody>
-          <a:bodyPr spcFirstLastPara="1" wrap="square" lIns="91425" tIns="91425" rIns="91425" bIns="91425" anchor="t" anchorCtr="0">
-            <a:spAutoFit/>
-          </a:bodyPr>
-          <a:lstStyle/>
-          <a:p>
-            <a:pPr marL="0" lvl="0" indent="0" algn="l" rtl="0">
-              <a:spcBef>
-                <a:spcPts val="0"/>
-              </a:spcBef>
-              <a:spcAft>
-                <a:spcPts val="0"/>
-              </a:spcAft>
-              <a:buClr>
-                <a:schemeClr val="dk1"/>
-              </a:buClr>
-              <a:buSzPts val="990"/>
-              <a:buFont typeface="Arial"/>
-              <a:buNone/>
-            </a:pPr>
-            <a:r>
-              <a:rPr lang="en" sz="1820" b="1">
-                <a:solidFill>
-                  <a:srgbClr val="701C7F"/>
-                </a:solidFill>
-                <a:latin typeface="Inter"/>
-                <a:ea typeface="Inter"/>
-                <a:cs typeface="Inter"/>
-                <a:sym typeface="Inter"/>
-              </a:rPr>
-              <a:t>The Market &amp; Competition</a:t>
-            </a:r>
-            <a:endParaRPr sz="400">
+              <a:t>Anomaly Detection Observations</a:t>
+            </a:r>
+            <a:endParaRPr sz="400" dirty="0">
               <a:latin typeface="Inter ExtraBold"/>
               <a:ea typeface="Inter ExtraBold"/>
               <a:cs typeface="Inter ExtraBold"/>
@@ -14998,735 +17606,132 @@
           </a:p>
         </p:txBody>
       </p:sp>
-      <p:sp>
-        <p:nvSpPr>
-          <p:cNvPr id="112" name="TextBox 111"/>
-          <p:cNvSpPr txBox="1"/>
-          <p:nvPr/>
-        </p:nvSpPr>
-        <p:spPr>
-          <a:xfrm>
-            <a:off x="731520" y="1234440"/>
-            <a:ext cx="3657600" cy="274320"/>
+      <p:pic>
+        <p:nvPicPr>
+          <p:cNvPr id="11" name="Picture 10">
+            <a:extLst>
+              <a:ext uri="{FF2B5EF4-FFF2-40B4-BE49-F238E27FC236}">
+                <a16:creationId xmlns:a16="http://schemas.microsoft.com/office/drawing/2014/main" id="{428E6F4C-4F96-9121-5A1E-4B47F7C39616}"/>
+              </a:ext>
+            </a:extLst>
+          </p:cNvPr>
+          <p:cNvPicPr>
+            <a:picLocks noChangeAspect="1"/>
+          </p:cNvPicPr>
+          <p:nvPr/>
+        </p:nvPicPr>
+        <p:blipFill>
+          <a:blip r:embed="rId3"/>
+          <a:stretch>
+            <a:fillRect/>
+          </a:stretch>
+        </p:blipFill>
+        <p:spPr>
+          <a:xfrm>
+            <a:off x="400855" y="761433"/>
+            <a:ext cx="3105938" cy="1941211"/>
           </a:xfrm>
           <a:prstGeom prst="rect">
             <a:avLst/>
           </a:prstGeom>
-          <a:noFill/>
-        </p:spPr>
-        <p:txBody>
-          <a:bodyPr wrap="square" lIns="0" tIns="0" rIns="0" bIns="0" anchor="t">
-            <a:spAutoFit/>
-          </a:bodyPr>
-          <a:lstStyle/>
-          <a:p>
-            <a:pPr algn="l"/>
-            <a:r>
-              <a:rPr sz="1200" b="1" i="0">
-                <a:solidFill>
-                  <a:srgbClr val="DB521D"/>
-                </a:solidFill>
-                <a:latin typeface="Inter"/>
-              </a:rPr>
-              <a:t>Why now</a:t>
-            </a:r>
-          </a:p>
-        </p:txBody>
-      </p:sp>
-      <p:sp>
-        <p:nvSpPr>
-          <p:cNvPr id="113" name="TextBox 112"/>
-          <p:cNvSpPr txBox="1"/>
-          <p:nvPr/>
-        </p:nvSpPr>
-        <p:spPr>
-          <a:xfrm>
-            <a:off x="731520" y="1554480"/>
-            <a:ext cx="1234440" cy="685800"/>
+        </p:spPr>
+      </p:pic>
+      <p:pic>
+        <p:nvPicPr>
+          <p:cNvPr id="18" name="Picture 17">
+            <a:extLst>
+              <a:ext uri="{FF2B5EF4-FFF2-40B4-BE49-F238E27FC236}">
+                <a16:creationId xmlns:a16="http://schemas.microsoft.com/office/drawing/2014/main" id="{42F2D12B-86F1-CBA3-9AA5-0C2EEA6C8C37}"/>
+              </a:ext>
+            </a:extLst>
+          </p:cNvPr>
+          <p:cNvPicPr>
+            <a:picLocks noChangeAspect="1"/>
+          </p:cNvPicPr>
+          <p:nvPr/>
+        </p:nvPicPr>
+        <p:blipFill>
+          <a:blip r:embed="rId4"/>
+          <a:stretch>
+            <a:fillRect/>
+          </a:stretch>
+        </p:blipFill>
+        <p:spPr>
+          <a:xfrm>
+            <a:off x="4545429" y="2801593"/>
+            <a:ext cx="4112974" cy="1696305"/>
           </a:xfrm>
           <a:prstGeom prst="rect">
             <a:avLst/>
           </a:prstGeom>
-          <a:noFill/>
-        </p:spPr>
-        <p:txBody>
-          <a:bodyPr wrap="square" lIns="0" tIns="0" rIns="0" bIns="0" anchor="ctr">
-            <a:spAutoFit/>
-          </a:bodyPr>
-          <a:lstStyle/>
-          <a:p>
-            <a:pPr algn="l"/>
-            <a:r>
-              <a:rPr sz="2800" b="1" i="0">
-                <a:solidFill>
-                  <a:srgbClr val="DB521D"/>
-                </a:solidFill>
-                <a:latin typeface="Inter"/>
-              </a:rPr>
-              <a:t>~37</a:t>
-            </a:r>
-          </a:p>
-        </p:txBody>
-      </p:sp>
-      <p:sp>
-        <p:nvSpPr>
-          <p:cNvPr id="114" name="TextBox 113"/>
-          <p:cNvSpPr txBox="1"/>
-          <p:nvPr/>
-        </p:nvSpPr>
-        <p:spPr>
-          <a:xfrm>
-            <a:off x="1965960" y="1554480"/>
-            <a:ext cx="2103120" cy="685800"/>
+        </p:spPr>
+      </p:pic>
+      <p:pic>
+        <p:nvPicPr>
+          <p:cNvPr id="21" name="Picture 20">
+            <a:extLst>
+              <a:ext uri="{FF2B5EF4-FFF2-40B4-BE49-F238E27FC236}">
+                <a16:creationId xmlns:a16="http://schemas.microsoft.com/office/drawing/2014/main" id="{DC857B89-49E8-8B37-B688-F35FE77F41D2}"/>
+              </a:ext>
+            </a:extLst>
+          </p:cNvPr>
+          <p:cNvPicPr>
+            <a:picLocks noChangeAspect="1"/>
+          </p:cNvPicPr>
+          <p:nvPr/>
+        </p:nvPicPr>
+        <p:blipFill>
+          <a:blip r:embed="rId5"/>
+          <a:stretch>
+            <a:fillRect/>
+          </a:stretch>
+        </p:blipFill>
+        <p:spPr>
+          <a:xfrm>
+            <a:off x="3913289" y="845073"/>
+            <a:ext cx="4292649" cy="1839707"/>
           </a:xfrm>
           <a:prstGeom prst="rect">
             <a:avLst/>
           </a:prstGeom>
-          <a:noFill/>
-        </p:spPr>
-        <p:txBody>
-          <a:bodyPr wrap="square" lIns="0" tIns="0" rIns="0" bIns="0" anchor="ctr">
-            <a:spAutoFit/>
-          </a:bodyPr>
-          <a:lstStyle/>
-          <a:p>
-            <a:pPr algn="l"/>
-            <a:r>
-              <a:rPr sz="1100" b="0" i="0">
-                <a:solidFill>
-                  <a:srgbClr val="595959"/>
-                </a:solidFill>
-                <a:latin typeface="Inter"/>
-              </a:rPr>
-              <a:t>kids / year die in</a:t>
-            </a:r>
-          </a:p>
-          <a:p>
-            <a:pPr algn="l"/>
-            <a:r>
-              <a:rPr sz="1100" b="0" i="0">
-                <a:solidFill>
-                  <a:srgbClr val="595959"/>
-                </a:solidFill>
-                <a:latin typeface="Inter"/>
-              </a:rPr>
-              <a:t>hot cars (US)</a:t>
-            </a:r>
-          </a:p>
-        </p:txBody>
-      </p:sp>
-      <p:sp>
-        <p:nvSpPr>
-          <p:cNvPr id="115" name="TextBox 114"/>
-          <p:cNvSpPr txBox="1"/>
-          <p:nvPr/>
-        </p:nvSpPr>
-        <p:spPr>
-          <a:xfrm>
-            <a:off x="731520" y="2377440"/>
-            <a:ext cx="1234440" cy="685800"/>
+        </p:spPr>
+      </p:pic>
+      <p:pic>
+        <p:nvPicPr>
+          <p:cNvPr id="24" name="Picture 23">
+            <a:extLst>
+              <a:ext uri="{FF2B5EF4-FFF2-40B4-BE49-F238E27FC236}">
+                <a16:creationId xmlns:a16="http://schemas.microsoft.com/office/drawing/2014/main" id="{45FC1601-233F-2588-2173-F1935354BD69}"/>
+              </a:ext>
+            </a:extLst>
+          </p:cNvPr>
+          <p:cNvPicPr>
+            <a:picLocks noChangeAspect="1"/>
+          </p:cNvPicPr>
+          <p:nvPr/>
+        </p:nvPicPr>
+        <p:blipFill>
+          <a:blip r:embed="rId6"/>
+          <a:stretch>
+            <a:fillRect/>
+          </a:stretch>
+        </p:blipFill>
+        <p:spPr>
+          <a:xfrm>
+            <a:off x="305923" y="2735817"/>
+            <a:ext cx="4112973" cy="2367641"/>
           </a:xfrm>
           <a:prstGeom prst="rect">
             <a:avLst/>
           </a:prstGeom>
-          <a:noFill/>
-        </p:spPr>
-        <p:txBody>
-          <a:bodyPr wrap="square" lIns="0" tIns="0" rIns="0" bIns="0" anchor="ctr">
-            <a:spAutoFit/>
-          </a:bodyPr>
-          <a:lstStyle/>
-          <a:p>
-            <a:pPr algn="l"/>
-            <a:r>
-              <a:rPr sz="2800" b="1" i="0">
-                <a:solidFill>
-                  <a:srgbClr val="DB521D"/>
-                </a:solidFill>
-                <a:latin typeface="Inter"/>
-              </a:rPr>
-              <a:t>2025</a:t>
-            </a:r>
-          </a:p>
-        </p:txBody>
-      </p:sp>
-      <p:sp>
-        <p:nvSpPr>
-          <p:cNvPr id="116" name="TextBox 115"/>
-          <p:cNvSpPr txBox="1"/>
-          <p:nvPr/>
-        </p:nvSpPr>
-        <p:spPr>
-          <a:xfrm>
-            <a:off x="1965960" y="2377440"/>
-            <a:ext cx="2103120" cy="685800"/>
-          </a:xfrm>
-          <a:prstGeom prst="rect">
-            <a:avLst/>
-          </a:prstGeom>
-          <a:noFill/>
-        </p:spPr>
-        <p:txBody>
-          <a:bodyPr wrap="square" lIns="0" tIns="0" rIns="0" bIns="0" anchor="ctr">
-            <a:spAutoFit/>
-          </a:bodyPr>
-          <a:lstStyle/>
-          <a:p>
-            <a:pPr algn="l"/>
-            <a:r>
-              <a:rPr sz="1100" b="0" i="0">
-                <a:solidFill>
-                  <a:srgbClr val="595959"/>
-                </a:solidFill>
-                <a:latin typeface="Inter"/>
-              </a:rPr>
-              <a:t>Euro NCAP: only direct</a:t>
-            </a:r>
-          </a:p>
-          <a:p>
-            <a:pPr algn="l"/>
-            <a:r>
-              <a:rPr sz="1100" b="0" i="0">
-                <a:solidFill>
-                  <a:srgbClr val="595959"/>
-                </a:solidFill>
-                <a:latin typeface="Inter"/>
-              </a:rPr>
-              <a:t>sensing scores</a:t>
-            </a:r>
-          </a:p>
-        </p:txBody>
-      </p:sp>
-      <p:sp>
-        <p:nvSpPr>
-          <p:cNvPr id="117" name="TextBox 116"/>
-          <p:cNvSpPr txBox="1"/>
-          <p:nvPr/>
-        </p:nvSpPr>
-        <p:spPr>
-          <a:xfrm>
-            <a:off x="731520" y="3200400"/>
-            <a:ext cx="1234440" cy="685800"/>
-          </a:xfrm>
-          <a:prstGeom prst="rect">
-            <a:avLst/>
-          </a:prstGeom>
-          <a:noFill/>
-        </p:spPr>
-        <p:txBody>
-          <a:bodyPr wrap="square" lIns="0" tIns="0" rIns="0" bIns="0" anchor="ctr">
-            <a:spAutoFit/>
-          </a:bodyPr>
-          <a:lstStyle/>
-          <a:p>
-            <a:pPr algn="l"/>
-            <a:r>
-              <a:rPr sz="2800" b="1" i="0">
-                <a:solidFill>
-                  <a:srgbClr val="DB521D"/>
-                </a:solidFill>
-                <a:latin typeface="Inter"/>
-              </a:rPr>
-              <a:t>$2B</a:t>
-            </a:r>
-          </a:p>
-        </p:txBody>
-      </p:sp>
-      <p:sp>
-        <p:nvSpPr>
-          <p:cNvPr id="118" name="TextBox 117"/>
-          <p:cNvSpPr txBox="1"/>
-          <p:nvPr/>
-        </p:nvSpPr>
-        <p:spPr>
-          <a:xfrm>
-            <a:off x="1965960" y="3200400"/>
-            <a:ext cx="2103120" cy="685800"/>
-          </a:xfrm>
-          <a:prstGeom prst="rect">
-            <a:avLst/>
-          </a:prstGeom>
-          <a:noFill/>
-        </p:spPr>
-        <p:txBody>
-          <a:bodyPr wrap="square" lIns="0" tIns="0" rIns="0" bIns="0" anchor="ctr">
-            <a:spAutoFit/>
-          </a:bodyPr>
-          <a:lstStyle/>
-          <a:p>
-            <a:pPr algn="l"/>
-            <a:r>
-              <a:rPr sz="1100" b="0" i="0">
-                <a:solidFill>
-                  <a:srgbClr val="595959"/>
-                </a:solidFill>
-                <a:latin typeface="Inter"/>
-              </a:rPr>
-              <a:t>CPD market</a:t>
-            </a:r>
-          </a:p>
-          <a:p>
-            <a:pPr algn="l"/>
-            <a:r>
-              <a:rPr sz="1100" b="0" i="0">
-                <a:solidFill>
-                  <a:srgbClr val="595959"/>
-                </a:solidFill>
-                <a:latin typeface="Inter"/>
-              </a:rPr>
-              <a:t>by 2034*</a:t>
-            </a:r>
-          </a:p>
-        </p:txBody>
-      </p:sp>
-      <p:sp>
-        <p:nvSpPr>
-          <p:cNvPr id="119" name="TextBox 118"/>
-          <p:cNvSpPr txBox="1"/>
-          <p:nvPr/>
-        </p:nvSpPr>
-        <p:spPr>
-          <a:xfrm>
-            <a:off x="731520" y="4069080"/>
-            <a:ext cx="3657600" cy="182880"/>
-          </a:xfrm>
-          <a:prstGeom prst="rect">
-            <a:avLst/>
-          </a:prstGeom>
-          <a:noFill/>
-        </p:spPr>
-        <p:txBody>
-          <a:bodyPr wrap="square" lIns="0" tIns="0" rIns="0" bIns="0" anchor="t">
-            <a:spAutoFit/>
-          </a:bodyPr>
-          <a:lstStyle/>
-          <a:p>
-            <a:pPr algn="l"/>
-            <a:r>
-              <a:rPr sz="900" b="0" i="0">
-                <a:solidFill>
-                  <a:srgbClr val="595959"/>
-                </a:solidFill>
-                <a:latin typeface="Inter"/>
-              </a:rPr>
-              <a:t>* analyst estimate (GM Insights), estimates vary</a:t>
-            </a:r>
-          </a:p>
-        </p:txBody>
-      </p:sp>
-      <p:sp>
-        <p:nvSpPr>
-          <p:cNvPr id="120" name="TextBox 119"/>
-          <p:cNvSpPr txBox="1"/>
-          <p:nvPr/>
-        </p:nvSpPr>
-        <p:spPr>
-          <a:xfrm>
-            <a:off x="4572000" y="1234440"/>
-            <a:ext cx="3657600" cy="274320"/>
-          </a:xfrm>
-          <a:prstGeom prst="rect">
-            <a:avLst/>
-          </a:prstGeom>
-          <a:noFill/>
-        </p:spPr>
-        <p:txBody>
-          <a:bodyPr wrap="square" lIns="0" tIns="0" rIns="0" bIns="0" anchor="t">
-            <a:spAutoFit/>
-          </a:bodyPr>
-          <a:lstStyle/>
-          <a:p>
-            <a:pPr algn="l"/>
-            <a:r>
-              <a:rPr sz="1200" b="1" i="0">
-                <a:solidFill>
-                  <a:srgbClr val="595959"/>
-                </a:solidFill>
-                <a:latin typeface="Inter"/>
-              </a:rPr>
-              <a:t>They sell sensor systems</a:t>
-            </a:r>
-          </a:p>
-        </p:txBody>
-      </p:sp>
-      <p:sp>
-        <p:nvSpPr>
-          <p:cNvPr id="121" name="Rounded Rectangle 120"/>
-          <p:cNvSpPr/>
-          <p:nvPr/>
-        </p:nvSpPr>
-        <p:spPr>
-          <a:xfrm>
-            <a:off x="4572000" y="1554480"/>
-            <a:ext cx="1143000" cy="384048"/>
-          </a:xfrm>
-          <a:prstGeom prst="roundRect">
-            <a:avLst>
-              <a:gd name="adj" fmla="val 18000"/>
-            </a:avLst>
-          </a:prstGeom>
-          <a:solidFill>
-            <a:srgbClr val="FFFFFF"/>
-          </a:solidFill>
-          <a:ln w="15875">
-            <a:solidFill>
-              <a:srgbClr val="595959"/>
-            </a:solidFill>
-          </a:ln>
-          <a:effectLst/>
-        </p:spPr>
-        <p:style>
-          <a:lnRef idx="1">
-            <a:schemeClr val="accent1"/>
-          </a:lnRef>
-          <a:fillRef idx="3">
-            <a:schemeClr val="accent1"/>
-          </a:fillRef>
-          <a:effectRef idx="2">
-            <a:schemeClr val="accent1"/>
-          </a:effectRef>
-          <a:fontRef idx="minor">
-            <a:schemeClr val="lt1"/>
-          </a:fontRef>
-        </p:style>
-        <p:txBody>
-          <a:bodyPr wrap="square" lIns="54864" tIns="27432" rIns="54864" bIns="27432" rtlCol="0" anchor="ctr"/>
-          <a:lstStyle/>
-          <a:p>
-            <a:pPr algn="ctr"/>
-            <a:r>
-              <a:rPr sz="1000" b="0" i="0">
-                <a:solidFill>
-                  <a:srgbClr val="595959"/>
-                </a:solidFill>
-                <a:latin typeface="Inter"/>
-              </a:rPr>
-              <a:t>IEE</a:t>
-            </a:r>
-          </a:p>
-        </p:txBody>
-      </p:sp>
-      <p:sp>
-        <p:nvSpPr>
-          <p:cNvPr id="122" name="Rounded Rectangle 121"/>
-          <p:cNvSpPr/>
-          <p:nvPr/>
-        </p:nvSpPr>
-        <p:spPr>
-          <a:xfrm>
-            <a:off x="5824728" y="1554480"/>
-            <a:ext cx="1143000" cy="384048"/>
-          </a:xfrm>
-          <a:prstGeom prst="roundRect">
-            <a:avLst>
-              <a:gd name="adj" fmla="val 18000"/>
-            </a:avLst>
-          </a:prstGeom>
-          <a:solidFill>
-            <a:srgbClr val="FFFFFF"/>
-          </a:solidFill>
-          <a:ln w="15875">
-            <a:solidFill>
-              <a:srgbClr val="595959"/>
-            </a:solidFill>
-          </a:ln>
-          <a:effectLst/>
-        </p:spPr>
-        <p:style>
-          <a:lnRef idx="1">
-            <a:schemeClr val="accent1"/>
-          </a:lnRef>
-          <a:fillRef idx="3">
-            <a:schemeClr val="accent1"/>
-          </a:fillRef>
-          <a:effectRef idx="2">
-            <a:schemeClr val="accent1"/>
-          </a:effectRef>
-          <a:fontRef idx="minor">
-            <a:schemeClr val="lt1"/>
-          </a:fontRef>
-        </p:style>
-        <p:txBody>
-          <a:bodyPr wrap="square" lIns="54864" tIns="27432" rIns="54864" bIns="27432" rtlCol="0" anchor="ctr"/>
-          <a:lstStyle/>
-          <a:p>
-            <a:pPr algn="ctr"/>
-            <a:r>
-              <a:rPr sz="1000" b="0" i="0">
-                <a:solidFill>
-                  <a:srgbClr val="595959"/>
-                </a:solidFill>
-                <a:latin typeface="Inter"/>
-              </a:rPr>
-              <a:t>Vayyar</a:t>
-            </a:r>
-          </a:p>
-        </p:txBody>
-      </p:sp>
-      <p:sp>
-        <p:nvSpPr>
-          <p:cNvPr id="123" name="Rounded Rectangle 122"/>
-          <p:cNvSpPr/>
-          <p:nvPr/>
-        </p:nvSpPr>
-        <p:spPr>
-          <a:xfrm>
-            <a:off x="7077456" y="1554480"/>
-            <a:ext cx="1143000" cy="384048"/>
-          </a:xfrm>
-          <a:prstGeom prst="roundRect">
-            <a:avLst>
-              <a:gd name="adj" fmla="val 18000"/>
-            </a:avLst>
-          </a:prstGeom>
-          <a:solidFill>
-            <a:srgbClr val="FFFFFF"/>
-          </a:solidFill>
-          <a:ln w="15875">
-            <a:solidFill>
-              <a:srgbClr val="595959"/>
-            </a:solidFill>
-          </a:ln>
-          <a:effectLst/>
-        </p:spPr>
-        <p:style>
-          <a:lnRef idx="1">
-            <a:schemeClr val="accent1"/>
-          </a:lnRef>
-          <a:fillRef idx="3">
-            <a:schemeClr val="accent1"/>
-          </a:fillRef>
-          <a:effectRef idx="2">
-            <a:schemeClr val="accent1"/>
-          </a:effectRef>
-          <a:fontRef idx="minor">
-            <a:schemeClr val="lt1"/>
-          </a:fontRef>
-        </p:style>
-        <p:txBody>
-          <a:bodyPr wrap="square" lIns="54864" tIns="27432" rIns="54864" bIns="27432" rtlCol="0" anchor="ctr"/>
-          <a:lstStyle/>
-          <a:p>
-            <a:pPr algn="ctr"/>
-            <a:r>
-              <a:rPr sz="1000" b="0" i="0">
-                <a:solidFill>
-                  <a:srgbClr val="595959"/>
-                </a:solidFill>
-                <a:latin typeface="Inter"/>
-              </a:rPr>
-              <a:t>Valeo</a:t>
-            </a:r>
-          </a:p>
-        </p:txBody>
-      </p:sp>
-      <p:sp>
-        <p:nvSpPr>
-          <p:cNvPr id="124" name="Rounded Rectangle 123"/>
-          <p:cNvSpPr/>
-          <p:nvPr/>
-        </p:nvSpPr>
-        <p:spPr>
-          <a:xfrm>
-            <a:off x="4572000" y="2057400"/>
-            <a:ext cx="1143000" cy="384048"/>
-          </a:xfrm>
-          <a:prstGeom prst="roundRect">
-            <a:avLst>
-              <a:gd name="adj" fmla="val 18000"/>
-            </a:avLst>
-          </a:prstGeom>
-          <a:solidFill>
-            <a:srgbClr val="FFFFFF"/>
-          </a:solidFill>
-          <a:ln w="15875">
-            <a:solidFill>
-              <a:srgbClr val="595959"/>
-            </a:solidFill>
-          </a:ln>
-          <a:effectLst/>
-        </p:spPr>
-        <p:style>
-          <a:lnRef idx="1">
-            <a:schemeClr val="accent1"/>
-          </a:lnRef>
-          <a:fillRef idx="3">
-            <a:schemeClr val="accent1"/>
-          </a:fillRef>
-          <a:effectRef idx="2">
-            <a:schemeClr val="accent1"/>
-          </a:effectRef>
-          <a:fontRef idx="minor">
-            <a:schemeClr val="lt1"/>
-          </a:fontRef>
-        </p:style>
-        <p:txBody>
-          <a:bodyPr wrap="square" lIns="54864" tIns="27432" rIns="54864" bIns="27432" rtlCol="0" anchor="ctr"/>
-          <a:lstStyle/>
-          <a:p>
-            <a:pPr algn="ctr"/>
-            <a:r>
-              <a:rPr sz="1000" b="0" i="0">
-                <a:solidFill>
-                  <a:srgbClr val="595959"/>
-                </a:solidFill>
-                <a:latin typeface="Inter"/>
-              </a:rPr>
-              <a:t>Continental</a:t>
-            </a:r>
-          </a:p>
-        </p:txBody>
-      </p:sp>
-      <p:sp>
-        <p:nvSpPr>
-          <p:cNvPr id="125" name="Rounded Rectangle 124"/>
-          <p:cNvSpPr/>
-          <p:nvPr/>
-        </p:nvSpPr>
-        <p:spPr>
-          <a:xfrm>
-            <a:off x="5824728" y="2057400"/>
-            <a:ext cx="1143000" cy="384048"/>
-          </a:xfrm>
-          <a:prstGeom prst="roundRect">
-            <a:avLst>
-              <a:gd name="adj" fmla="val 18000"/>
-            </a:avLst>
-          </a:prstGeom>
-          <a:solidFill>
-            <a:srgbClr val="FFFFFF"/>
-          </a:solidFill>
-          <a:ln w="15875">
-            <a:solidFill>
-              <a:srgbClr val="595959"/>
-            </a:solidFill>
-          </a:ln>
-          <a:effectLst/>
-        </p:spPr>
-        <p:style>
-          <a:lnRef idx="1">
-            <a:schemeClr val="accent1"/>
-          </a:lnRef>
-          <a:fillRef idx="3">
-            <a:schemeClr val="accent1"/>
-          </a:fillRef>
-          <a:effectRef idx="2">
-            <a:schemeClr val="accent1"/>
-          </a:effectRef>
-          <a:fontRef idx="minor">
-            <a:schemeClr val="lt1"/>
-          </a:fontRef>
-        </p:style>
-        <p:txBody>
-          <a:bodyPr wrap="square" lIns="54864" tIns="27432" rIns="54864" bIns="27432" rtlCol="0" anchor="ctr"/>
-          <a:lstStyle/>
-          <a:p>
-            <a:pPr algn="ctr"/>
-            <a:r>
-              <a:rPr sz="1000" b="0" i="0">
-                <a:solidFill>
-                  <a:srgbClr val="595959"/>
-                </a:solidFill>
-                <a:latin typeface="Inter"/>
-              </a:rPr>
-              <a:t>Infineon</a:t>
-            </a:r>
-          </a:p>
-        </p:txBody>
-      </p:sp>
-      <p:sp>
-        <p:nvSpPr>
-          <p:cNvPr id="126" name="TextBox 125"/>
-          <p:cNvSpPr txBox="1"/>
-          <p:nvPr/>
-        </p:nvSpPr>
-        <p:spPr>
-          <a:xfrm>
-            <a:off x="4572000" y="2697480"/>
-            <a:ext cx="3657600" cy="274320"/>
-          </a:xfrm>
-          <a:prstGeom prst="rect">
-            <a:avLst/>
-          </a:prstGeom>
-          <a:noFill/>
-        </p:spPr>
-        <p:txBody>
-          <a:bodyPr wrap="square" lIns="0" tIns="0" rIns="0" bIns="0" anchor="t">
-            <a:spAutoFit/>
-          </a:bodyPr>
-          <a:lstStyle/>
-          <a:p>
-            <a:pPr algn="l"/>
-            <a:r>
-              <a:rPr sz="1200" b="1" i="0">
-                <a:solidFill>
-                  <a:srgbClr val="701C7F"/>
-                </a:solidFill>
-                <a:latin typeface="Inter"/>
-              </a:rPr>
-              <a:t>We sell the logic</a:t>
-            </a:r>
-          </a:p>
-        </p:txBody>
-      </p:sp>
-      <p:sp>
-        <p:nvSpPr>
-          <p:cNvPr id="127" name="Rounded Rectangle 126"/>
-          <p:cNvSpPr/>
-          <p:nvPr/>
-        </p:nvSpPr>
-        <p:spPr>
-          <a:xfrm>
-            <a:off x="4572000" y="3017520"/>
-            <a:ext cx="3703320" cy="777240"/>
-          </a:xfrm>
-          <a:prstGeom prst="roundRect">
-            <a:avLst>
-              <a:gd name="adj" fmla="val 18000"/>
-            </a:avLst>
-          </a:prstGeom>
-          <a:solidFill>
-            <a:srgbClr val="701C7F"/>
-          </a:solidFill>
-          <a:ln w="15875">
-            <a:solidFill>
-              <a:srgbClr val="701C7F"/>
-            </a:solidFill>
-          </a:ln>
-          <a:effectLst/>
-        </p:spPr>
-        <p:style>
-          <a:lnRef idx="1">
-            <a:schemeClr val="accent1"/>
-          </a:lnRef>
-          <a:fillRef idx="3">
-            <a:schemeClr val="accent1"/>
-          </a:fillRef>
-          <a:effectRef idx="2">
-            <a:schemeClr val="accent1"/>
-          </a:effectRef>
-          <a:fontRef idx="minor">
-            <a:schemeClr val="lt1"/>
-          </a:fontRef>
-        </p:style>
-        <p:txBody>
-          <a:bodyPr wrap="square" lIns="54864" tIns="27432" rIns="54864" bIns="27432" rtlCol="0" anchor="ctr"/>
-          <a:lstStyle/>
-          <a:p>
-            <a:pPr algn="ctr"/>
-            <a:r>
-              <a:rPr sz="1400" b="1" i="0">
-                <a:solidFill>
-                  <a:srgbClr val="FFFFFF"/>
-                </a:solidFill>
-                <a:latin typeface="Inter"/>
-              </a:rPr>
-              <a:t>any sensor  →  decide  →  mitigate</a:t>
-            </a:r>
-          </a:p>
-        </p:txBody>
-      </p:sp>
+        </p:spPr>
+      </p:pic>
     </p:spTree>
+    <p:extLst>
+      <p:ext uri="{BB962C8B-B14F-4D97-AF65-F5344CB8AC3E}">
+        <p14:creationId xmlns:p14="http://schemas.microsoft.com/office/powerpoint/2010/main" val="875929635"/>
+      </p:ext>
+    </p:extLst>
   </p:cSld>
   <p:clrMapOvr>
     <a:masterClrMapping/>
@@ -15735,510 +17740,6 @@
 </file>
 
 <file path=ppt/slides/slide8.xml><?xml version="1.0" encoding="utf-8"?>
-<p:sld xmlns:a="http://schemas.openxmlformats.org/drawingml/2006/main" xmlns:r="http://schemas.openxmlformats.org/officeDocument/2006/relationships" xmlns:p="http://schemas.openxmlformats.org/presentationml/2006/main">
-  <p:cSld>
-    <p:spTree>
-      <p:nvGrpSpPr>
-        <p:cNvPr id="1" name="Shape 115"/>
-        <p:cNvGrpSpPr/>
-        <p:nvPr/>
-      </p:nvGrpSpPr>
-      <p:grpSpPr>
-        <a:xfrm>
-          <a:off x="0" y="0"/>
-          <a:ext cx="0" cy="0"/>
-          <a:chOff x="0" y="0"/>
-          <a:chExt cx="0" cy="0"/>
-        </a:xfrm>
-      </p:grpSpPr>
-      <p:sp>
-        <p:nvSpPr>
-          <p:cNvPr id="116" name="Google Shape;116;p20"/>
-          <p:cNvSpPr txBox="1"/>
-          <p:nvPr/>
-        </p:nvSpPr>
-        <p:spPr>
-          <a:xfrm>
-            <a:off x="971300" y="4808250"/>
-            <a:ext cx="5334600" cy="292500"/>
-          </a:xfrm>
-          <a:prstGeom prst="rect">
-            <a:avLst/>
-          </a:prstGeom>
-          <a:noFill/>
-          <a:ln>
-            <a:noFill/>
-          </a:ln>
-        </p:spPr>
-        <p:txBody>
-          <a:bodyPr spcFirstLastPara="1" wrap="square" lIns="91425" tIns="91425" rIns="91425" bIns="91425" anchor="t" anchorCtr="0">
-            <a:spAutoFit/>
-          </a:bodyPr>
-          <a:lstStyle/>
-          <a:p>
-            <a:pPr marL="0" lvl="0" indent="0" algn="l" rtl="0">
-              <a:spcBef>
-                <a:spcPts val="0"/>
-              </a:spcBef>
-              <a:spcAft>
-                <a:spcPts val="0"/>
-              </a:spcAft>
-              <a:buNone/>
-            </a:pPr>
-            <a:r>
-              <a:rPr lang="en" sz="700">
-                <a:solidFill>
-                  <a:srgbClr val="595959"/>
-                </a:solidFill>
-                <a:latin typeface="Inter"/>
-                <a:ea typeface="Inter"/>
-                <a:cs typeface="Inter"/>
-                <a:sym typeface="Inter"/>
-              </a:rPr>
-              <a:t>Copyright© Eclipse Foundation AISBL and contributors. Made available under CC-BY-SA 4.0 International.</a:t>
-            </a:r>
-            <a:endParaRPr sz="700">
-              <a:solidFill>
-                <a:srgbClr val="595959"/>
-              </a:solidFill>
-              <a:latin typeface="Inter"/>
-              <a:ea typeface="Inter"/>
-              <a:cs typeface="Inter"/>
-              <a:sym typeface="Inter"/>
-            </a:endParaRPr>
-          </a:p>
-        </p:txBody>
-      </p:sp>
-      <p:pic>
-        <p:nvPicPr>
-          <p:cNvPr id="117" name="Google Shape;117;p20" title="SDV_logo-color01 (1).png"/>
-          <p:cNvPicPr preferRelativeResize="0"/>
-          <p:nvPr/>
-        </p:nvPicPr>
-        <p:blipFill>
-          <a:blip r:embed="rId3">
-            <a:alphaModFix/>
-          </a:blip>
-          <a:stretch>
-            <a:fillRect/>
-          </a:stretch>
-        </p:blipFill>
-        <p:spPr>
-          <a:xfrm>
-            <a:off x="225475" y="4757277"/>
-            <a:ext cx="684027" cy="255500"/>
-          </a:xfrm>
-          <a:prstGeom prst="rect">
-            <a:avLst/>
-          </a:prstGeom>
-          <a:noFill/>
-          <a:ln>
-            <a:noFill/>
-          </a:ln>
-        </p:spPr>
-      </p:pic>
-      <p:sp>
-        <p:nvSpPr>
-          <p:cNvPr id="119" name="Google Shape;119;p20"/>
-          <p:cNvSpPr txBox="1"/>
-          <p:nvPr/>
-        </p:nvSpPr>
-        <p:spPr>
-          <a:xfrm>
-            <a:off x="712125" y="628750"/>
-            <a:ext cx="7360200" cy="464700"/>
-          </a:xfrm>
-          <a:prstGeom prst="rect">
-            <a:avLst/>
-          </a:prstGeom>
-          <a:noFill/>
-          <a:ln>
-            <a:noFill/>
-          </a:ln>
-        </p:spPr>
-        <p:txBody>
-          <a:bodyPr spcFirstLastPara="1" wrap="square" lIns="91425" tIns="91425" rIns="91425" bIns="91425" anchor="t" anchorCtr="0">
-            <a:spAutoFit/>
-          </a:bodyPr>
-          <a:lstStyle/>
-          <a:p>
-            <a:pPr marL="0" lvl="0" indent="0" algn="l" rtl="0">
-              <a:spcBef>
-                <a:spcPts val="0"/>
-              </a:spcBef>
-              <a:spcAft>
-                <a:spcPts val="0"/>
-              </a:spcAft>
-              <a:buClr>
-                <a:schemeClr val="dk1"/>
-              </a:buClr>
-              <a:buSzPts val="990"/>
-              <a:buFont typeface="Arial"/>
-              <a:buNone/>
-            </a:pPr>
-            <a:r>
-              <a:rPr lang="en" sz="1820" b="1">
-                <a:solidFill>
-                  <a:srgbClr val="701C7F"/>
-                </a:solidFill>
-                <a:latin typeface="Inter"/>
-                <a:ea typeface="Inter"/>
-                <a:cs typeface="Inter"/>
-                <a:sym typeface="Inter"/>
-              </a:rPr>
-              <a:t>The Business Model</a:t>
-            </a:r>
-            <a:endParaRPr sz="400">
-              <a:latin typeface="Inter ExtraBold"/>
-              <a:ea typeface="Inter ExtraBold"/>
-              <a:cs typeface="Inter ExtraBold"/>
-              <a:sym typeface="Inter ExtraBold"/>
-            </a:endParaRPr>
-          </a:p>
-        </p:txBody>
-      </p:sp>
-      <p:sp>
-        <p:nvSpPr>
-          <p:cNvPr id="120" name="Pentagon 119"/>
-          <p:cNvSpPr/>
-          <p:nvPr/>
-        </p:nvSpPr>
-        <p:spPr>
-          <a:xfrm>
-            <a:off x="731520" y="1828800"/>
-            <a:ext cx="2377440" cy="1005840"/>
-          </a:xfrm>
-          <a:prstGeom prst="homePlate">
-            <a:avLst/>
-          </a:prstGeom>
-          <a:solidFill>
-            <a:srgbClr val="701C7F"/>
-          </a:solidFill>
-          <a:ln w="15875">
-            <a:solidFill>
-              <a:srgbClr val="701C7F"/>
-            </a:solidFill>
-          </a:ln>
-          <a:effectLst/>
-        </p:spPr>
-        <p:style>
-          <a:lnRef idx="1">
-            <a:schemeClr val="accent1"/>
-          </a:lnRef>
-          <a:fillRef idx="3">
-            <a:schemeClr val="accent1"/>
-          </a:fillRef>
-          <a:effectRef idx="2">
-            <a:schemeClr val="accent1"/>
-          </a:effectRef>
-          <a:fontRef idx="minor">
-            <a:schemeClr val="lt1"/>
-          </a:fontRef>
-        </p:style>
-        <p:txBody>
-          <a:bodyPr wrap="square" lIns="54864" tIns="27432" rIns="54864" bIns="27432" rtlCol="0" anchor="ctr"/>
-          <a:lstStyle/>
-          <a:p>
-            <a:pPr algn="ctr"/>
-            <a:r>
-              <a:rPr sz="1800" b="1" i="0">
-                <a:solidFill>
-                  <a:srgbClr val="DB521D"/>
-                </a:solidFill>
-                <a:latin typeface="Inter"/>
-              </a:rPr>
-              <a:t>1  </a:t>
-            </a:r>
-            <a:r>
-              <a:rPr sz="1800" b="1" i="0">
-                <a:solidFill>
-                  <a:srgbClr val="FFFFFF"/>
-                </a:solidFill>
-                <a:latin typeface="Inter"/>
-              </a:rPr>
-              <a:t>Open core</a:t>
-            </a:r>
-          </a:p>
-        </p:txBody>
-      </p:sp>
-      <p:sp>
-        <p:nvSpPr>
-          <p:cNvPr id="121" name="TextBox 120"/>
-          <p:cNvSpPr txBox="1"/>
-          <p:nvPr/>
-        </p:nvSpPr>
-        <p:spPr>
-          <a:xfrm>
-            <a:off x="914400" y="3063240"/>
-            <a:ext cx="2011680" cy="822960"/>
-          </a:xfrm>
-          <a:prstGeom prst="rect">
-            <a:avLst/>
-          </a:prstGeom>
-          <a:noFill/>
-        </p:spPr>
-        <p:txBody>
-          <a:bodyPr wrap="square" lIns="0" tIns="0" rIns="0" bIns="0" anchor="t">
-            <a:spAutoFit/>
-          </a:bodyPr>
-          <a:lstStyle/>
-          <a:p>
-            <a:pPr algn="ctr"/>
-            <a:r>
-              <a:rPr sz="1400" b="0" i="0">
-                <a:solidFill>
-                  <a:srgbClr val="595959"/>
-                </a:solidFill>
-                <a:latin typeface="Inter"/>
-              </a:rPr>
-              <a:t>Eclipse SDV</a:t>
-            </a:r>
-          </a:p>
-          <a:p>
-            <a:pPr algn="ctr"/>
-            <a:r>
-              <a:rPr sz="1400" b="0" i="0">
-                <a:solidFill>
-                  <a:srgbClr val="595959"/>
-                </a:solidFill>
-                <a:latin typeface="Inter"/>
-              </a:rPr>
-              <a:t>free to adopt</a:t>
-            </a:r>
-          </a:p>
-        </p:txBody>
-      </p:sp>
-      <p:sp>
-        <p:nvSpPr>
-          <p:cNvPr id="122" name="Chevron 121"/>
-          <p:cNvSpPr/>
-          <p:nvPr/>
-        </p:nvSpPr>
-        <p:spPr>
-          <a:xfrm>
-            <a:off x="3314700" y="1828800"/>
-            <a:ext cx="2377440" cy="1005840"/>
-          </a:xfrm>
-          <a:prstGeom prst="chevron">
-            <a:avLst/>
-          </a:prstGeom>
-          <a:solidFill>
-            <a:srgbClr val="F6EEF8"/>
-          </a:solidFill>
-          <a:ln w="15875">
-            <a:solidFill>
-              <a:srgbClr val="701C7F"/>
-            </a:solidFill>
-          </a:ln>
-          <a:effectLst/>
-        </p:spPr>
-        <p:style>
-          <a:lnRef idx="1">
-            <a:schemeClr val="accent1"/>
-          </a:lnRef>
-          <a:fillRef idx="3">
-            <a:schemeClr val="accent1"/>
-          </a:fillRef>
-          <a:effectRef idx="2">
-            <a:schemeClr val="accent1"/>
-          </a:effectRef>
-          <a:fontRef idx="minor">
-            <a:schemeClr val="lt1"/>
-          </a:fontRef>
-        </p:style>
-        <p:txBody>
-          <a:bodyPr wrap="square" lIns="54864" tIns="27432" rIns="54864" bIns="27432" rtlCol="0" anchor="ctr"/>
-          <a:lstStyle/>
-          <a:p>
-            <a:pPr algn="ctr"/>
-            <a:r>
-              <a:rPr sz="1800" b="1" i="0">
-                <a:solidFill>
-                  <a:srgbClr val="DB521D"/>
-                </a:solidFill>
-                <a:latin typeface="Inter"/>
-              </a:rPr>
-              <a:t>2  </a:t>
-            </a:r>
-            <a:r>
-              <a:rPr sz="1800" b="1" i="0">
-                <a:solidFill>
-                  <a:srgbClr val="531B4C"/>
-                </a:solidFill>
-                <a:latin typeface="Inter"/>
-              </a:rPr>
-              <a:t>Integrate</a:t>
-            </a:r>
-          </a:p>
-        </p:txBody>
-      </p:sp>
-      <p:sp>
-        <p:nvSpPr>
-          <p:cNvPr id="123" name="TextBox 122"/>
-          <p:cNvSpPr txBox="1"/>
-          <p:nvPr/>
-        </p:nvSpPr>
-        <p:spPr>
-          <a:xfrm>
-            <a:off x="3497580" y="3063240"/>
-            <a:ext cx="2011680" cy="822960"/>
-          </a:xfrm>
-          <a:prstGeom prst="rect">
-            <a:avLst/>
-          </a:prstGeom>
-          <a:noFill/>
-        </p:spPr>
-        <p:txBody>
-          <a:bodyPr wrap="square" lIns="0" tIns="0" rIns="0" bIns="0" anchor="t">
-            <a:spAutoFit/>
-          </a:bodyPr>
-          <a:lstStyle/>
-          <a:p>
-            <a:pPr algn="ctr"/>
-            <a:r>
-              <a:rPr sz="1400" b="0" i="0">
-                <a:solidFill>
-                  <a:srgbClr val="595959"/>
-                </a:solidFill>
-                <a:latin typeface="Inter"/>
-              </a:rPr>
-              <a:t>OEM / Tier-1 porting</a:t>
-            </a:r>
-          </a:p>
-          <a:p>
-            <a:pPr algn="ctr"/>
-            <a:r>
-              <a:rPr sz="1400" b="0" i="0">
-                <a:solidFill>
-                  <a:srgbClr val="595959"/>
-                </a:solidFill>
-                <a:latin typeface="Inter"/>
-              </a:rPr>
-              <a:t>&amp; NCAP validation</a:t>
-            </a:r>
-          </a:p>
-        </p:txBody>
-      </p:sp>
-      <p:sp>
-        <p:nvSpPr>
-          <p:cNvPr id="124" name="Chevron 123"/>
-          <p:cNvSpPr/>
-          <p:nvPr/>
-        </p:nvSpPr>
-        <p:spPr>
-          <a:xfrm>
-            <a:off x="5897880" y="1828800"/>
-            <a:ext cx="2377440" cy="1005840"/>
-          </a:xfrm>
-          <a:prstGeom prst="chevron">
-            <a:avLst/>
-          </a:prstGeom>
-          <a:solidFill>
-            <a:srgbClr val="F6EEF8"/>
-          </a:solidFill>
-          <a:ln w="15875">
-            <a:solidFill>
-              <a:srgbClr val="701C7F"/>
-            </a:solidFill>
-          </a:ln>
-          <a:effectLst/>
-        </p:spPr>
-        <p:style>
-          <a:lnRef idx="1">
-            <a:schemeClr val="accent1"/>
-          </a:lnRef>
-          <a:fillRef idx="3">
-            <a:schemeClr val="accent1"/>
-          </a:fillRef>
-          <a:effectRef idx="2">
-            <a:schemeClr val="accent1"/>
-          </a:effectRef>
-          <a:fontRef idx="minor">
-            <a:schemeClr val="lt1"/>
-          </a:fontRef>
-        </p:style>
-        <p:txBody>
-          <a:bodyPr wrap="square" lIns="54864" tIns="27432" rIns="54864" bIns="27432" rtlCol="0" anchor="ctr"/>
-          <a:lstStyle/>
-          <a:p>
-            <a:pPr algn="ctr"/>
-            <a:r>
-              <a:rPr sz="1800" b="1" i="0">
-                <a:solidFill>
-                  <a:srgbClr val="DB521D"/>
-                </a:solidFill>
-                <a:latin typeface="Inter"/>
-              </a:rPr>
-              <a:t>3  </a:t>
-            </a:r>
-            <a:r>
-              <a:rPr sz="1800" b="1" i="0">
-                <a:solidFill>
-                  <a:srgbClr val="531B4C"/>
-                </a:solidFill>
-                <a:latin typeface="Inter"/>
-              </a:rPr>
-              <a:t>Update</a:t>
-            </a:r>
-          </a:p>
-        </p:txBody>
-      </p:sp>
-      <p:sp>
-        <p:nvSpPr>
-          <p:cNvPr id="125" name="TextBox 124"/>
-          <p:cNvSpPr txBox="1"/>
-          <p:nvPr/>
-        </p:nvSpPr>
-        <p:spPr>
-          <a:xfrm>
-            <a:off x="6080760" y="3063240"/>
-            <a:ext cx="2011680" cy="822960"/>
-          </a:xfrm>
-          <a:prstGeom prst="rect">
-            <a:avLst/>
-          </a:prstGeom>
-          <a:noFill/>
-        </p:spPr>
-        <p:txBody>
-          <a:bodyPr wrap="square" lIns="0" tIns="0" rIns="0" bIns="0" anchor="t">
-            <a:spAutoFit/>
-          </a:bodyPr>
-          <a:lstStyle/>
-          <a:p>
-            <a:pPr algn="ctr"/>
-            <a:r>
-              <a:rPr sz="1400" b="0" i="0">
-                <a:solidFill>
-                  <a:srgbClr val="595959"/>
-                </a:solidFill>
-                <a:latin typeface="Inter"/>
-              </a:rPr>
-              <a:t>OTA features</a:t>
-            </a:r>
-          </a:p>
-          <a:p>
-            <a:pPr algn="ctr"/>
-            <a:r>
-              <a:rPr sz="1400" b="0" i="0">
-                <a:solidFill>
-                  <a:srgbClr val="595959"/>
-                </a:solidFill>
-                <a:latin typeface="Inter"/>
-              </a:rPr>
-              <a:t>&amp; licensing</a:t>
-            </a:r>
-          </a:p>
-        </p:txBody>
-      </p:sp>
-    </p:spTree>
-  </p:cSld>
-  <p:clrMapOvr>
-    <a:masterClrMapping/>
-  </p:clrMapOvr>
-</p:sld>
-</file>
-
-<file path=ppt/slides/slide9.xml><?xml version="1.0" encoding="utf-8"?>
 <p:sld xmlns:a="http://schemas.openxmlformats.org/drawingml/2006/main" xmlns:r="http://schemas.openxmlformats.org/officeDocument/2006/relationships" xmlns:p="http://schemas.openxmlformats.org/presentationml/2006/main">
   <p:cSld>
     <p:spTree>
@@ -16257,6 +17758,92 @@
       </p:grpSpPr>
       <p:sp>
         <p:nvSpPr>
+          <p:cNvPr id="2" name="Titel 1">
+            <a:extLst>
+              <a:ext uri="{FF2B5EF4-FFF2-40B4-BE49-F238E27FC236}">
+                <a16:creationId xmlns:a16="http://schemas.microsoft.com/office/drawing/2014/main" id="{073263D5-6786-06A4-DAF2-5B62BA0CE105}"/>
+              </a:ext>
+            </a:extLst>
+          </p:cNvPr>
+          <p:cNvSpPr>
+            <a:spLocks noGrp="1"/>
+          </p:cNvSpPr>
+          <p:nvPr>
+            <p:ph type="title"/>
+          </p:nvPr>
+        </p:nvSpPr>
+        <p:spPr/>
+        <p:txBody>
+          <a:bodyPr/>
+          <a:lstStyle/>
+          <a:p>
+            <a:endParaRPr lang="de-DE"/>
+          </a:p>
+        </p:txBody>
+      </p:sp>
+      <p:pic>
+        <p:nvPicPr>
+          <p:cNvPr id="4" name="Grafik 3">
+            <a:extLst>
+              <a:ext uri="{FF2B5EF4-FFF2-40B4-BE49-F238E27FC236}">
+                <a16:creationId xmlns:a16="http://schemas.microsoft.com/office/drawing/2014/main" id="{977F6F9F-65F2-F73C-D18C-A93E2A12A317}"/>
+              </a:ext>
+            </a:extLst>
+          </p:cNvPr>
+          <p:cNvPicPr>
+            <a:picLocks noChangeAspect="1"/>
+          </p:cNvPicPr>
+          <p:nvPr/>
+        </p:nvPicPr>
+        <p:blipFill>
+          <a:blip r:embed="rId2"/>
+          <a:srcRect t="4047" b="41817"/>
+          <a:stretch>
+            <a:fillRect/>
+          </a:stretch>
+        </p:blipFill>
+        <p:spPr>
+          <a:xfrm>
+            <a:off x="2519910" y="104104"/>
+            <a:ext cx="4104180" cy="4935292"/>
+          </a:xfrm>
+          <a:prstGeom prst="rect">
+            <a:avLst/>
+          </a:prstGeom>
+        </p:spPr>
+      </p:pic>
+    </p:spTree>
+    <p:extLst>
+      <p:ext uri="{BB962C8B-B14F-4D97-AF65-F5344CB8AC3E}">
+        <p14:creationId xmlns:p14="http://schemas.microsoft.com/office/powerpoint/2010/main" val="4251094193"/>
+      </p:ext>
+    </p:extLst>
+  </p:cSld>
+  <p:clrMapOvr>
+    <a:masterClrMapping/>
+  </p:clrMapOvr>
+</p:sld>
+</file>
+
+<file path=ppt/slides/slide9.xml><?xml version="1.0" encoding="utf-8"?>
+<p:sld xmlns:a="http://schemas.openxmlformats.org/drawingml/2006/main" xmlns:r="http://schemas.openxmlformats.org/officeDocument/2006/relationships" xmlns:p="http://schemas.openxmlformats.org/presentationml/2006/main">
+  <p:cSld>
+    <p:spTree>
+      <p:nvGrpSpPr>
+        <p:cNvPr id="1" name="Shape 99"/>
+        <p:cNvGrpSpPr/>
+        <p:nvPr/>
+      </p:nvGrpSpPr>
+      <p:grpSpPr>
+        <a:xfrm>
+          <a:off x="0" y="0"/>
+          <a:ext cx="0" cy="0"/>
+          <a:chOff x="0" y="0"/>
+          <a:chExt cx="0" cy="0"/>
+        </a:xfrm>
+      </p:grpSpPr>
+      <p:sp>
+        <p:nvSpPr>
           <p:cNvPr id="100" name="Google Shape;100;p18"/>
           <p:cNvSpPr txBox="1"/>
           <p:nvPr/>
@@ -16390,7 +17977,7 @@
                 <a:cs typeface="Inter"/>
                 <a:sym typeface="Inter"/>
               </a:rPr>
-              <a:t>Where We Stand</a:t>
+              <a:t>The Added Value</a:t>
             </a:r>
             <a:endParaRPr sz="400">
               <a:latin typeface="Inter ExtraBold"/>
@@ -16403,96 +17990,26 @@
       </p:sp>
       <p:sp>
         <p:nvSpPr>
-          <p:cNvPr id="104" name="TextBox 103"/>
-          <p:cNvSpPr txBox="1"/>
-          <p:nvPr/>
-        </p:nvSpPr>
-        <p:spPr>
-          <a:xfrm>
-            <a:off x="731520" y="1234440"/>
-            <a:ext cx="3657600" cy="274320"/>
-          </a:xfrm>
-          <a:prstGeom prst="rect">
-            <a:avLst/>
-          </a:prstGeom>
-          <a:noFill/>
-        </p:spPr>
-        <p:txBody>
-          <a:bodyPr wrap="square" lIns="0" tIns="0" rIns="0" bIns="0" anchor="t">
-            <a:spAutoFit/>
-          </a:bodyPr>
-          <a:lstStyle/>
-          <a:p>
-            <a:pPr algn="l"/>
-            <a:r>
-              <a:rPr sz="1200" b="1" i="0">
-                <a:solidFill>
-                  <a:srgbClr val="2E9E5B"/>
-                </a:solidFill>
-                <a:latin typeface="Inter"/>
-              </a:rPr>
-              <a:t>Done</a:t>
-            </a:r>
-          </a:p>
-        </p:txBody>
-      </p:sp>
-      <p:sp>
-        <p:nvSpPr>
-          <p:cNvPr id="105" name="TextBox 104"/>
-          <p:cNvSpPr txBox="1"/>
-          <p:nvPr/>
-        </p:nvSpPr>
-        <p:spPr>
-          <a:xfrm>
-            <a:off x="4572000" y="1234440"/>
-            <a:ext cx="3657600" cy="274320"/>
-          </a:xfrm>
-          <a:prstGeom prst="rect">
-            <a:avLst/>
-          </a:prstGeom>
-          <a:noFill/>
-        </p:spPr>
-        <p:txBody>
-          <a:bodyPr wrap="square" lIns="0" tIns="0" rIns="0" bIns="0" anchor="t">
-            <a:spAutoFit/>
-          </a:bodyPr>
-          <a:lstStyle/>
-          <a:p>
-            <a:pPr algn="l"/>
-            <a:r>
-              <a:rPr sz="1200" b="1" i="0">
-                <a:solidFill>
-                  <a:srgbClr val="DB521D"/>
-                </a:solidFill>
-                <a:latin typeface="Inter"/>
-              </a:rPr>
-              <a:t>Next</a:t>
-            </a:r>
-          </a:p>
-        </p:txBody>
-      </p:sp>
-      <p:sp>
-        <p:nvSpPr>
-          <p:cNvPr id="106" name="Rounded Rectangle 105"/>
+          <p:cNvPr id="104" name="Rounded Rectangle 103"/>
           <p:cNvSpPr/>
           <p:nvPr/>
         </p:nvSpPr>
         <p:spPr>
           <a:xfrm>
-            <a:off x="731520" y="1554480"/>
-            <a:ext cx="3566160" cy="365760"/>
+            <a:off x="731520" y="1325880"/>
+            <a:ext cx="1737360" cy="2514600"/>
           </a:xfrm>
           <a:prstGeom prst="roundRect">
             <a:avLst>
-              <a:gd name="adj" fmla="val 50000"/>
+              <a:gd name="adj" fmla="val 10000"/>
             </a:avLst>
           </a:prstGeom>
           <a:solidFill>
-            <a:srgbClr val="E9F6EE"/>
+            <a:srgbClr val="F6EEF8"/>
           </a:solidFill>
           <a:ln w="15875">
             <a:solidFill>
-              <a:srgbClr val="2E9E5B"/>
+              <a:srgbClr val="701C7F"/>
             </a:solidFill>
           </a:ln>
           <a:effectLst/>
@@ -16515,41 +18032,31 @@
           <a:bodyPr wrap="square" lIns="54864" tIns="27432" rIns="54864" bIns="27432" rtlCol="0" anchor="ctr"/>
           <a:lstStyle/>
           <a:p>
-            <a:pPr algn="l"/>
-            <a:r>
-              <a:rPr sz="1100" b="0" i="0">
-                <a:solidFill>
-                  <a:srgbClr val="531B4C"/>
-                </a:solidFill>
-                <a:latin typeface="Inter"/>
-              </a:rPr>
-              <a:t>✓  Real sensor · AZ3166</a:t>
-            </a:r>
-          </a:p>
-        </p:txBody>
-      </p:sp>
-      <p:sp>
-        <p:nvSpPr>
-          <p:cNvPr id="107" name="Rounded Rectangle 106"/>
+            <a:pPr algn="ctr"/>
+            <a:endParaRPr/>
+          </a:p>
+        </p:txBody>
+      </p:sp>
+      <p:sp>
+        <p:nvSpPr>
+          <p:cNvPr id="105" name="Oval 104"/>
           <p:cNvSpPr/>
           <p:nvPr/>
         </p:nvSpPr>
         <p:spPr>
           <a:xfrm>
-            <a:off x="731520" y="2011680"/>
-            <a:ext cx="3566160" cy="365760"/>
-          </a:xfrm>
-          <a:prstGeom prst="roundRect">
-            <a:avLst>
-              <a:gd name="adj" fmla="val 50000"/>
-            </a:avLst>
+            <a:off x="1188720" y="1554480"/>
+            <a:ext cx="822960" cy="822960"/>
+          </a:xfrm>
+          <a:prstGeom prst="ellipse">
+            <a:avLst/>
           </a:prstGeom>
           <a:solidFill>
-            <a:srgbClr val="E9F6EE"/>
+            <a:srgbClr val="FFFFFF"/>
           </a:solidFill>
           <a:ln w="15875">
             <a:solidFill>
-              <a:srgbClr val="2E9E5B"/>
+              <a:srgbClr val="701C7F"/>
             </a:solidFill>
           </a:ln>
           <a:effectLst/>
@@ -16572,15 +18079,97 @@
           <a:bodyPr wrap="square" lIns="54864" tIns="27432" rIns="54864" bIns="27432" rtlCol="0" anchor="ctr"/>
           <a:lstStyle/>
           <a:p>
-            <a:pPr algn="l"/>
-            <a:r>
-              <a:rPr sz="1100" b="0" i="0">
-                <a:solidFill>
-                  <a:srgbClr val="531B4C"/>
+            <a:pPr algn="ctr"/>
+            <a:r>
+              <a:rPr sz="3600" b="1" i="0">
+                <a:solidFill>
+                  <a:srgbClr val="FFFFFF"/>
                 </a:solidFill>
                 <a:latin typeface="Inter"/>
               </a:rPr>
-              <a:t>✓  Real window · S32K148</a:t>
+              <a:t>🔌</a:t>
+            </a:r>
+          </a:p>
+        </p:txBody>
+      </p:sp>
+      <p:sp>
+        <p:nvSpPr>
+          <p:cNvPr id="106" name="TextBox 105"/>
+          <p:cNvSpPr txBox="1"/>
+          <p:nvPr/>
+        </p:nvSpPr>
+        <p:spPr>
+          <a:xfrm>
+            <a:off x="731520" y="2560320"/>
+            <a:ext cx="1737360" cy="320040"/>
+          </a:xfrm>
+          <a:prstGeom prst="rect">
+            <a:avLst/>
+          </a:prstGeom>
+          <a:noFill/>
+        </p:spPr>
+        <p:txBody>
+          <a:bodyPr wrap="square" lIns="0" tIns="0" rIns="0" bIns="0" anchor="t">
+            <a:spAutoFit/>
+          </a:bodyPr>
+          <a:lstStyle/>
+          <a:p>
+            <a:pPr algn="ctr"/>
+            <a:r>
+              <a:rPr sz="1400" b="1" i="0">
+                <a:solidFill>
+                  <a:srgbClr val="701C7F"/>
+                </a:solidFill>
+                <a:latin typeface="Inter"/>
+              </a:rPr>
+              <a:t>HW-agnostic</a:t>
+            </a:r>
+          </a:p>
+        </p:txBody>
+      </p:sp>
+      <p:sp>
+        <p:nvSpPr>
+          <p:cNvPr id="107" name="TextBox 106"/>
+          <p:cNvSpPr txBox="1"/>
+          <p:nvPr/>
+        </p:nvSpPr>
+        <p:spPr>
+          <a:xfrm>
+            <a:off x="822960" y="2971800"/>
+            <a:ext cx="1554480" cy="640080"/>
+          </a:xfrm>
+          <a:prstGeom prst="rect">
+            <a:avLst/>
+          </a:prstGeom>
+          <a:noFill/>
+        </p:spPr>
+        <p:txBody>
+          <a:bodyPr wrap="square" lIns="0" tIns="0" rIns="0" bIns="0" anchor="t">
+            <a:spAutoFit/>
+          </a:bodyPr>
+          <a:lstStyle/>
+          <a:p>
+            <a:pPr algn="ctr"/>
+            <a:r>
+              <a:rPr sz="1100" b="0" i="0">
+                <a:solidFill>
+                  <a:srgbClr val="595959"/>
+                </a:solidFill>
+                <a:latin typeface="Inter"/>
+              </a:rPr>
+              <a:t>swap sensors,</a:t>
+            </a:r>
+          </a:p>
+          <a:p>
+            <a:pPr algn="ctr"/>
+            <a:r>
+              <a:rPr sz="1100" b="0" i="0">
+                <a:solidFill>
+                  <a:srgbClr val="595959"/>
+                </a:solidFill>
+                <a:latin typeface="Inter"/>
+              </a:rPr>
+              <a:t>keep the logic</a:t>
             </a:r>
           </a:p>
         </p:txBody>
@@ -16593,20 +18182,20 @@
         </p:nvSpPr>
         <p:spPr>
           <a:xfrm>
-            <a:off x="731520" y="2468880"/>
-            <a:ext cx="3566160" cy="365760"/>
+            <a:off x="2651760" y="1325880"/>
+            <a:ext cx="1737360" cy="2514600"/>
           </a:xfrm>
           <a:prstGeom prst="roundRect">
             <a:avLst>
-              <a:gd name="adj" fmla="val 50000"/>
+              <a:gd name="adj" fmla="val 10000"/>
             </a:avLst>
           </a:prstGeom>
           <a:solidFill>
-            <a:srgbClr val="E9F6EE"/>
+            <a:srgbClr val="F6EEF8"/>
           </a:solidFill>
           <a:ln w="15875">
             <a:solidFill>
-              <a:srgbClr val="2E9E5B"/>
+              <a:srgbClr val="701C7F"/>
             </a:solidFill>
           </a:ln>
           <a:effectLst/>
@@ -16629,41 +18218,31 @@
           <a:bodyPr wrap="square" lIns="54864" tIns="27432" rIns="54864" bIns="27432" rtlCol="0" anchor="ctr"/>
           <a:lstStyle/>
           <a:p>
-            <a:pPr algn="l"/>
-            <a:r>
-              <a:rPr sz="1100" b="0" i="0">
-                <a:solidFill>
-                  <a:srgbClr val="531B4C"/>
-                </a:solidFill>
-                <a:latin typeface="Inter"/>
-              </a:rPr>
-              <a:t>✓  Guardian in AutoSD VM · Pi</a:t>
-            </a:r>
-          </a:p>
-        </p:txBody>
-      </p:sp>
-      <p:sp>
-        <p:nvSpPr>
-          <p:cNvPr id="109" name="Rounded Rectangle 108"/>
+            <a:pPr algn="ctr"/>
+            <a:endParaRPr/>
+          </a:p>
+        </p:txBody>
+      </p:sp>
+      <p:sp>
+        <p:nvSpPr>
+          <p:cNvPr id="109" name="Oval 108"/>
           <p:cNvSpPr/>
           <p:nvPr/>
         </p:nvSpPr>
         <p:spPr>
           <a:xfrm>
-            <a:off x="731520" y="2926080"/>
-            <a:ext cx="3566160" cy="365760"/>
-          </a:xfrm>
-          <a:prstGeom prst="roundRect">
-            <a:avLst>
-              <a:gd name="adj" fmla="val 50000"/>
-            </a:avLst>
+            <a:off x="3108960" y="1554480"/>
+            <a:ext cx="822960" cy="822960"/>
+          </a:xfrm>
+          <a:prstGeom prst="ellipse">
+            <a:avLst/>
           </a:prstGeom>
           <a:solidFill>
-            <a:srgbClr val="E9F6EE"/>
+            <a:srgbClr val="FFFFFF"/>
           </a:solidFill>
           <a:ln w="15875">
             <a:solidFill>
-              <a:srgbClr val="2E9E5B"/>
+              <a:srgbClr val="701C7F"/>
             </a:solidFill>
           </a:ln>
           <a:effectLst/>
@@ -16686,41 +18265,123 @@
           <a:bodyPr wrap="square" lIns="54864" tIns="27432" rIns="54864" bIns="27432" rtlCol="0" anchor="ctr"/>
           <a:lstStyle/>
           <a:p>
-            <a:pPr algn="l"/>
-            <a:r>
-              <a:rPr sz="1100" b="0" i="0">
-                <a:solidFill>
-                  <a:srgbClr val="531B4C"/>
+            <a:pPr algn="ctr"/>
+            <a:r>
+              <a:rPr sz="3600" b="1" i="0">
+                <a:solidFill>
+                  <a:srgbClr val="FFFFFF"/>
                 </a:solidFill>
                 <a:latin typeface="Inter"/>
               </a:rPr>
-              <a:t>✓  Fail-safe logic</a:t>
-            </a:r>
-          </a:p>
-        </p:txBody>
-      </p:sp>
-      <p:sp>
-        <p:nvSpPr>
-          <p:cNvPr id="110" name="Rounded Rectangle 109"/>
+              <a:t>🛡️</a:t>
+            </a:r>
+          </a:p>
+        </p:txBody>
+      </p:sp>
+      <p:sp>
+        <p:nvSpPr>
+          <p:cNvPr id="110" name="TextBox 109"/>
+          <p:cNvSpPr txBox="1"/>
+          <p:nvPr/>
+        </p:nvSpPr>
+        <p:spPr>
+          <a:xfrm>
+            <a:off x="2651760" y="2560320"/>
+            <a:ext cx="1737360" cy="320040"/>
+          </a:xfrm>
+          <a:prstGeom prst="rect">
+            <a:avLst/>
+          </a:prstGeom>
+          <a:noFill/>
+        </p:spPr>
+        <p:txBody>
+          <a:bodyPr wrap="square" lIns="0" tIns="0" rIns="0" bIns="0" anchor="t">
+            <a:spAutoFit/>
+          </a:bodyPr>
+          <a:lstStyle/>
+          <a:p>
+            <a:pPr algn="ctr"/>
+            <a:r>
+              <a:rPr sz="1400" b="1" i="0" dirty="0">
+                <a:solidFill>
+                  <a:srgbClr val="701C7F"/>
+                </a:solidFill>
+                <a:latin typeface="Inter"/>
+              </a:rPr>
+              <a:t>Fail-safe</a:t>
+            </a:r>
+          </a:p>
+        </p:txBody>
+      </p:sp>
+      <p:sp>
+        <p:nvSpPr>
+          <p:cNvPr id="111" name="TextBox 110"/>
+          <p:cNvSpPr txBox="1"/>
+          <p:nvPr/>
+        </p:nvSpPr>
+        <p:spPr>
+          <a:xfrm>
+            <a:off x="2743200" y="2971800"/>
+            <a:ext cx="1554480" cy="640080"/>
+          </a:xfrm>
+          <a:prstGeom prst="rect">
+            <a:avLst/>
+          </a:prstGeom>
+          <a:noFill/>
+        </p:spPr>
+        <p:txBody>
+          <a:bodyPr wrap="square" lIns="0" tIns="0" rIns="0" bIns="0" anchor="t">
+            <a:spAutoFit/>
+          </a:bodyPr>
+          <a:lstStyle/>
+          <a:p>
+            <a:pPr algn="ctr"/>
+            <a:r>
+              <a:rPr sz="1100" b="0" i="0" dirty="0">
+                <a:solidFill>
+                  <a:srgbClr val="595959"/>
+                </a:solidFill>
+                <a:latin typeface="Inter"/>
+              </a:rPr>
+              <a:t>sensors disagree?</a:t>
+            </a:r>
+          </a:p>
+          <a:p>
+            <a:pPr algn="ctr"/>
+            <a:r>
+              <a:rPr sz="1100" b="0" i="0" dirty="0">
+                <a:solidFill>
+                  <a:srgbClr val="595959"/>
+                </a:solidFill>
+                <a:latin typeface="Inter"/>
+              </a:rPr>
+              <a:t>cool anyway</a:t>
+            </a:r>
+          </a:p>
+        </p:txBody>
+      </p:sp>
+      <p:sp>
+        <p:nvSpPr>
+          <p:cNvPr id="112" name="Rounded Rectangle 111"/>
           <p:cNvSpPr/>
           <p:nvPr/>
         </p:nvSpPr>
         <p:spPr>
           <a:xfrm>
-            <a:off x="731520" y="3383280"/>
-            <a:ext cx="3566160" cy="365760"/>
+            <a:off x="4572000" y="1325880"/>
+            <a:ext cx="1737360" cy="2514600"/>
           </a:xfrm>
           <a:prstGeom prst="roundRect">
             <a:avLst>
-              <a:gd name="adj" fmla="val 50000"/>
+              <a:gd name="adj" fmla="val 10000"/>
             </a:avLst>
           </a:prstGeom>
           <a:solidFill>
-            <a:srgbClr val="E9F6EE"/>
+            <a:srgbClr val="F6EEF8"/>
           </a:solidFill>
           <a:ln w="15875">
             <a:solidFill>
-              <a:srgbClr val="2E9E5B"/>
+              <a:srgbClr val="701C7F"/>
             </a:solidFill>
           </a:ln>
           <a:effectLst/>
@@ -16743,43 +18404,32 @@
           <a:bodyPr wrap="square" lIns="54864" tIns="27432" rIns="54864" bIns="27432" rtlCol="0" anchor="ctr"/>
           <a:lstStyle/>
           <a:p>
-            <a:pPr algn="l"/>
-            <a:r>
-              <a:rPr sz="1100" b="0" i="0">
-                <a:solidFill>
-                  <a:srgbClr val="531B4C"/>
-                </a:solidFill>
-                <a:latin typeface="Inter"/>
-              </a:rPr>
-              <a:t>✓  Dashboard · Telegram · Gazebo</a:t>
-            </a:r>
-          </a:p>
-        </p:txBody>
-      </p:sp>
-      <p:sp>
-        <p:nvSpPr>
-          <p:cNvPr id="111" name="Rounded Rectangle 110"/>
+            <a:pPr algn="ctr"/>
+            <a:endParaRPr/>
+          </a:p>
+        </p:txBody>
+      </p:sp>
+      <p:sp>
+        <p:nvSpPr>
+          <p:cNvPr id="113" name="Oval 112"/>
           <p:cNvSpPr/>
           <p:nvPr/>
         </p:nvSpPr>
         <p:spPr>
           <a:xfrm>
-            <a:off x="4572000" y="1554480"/>
-            <a:ext cx="3566160" cy="365760"/>
-          </a:xfrm>
-          <a:prstGeom prst="roundRect">
-            <a:avLst>
-              <a:gd name="adj" fmla="val 50000"/>
-            </a:avLst>
+            <a:off x="5029200" y="1554480"/>
+            <a:ext cx="822960" cy="822960"/>
+          </a:xfrm>
+          <a:prstGeom prst="ellipse">
+            <a:avLst/>
           </a:prstGeom>
           <a:solidFill>
             <a:srgbClr val="FFFFFF"/>
           </a:solidFill>
           <a:ln w="15875">
             <a:solidFill>
-              <a:srgbClr val="DB521D"/>
+              <a:srgbClr val="701C7F"/>
             </a:solidFill>
-            <a:prstDash val="dash"/>
           </a:ln>
           <a:effectLst/>
         </p:spPr>
@@ -16801,43 +18451,171 @@
           <a:bodyPr wrap="square" lIns="54864" tIns="27432" rIns="54864" bIns="27432" rtlCol="0" anchor="ctr"/>
           <a:lstStyle/>
           <a:p>
-            <a:pPr algn="l"/>
-            <a:r>
-              <a:rPr sz="1100" b="0" i="0">
-                <a:solidFill>
-                  <a:srgbClr val="531B4C"/>
+            <a:pPr algn="ctr"/>
+            <a:r>
+              <a:rPr sz="3600" b="1" i="0">
+                <a:solidFill>
+                  <a:srgbClr val="FFFFFF"/>
                 </a:solidFill>
                 <a:latin typeface="Inter"/>
               </a:rPr>
-              <a:t>→  openDuT topology switch</a:t>
-            </a:r>
-          </a:p>
-        </p:txBody>
-      </p:sp>
-      <p:sp>
-        <p:nvSpPr>
-          <p:cNvPr id="112" name="Rounded Rectangle 111"/>
+              <a:t>🧪</a:t>
+            </a:r>
+          </a:p>
+        </p:txBody>
+      </p:sp>
+      <p:sp>
+        <p:nvSpPr>
+          <p:cNvPr id="114" name="TextBox 113"/>
+          <p:cNvSpPr txBox="1"/>
+          <p:nvPr/>
+        </p:nvSpPr>
+        <p:spPr>
+          <a:xfrm>
+            <a:off x="4572000" y="2560320"/>
+            <a:ext cx="1737360" cy="320040"/>
+          </a:xfrm>
+          <a:prstGeom prst="rect">
+            <a:avLst/>
+          </a:prstGeom>
+          <a:noFill/>
+        </p:spPr>
+        <p:txBody>
+          <a:bodyPr wrap="square" lIns="0" tIns="0" rIns="0" bIns="0" anchor="t">
+            <a:spAutoFit/>
+          </a:bodyPr>
+          <a:lstStyle/>
+          <a:p>
+            <a:pPr algn="ctr"/>
+            <a:r>
+              <a:rPr sz="1400" b="1" i="0">
+                <a:solidFill>
+                  <a:srgbClr val="701C7F"/>
+                </a:solidFill>
+                <a:latin typeface="Inter"/>
+              </a:rPr>
+              <a:t>Sim-first</a:t>
+            </a:r>
+          </a:p>
+        </p:txBody>
+      </p:sp>
+      <p:sp>
+        <p:nvSpPr>
+          <p:cNvPr id="115" name="TextBox 114"/>
+          <p:cNvSpPr txBox="1"/>
+          <p:nvPr/>
+        </p:nvSpPr>
+        <p:spPr>
+          <a:xfrm>
+            <a:off x="4663440" y="2971800"/>
+            <a:ext cx="1554480" cy="640080"/>
+          </a:xfrm>
+          <a:prstGeom prst="rect">
+            <a:avLst/>
+          </a:prstGeom>
+          <a:noFill/>
+        </p:spPr>
+        <p:txBody>
+          <a:bodyPr wrap="square" lIns="0" tIns="0" rIns="0" bIns="0" anchor="t">
+            <a:spAutoFit/>
+          </a:bodyPr>
+          <a:lstStyle/>
+          <a:p>
+            <a:pPr algn="ctr"/>
+            <a:r>
+              <a:rPr sz="1100" b="0" i="0">
+                <a:solidFill>
+                  <a:srgbClr val="595959"/>
+                </a:solidFill>
+                <a:latin typeface="Inter"/>
+              </a:rPr>
+              <a:t>test without</a:t>
+            </a:r>
+          </a:p>
+          <a:p>
+            <a:pPr algn="ctr"/>
+            <a:r>
+              <a:rPr sz="1100" b="0" i="0">
+                <a:solidFill>
+                  <a:srgbClr val="595959"/>
+                </a:solidFill>
+                <a:latin typeface="Inter"/>
+              </a:rPr>
+              <a:t>hardware</a:t>
+            </a:r>
+          </a:p>
+        </p:txBody>
+      </p:sp>
+      <p:sp>
+        <p:nvSpPr>
+          <p:cNvPr id="116" name="Rounded Rectangle 115"/>
           <p:cNvSpPr/>
           <p:nvPr/>
         </p:nvSpPr>
         <p:spPr>
           <a:xfrm>
-            <a:off x="4572000" y="2011680"/>
-            <a:ext cx="3566160" cy="365760"/>
+            <a:off x="6492240" y="1325880"/>
+            <a:ext cx="1737360" cy="2514600"/>
           </a:xfrm>
           <a:prstGeom prst="roundRect">
             <a:avLst>
-              <a:gd name="adj" fmla="val 50000"/>
+              <a:gd name="adj" fmla="val 10000"/>
             </a:avLst>
+          </a:prstGeom>
+          <a:solidFill>
+            <a:srgbClr val="F6EEF8"/>
+          </a:solidFill>
+          <a:ln w="15875">
+            <a:solidFill>
+              <a:srgbClr val="701C7F"/>
+            </a:solidFill>
+          </a:ln>
+          <a:effectLst/>
+        </p:spPr>
+        <p:style>
+          <a:lnRef idx="1">
+            <a:schemeClr val="accent1"/>
+          </a:lnRef>
+          <a:fillRef idx="3">
+            <a:schemeClr val="accent1"/>
+          </a:fillRef>
+          <a:effectRef idx="2">
+            <a:schemeClr val="accent1"/>
+          </a:effectRef>
+          <a:fontRef idx="minor">
+            <a:schemeClr val="lt1"/>
+          </a:fontRef>
+        </p:style>
+        <p:txBody>
+          <a:bodyPr wrap="square" lIns="54864" tIns="27432" rIns="54864" bIns="27432" rtlCol="0" anchor="ctr"/>
+          <a:lstStyle/>
+          <a:p>
+            <a:pPr algn="ctr"/>
+            <a:endParaRPr/>
+          </a:p>
+        </p:txBody>
+      </p:sp>
+      <p:sp>
+        <p:nvSpPr>
+          <p:cNvPr id="117" name="Oval 116"/>
+          <p:cNvSpPr/>
+          <p:nvPr/>
+        </p:nvSpPr>
+        <p:spPr>
+          <a:xfrm>
+            <a:off x="6949440" y="1554480"/>
+            <a:ext cx="822960" cy="822960"/>
+          </a:xfrm>
+          <a:prstGeom prst="ellipse">
+            <a:avLst/>
           </a:prstGeom>
           <a:solidFill>
             <a:srgbClr val="FFFFFF"/>
           </a:solidFill>
           <a:ln w="15875">
             <a:solidFill>
-              <a:srgbClr val="DB521D"/>
+              <a:srgbClr val="701C7F"/>
             </a:solidFill>
-            <a:prstDash val="dash"/>
           </a:ln>
           <a:effectLst/>
         </p:spPr>
@@ -16859,189 +18637,97 @@
           <a:bodyPr wrap="square" lIns="54864" tIns="27432" rIns="54864" bIns="27432" rtlCol="0" anchor="ctr"/>
           <a:lstStyle/>
           <a:p>
-            <a:pPr algn="l"/>
-            <a:r>
-              <a:rPr sz="1100" b="0" i="0">
-                <a:solidFill>
-                  <a:srgbClr val="531B4C"/>
+            <a:pPr algn="ctr"/>
+            <a:r>
+              <a:rPr sz="3600" b="1" i="0">
+                <a:solidFill>
+                  <a:srgbClr val="FFFFFF"/>
                 </a:solidFill>
                 <a:latin typeface="Inter"/>
               </a:rPr>
-              <a:t>→  Real OpenSOVD CDA</a:t>
-            </a:r>
-          </a:p>
-        </p:txBody>
-      </p:sp>
-      <p:sp>
-        <p:nvSpPr>
-          <p:cNvPr id="113" name="Rounded Rectangle 112"/>
-          <p:cNvSpPr/>
-          <p:nvPr/>
-        </p:nvSpPr>
-        <p:spPr>
-          <a:xfrm>
-            <a:off x="4572000" y="2468880"/>
-            <a:ext cx="3566160" cy="365760"/>
-          </a:xfrm>
-          <a:prstGeom prst="roundRect">
-            <a:avLst>
-              <a:gd name="adj" fmla="val 50000"/>
-            </a:avLst>
-          </a:prstGeom>
-          <a:solidFill>
-            <a:srgbClr val="FFFFFF"/>
-          </a:solidFill>
-          <a:ln w="15875">
-            <a:solidFill>
-              <a:srgbClr val="DB521D"/>
-            </a:solidFill>
-            <a:prstDash val="dash"/>
-          </a:ln>
-          <a:effectLst/>
-        </p:spPr>
-        <p:style>
-          <a:lnRef idx="1">
-            <a:schemeClr val="accent1"/>
-          </a:lnRef>
-          <a:fillRef idx="3">
-            <a:schemeClr val="accent1"/>
-          </a:fillRef>
-          <a:effectRef idx="2">
-            <a:schemeClr val="accent1"/>
-          </a:effectRef>
-          <a:fontRef idx="minor">
-            <a:schemeClr val="lt1"/>
-          </a:fontRef>
-        </p:style>
-        <p:txBody>
-          <a:bodyPr wrap="square" lIns="54864" tIns="27432" rIns="54864" bIns="27432" rtlCol="0" anchor="ctr"/>
+              <a:t>🌐</a:t>
+            </a:r>
+          </a:p>
+        </p:txBody>
+      </p:sp>
+      <p:sp>
+        <p:nvSpPr>
+          <p:cNvPr id="118" name="TextBox 117"/>
+          <p:cNvSpPr txBox="1"/>
+          <p:nvPr/>
+        </p:nvSpPr>
+        <p:spPr>
+          <a:xfrm>
+            <a:off x="6492240" y="2560320"/>
+            <a:ext cx="1737360" cy="320040"/>
+          </a:xfrm>
+          <a:prstGeom prst="rect">
+            <a:avLst/>
+          </a:prstGeom>
+          <a:noFill/>
+        </p:spPr>
+        <p:txBody>
+          <a:bodyPr wrap="square" lIns="0" tIns="0" rIns="0" bIns="0" anchor="t">
+            <a:spAutoFit/>
+          </a:bodyPr>
           <a:lstStyle/>
           <a:p>
-            <a:pPr algn="l"/>
-            <a:r>
-              <a:rPr sz="1100" b="0" i="0">
-                <a:solidFill>
-                  <a:srgbClr val="531B4C"/>
+            <a:pPr algn="ctr"/>
+            <a:r>
+              <a:rPr sz="1400" b="1" i="0">
+                <a:solidFill>
+                  <a:srgbClr val="701C7F"/>
                 </a:solidFill>
                 <a:latin typeface="Inter"/>
               </a:rPr>
-              <a:t>→  Cold warning (branch)</a:t>
-            </a:r>
-          </a:p>
-        </p:txBody>
-      </p:sp>
-      <p:sp>
-        <p:nvSpPr>
-          <p:cNvPr id="114" name="Rounded Rectangle 113"/>
-          <p:cNvSpPr/>
-          <p:nvPr/>
-        </p:nvSpPr>
-        <p:spPr>
-          <a:xfrm>
-            <a:off x="4572000" y="2926080"/>
-            <a:ext cx="3566160" cy="365760"/>
-          </a:xfrm>
-          <a:prstGeom prst="roundRect">
-            <a:avLst>
-              <a:gd name="adj" fmla="val 50000"/>
-            </a:avLst>
-          </a:prstGeom>
-          <a:solidFill>
-            <a:srgbClr val="FFFFFF"/>
-          </a:solidFill>
-          <a:ln w="15875">
-            <a:solidFill>
-              <a:srgbClr val="DB521D"/>
-            </a:solidFill>
-            <a:prstDash val="dash"/>
-          </a:ln>
-          <a:effectLst/>
-        </p:spPr>
-        <p:style>
-          <a:lnRef idx="1">
-            <a:schemeClr val="accent1"/>
-          </a:lnRef>
-          <a:fillRef idx="3">
-            <a:schemeClr val="accent1"/>
-          </a:fillRef>
-          <a:effectRef idx="2">
-            <a:schemeClr val="accent1"/>
-          </a:effectRef>
-          <a:fontRef idx="minor">
-            <a:schemeClr val="lt1"/>
-          </a:fontRef>
-        </p:style>
-        <p:txBody>
-          <a:bodyPr wrap="square" lIns="54864" tIns="27432" rIns="54864" bIns="27432" rtlCol="0" anchor="ctr"/>
+              <a:t>Open stack</a:t>
+            </a:r>
+          </a:p>
+        </p:txBody>
+      </p:sp>
+      <p:sp>
+        <p:nvSpPr>
+          <p:cNvPr id="119" name="TextBox 118"/>
+          <p:cNvSpPr txBox="1"/>
+          <p:nvPr/>
+        </p:nvSpPr>
+        <p:spPr>
+          <a:xfrm>
+            <a:off x="6583680" y="2971800"/>
+            <a:ext cx="1554480" cy="640080"/>
+          </a:xfrm>
+          <a:prstGeom prst="rect">
+            <a:avLst/>
+          </a:prstGeom>
+          <a:noFill/>
+        </p:spPr>
+        <p:txBody>
+          <a:bodyPr wrap="square" lIns="0" tIns="0" rIns="0" bIns="0" anchor="t">
+            <a:spAutoFit/>
+          </a:bodyPr>
           <a:lstStyle/>
           <a:p>
-            <a:pPr algn="l"/>
+            <a:pPr algn="ctr"/>
             <a:r>
               <a:rPr sz="1100" b="0" i="0">
                 <a:solidFill>
-                  <a:srgbClr val="531B4C"/>
+                  <a:srgbClr val="595959"/>
                 </a:solidFill>
                 <a:latin typeface="Inter"/>
               </a:rPr>
-              <a:t>→  Humidity in decision</a:t>
-            </a:r>
-          </a:p>
-        </p:txBody>
-      </p:sp>
-      <p:sp>
-        <p:nvSpPr>
-          <p:cNvPr id="115" name="Rounded Rectangle 114"/>
-          <p:cNvSpPr/>
-          <p:nvPr/>
-        </p:nvSpPr>
-        <p:spPr>
-          <a:xfrm>
-            <a:off x="4572000" y="3383280"/>
-            <a:ext cx="3566160" cy="365760"/>
-          </a:xfrm>
-          <a:prstGeom prst="roundRect">
-            <a:avLst>
-              <a:gd name="adj" fmla="val 50000"/>
-            </a:avLst>
-          </a:prstGeom>
-          <a:solidFill>
-            <a:srgbClr val="FFFFFF"/>
-          </a:solidFill>
-          <a:ln w="15875">
-            <a:solidFill>
-              <a:srgbClr val="DB521D"/>
-            </a:solidFill>
-            <a:prstDash val="dash"/>
-          </a:ln>
-          <a:effectLst/>
-        </p:spPr>
-        <p:style>
-          <a:lnRef idx="1">
-            <a:schemeClr val="accent1"/>
-          </a:lnRef>
-          <a:fillRef idx="3">
-            <a:schemeClr val="accent1"/>
-          </a:fillRef>
-          <a:effectRef idx="2">
-            <a:schemeClr val="accent1"/>
-          </a:effectRef>
-          <a:fontRef idx="minor">
-            <a:schemeClr val="lt1"/>
-          </a:fontRef>
-        </p:style>
-        <p:txBody>
-          <a:bodyPr wrap="square" lIns="54864" tIns="27432" rIns="54864" bIns="27432" rtlCol="0" anchor="ctr"/>
-          <a:lstStyle/>
-          <a:p>
-            <a:pPr algn="l"/>
+              <a:t>Eclipse SDV</a:t>
+            </a:r>
+          </a:p>
+          <a:p>
+            <a:pPr algn="ctr"/>
             <a:r>
               <a:rPr sz="1100" b="0" i="0">
                 <a:solidFill>
-                  <a:srgbClr val="531B4C"/>
+                  <a:srgbClr val="595959"/>
                 </a:solidFill>
                 <a:latin typeface="Inter"/>
               </a:rPr>
-              <a:t>→  Confidence &amp; trend</a:t>
+              <a:t>inside</a:t>
             </a:r>
           </a:p>
         </p:txBody>
